--- a/reporting/slides/Zigbert-Kickoff-Sussex-Emmaus.pptx
+++ b/reporting/slides/Zigbert-Kickoff-Sussex-Emmaus.pptx
@@ -10,8 +10,6 @@
     <p:sldId id="258" r:id="rId9"/>
     <p:sldId id="259" r:id="rId10"/>
     <p:sldId id="260" r:id="rId11"/>
-    <p:sldId id="261" r:id="rId12"/>
-    <p:sldId id="262" r:id="rId13"/>
   </p:sldIdLst>
   <p:sldSz cx="12191695" cy="6858000" type="screen4x3"/>
   <p:notesSz cx="6858000" cy="9144000"/>
@@ -3178,7 +3176,7 @@
         </p:nvSpPr>
         <p:spPr>
           <a:xfrm>
-            <a:off x="841248" y="2240280"/>
+            <a:off x="841248" y="2514600"/>
             <a:ext cx="10874959" cy="274320"/>
           </a:xfrm>
           <a:prstGeom prst="rect">
@@ -3207,7 +3205,7 @@
                 </a:solidFill>
                 <a:latin typeface="Poppins"/>
               </a:rPr>
-              <a:t>PILOT ONBOARDING</a:t>
+              <a:t>WHERE WE'RE UP TO</a:t>
             </a:r>
           </a:p>
         </p:txBody>
@@ -3220,7 +3218,7 @@
         </p:nvSpPr>
         <p:spPr>
           <a:xfrm>
-            <a:off x="841248" y="2651760"/>
+            <a:off x="841248" y="2926080"/>
             <a:ext cx="9509760" cy="1371600"/>
           </a:xfrm>
           <a:prstGeom prst="rect">
@@ -3262,7 +3260,7 @@
         </p:nvSpPr>
         <p:spPr>
           <a:xfrm>
-            <a:off x="841248" y="3886200"/>
+            <a:off x="841248" y="4160520"/>
             <a:ext cx="8778240" cy="914400"/>
           </a:xfrm>
           <a:prstGeom prst="rect">
@@ -3291,7 +3289,7 @@
                 </a:solidFill>
                 <a:latin typeface="Inter"/>
               </a:rPr>
-              <a:t>Where we have got to, what happens next, and the three things we need from you.</a:t>
+              <a:t>What happens between now and you having the dashboard.</a:t>
             </a:r>
           </a:p>
         </p:txBody>
@@ -3469,7 +3467,7 @@
                 </a:solidFill>
                 <a:latin typeface="Poppins"/>
               </a:rPr>
-              <a:t>WHERE WE ARE</a:t>
+              <a:t>THE PLAN</a:t>
             </a:r>
           </a:p>
         </p:txBody>
@@ -3511,7 +3509,7 @@
                 </a:solidFill>
                 <a:latin typeface="Poppins"/>
               </a:rPr>
-              <a:t>You have given us everything we need</a:t>
+              <a:t>Roles in, dashboard out, six weeks</a:t>
             </a:r>
           </a:p>
         </p:txBody>
@@ -3553,7 +3551,7 @@
                 </a:solidFill>
                 <a:latin typeface="Inter"/>
               </a:rPr>
-              <a:t>You sent over every Sussex Emmaus role with its full-time-equivalent salary and job level, which is the whole of what we need to build the dashboard. One thing to clarify on the levels, coming up in a moment.</a:t>
+              <a:t>You've sent us everything we need, so the next bit is on us. Three short calls across the six weeks and that's it.</a:t>
             </a:r>
           </a:p>
         </p:txBody>
@@ -3566,8 +3564,1160 @@
         </p:nvSpPr>
         <p:spPr>
           <a:xfrm>
-            <a:off x="658368" y="1938528"/>
-            <a:ext cx="3472586" cy="3017520"/>
+            <a:off x="859536" y="2343658"/>
+            <a:ext cx="2036003" cy="19050"/>
+          </a:xfrm>
+          <a:prstGeom prst="rect">
+            <a:avLst/>
+          </a:prstGeom>
+          <a:solidFill>
+            <a:srgbClr val="E8D8CE"/>
+          </a:solidFill>
+          <a:ln>
+            <a:noFill/>
+          </a:ln>
+          <a:effectLst/>
+        </p:spPr>
+        <p:style>
+          <a:lnRef idx="1">
+            <a:schemeClr val="accent1"/>
+          </a:lnRef>
+          <a:fillRef idx="3">
+            <a:schemeClr val="accent1"/>
+          </a:fillRef>
+          <a:effectRef idx="2">
+            <a:schemeClr val="accent1"/>
+          </a:effectRef>
+          <a:fontRef idx="minor">
+            <a:schemeClr val="lt1"/>
+          </a:fontRef>
+        </p:style>
+        <p:txBody>
+          <a:bodyPr rtlCol="0" anchor="ctr"/>
+          <a:lstStyle/>
+          <a:p>
+            <a:pPr algn="ctr"/>
+          </a:p>
+        </p:txBody>
+      </p:sp>
+      <p:sp>
+        <p:nvSpPr>
+          <p:cNvPr id="8" name="Oval 7"/>
+          <p:cNvSpPr/>
+          <p:nvPr/>
+        </p:nvSpPr>
+        <p:spPr>
+          <a:xfrm>
+            <a:off x="658368" y="2249424"/>
+            <a:ext cx="201168" cy="201168"/>
+          </a:xfrm>
+          <a:prstGeom prst="ellipse">
+            <a:avLst/>
+          </a:prstGeom>
+          <a:solidFill>
+            <a:srgbClr val="2F7D5B"/>
+          </a:solidFill>
+          <a:ln>
+            <a:noFill/>
+          </a:ln>
+          <a:effectLst/>
+        </p:spPr>
+        <p:style>
+          <a:lnRef idx="1">
+            <a:schemeClr val="accent1"/>
+          </a:lnRef>
+          <a:fillRef idx="3">
+            <a:schemeClr val="accent1"/>
+          </a:fillRef>
+          <a:effectRef idx="2">
+            <a:schemeClr val="accent1"/>
+          </a:effectRef>
+          <a:fontRef idx="minor">
+            <a:schemeClr val="lt1"/>
+          </a:fontRef>
+        </p:style>
+        <p:txBody>
+          <a:bodyPr rtlCol="0" anchor="ctr"/>
+          <a:lstStyle/>
+          <a:p>
+            <a:pPr algn="ctr"/>
+          </a:p>
+        </p:txBody>
+      </p:sp>
+      <p:sp>
+        <p:nvSpPr>
+          <p:cNvPr id="9" name="TextBox 8"/>
+          <p:cNvSpPr txBox="1"/>
+          <p:nvPr/>
+        </p:nvSpPr>
+        <p:spPr>
+          <a:xfrm>
+            <a:off x="658368" y="2633472"/>
+            <a:ext cx="1926275" cy="219456"/>
+          </a:xfrm>
+          <a:prstGeom prst="rect">
+            <a:avLst/>
+          </a:prstGeom>
+          <a:noFill/>
+        </p:spPr>
+        <p:txBody>
+          <a:bodyPr wrap="square" anchor="t" lIns="0" rIns="0" tIns="0" bIns="0">
+            <a:noAutofit/>
+          </a:bodyPr>
+          <a:lstStyle/>
+          <a:p>
+            <a:pPr algn="l">
+              <a:lnSpc>
+                <a:spcPct val="115000"/>
+              </a:lnSpc>
+              <a:spcAft>
+                <a:spcPts val="0"/>
+              </a:spcAft>
+            </a:pPr>
+            <a:r>
+              <a:rPr sz="950" b="1">
+                <a:solidFill>
+                  <a:srgbClr val="2F7D5B"/>
+                </a:solidFill>
+                <a:latin typeface="Poppins"/>
+              </a:rPr>
+              <a:t>DONE</a:t>
+            </a:r>
+          </a:p>
+        </p:txBody>
+      </p:sp>
+      <p:sp>
+        <p:nvSpPr>
+          <p:cNvPr id="10" name="TextBox 9"/>
+          <p:cNvSpPr txBox="1"/>
+          <p:nvPr/>
+        </p:nvSpPr>
+        <p:spPr>
+          <a:xfrm>
+            <a:off x="658368" y="2889504"/>
+            <a:ext cx="1926275" cy="310896"/>
+          </a:xfrm>
+          <a:prstGeom prst="rect">
+            <a:avLst/>
+          </a:prstGeom>
+          <a:noFill/>
+        </p:spPr>
+        <p:txBody>
+          <a:bodyPr wrap="square" anchor="t" lIns="0" rIns="0" tIns="0" bIns="0">
+            <a:noAutofit/>
+          </a:bodyPr>
+          <a:lstStyle/>
+          <a:p>
+            <a:pPr algn="l">
+              <a:lnSpc>
+                <a:spcPct val="115000"/>
+              </a:lnSpc>
+              <a:spcAft>
+                <a:spcPts val="0"/>
+              </a:spcAft>
+            </a:pPr>
+            <a:r>
+              <a:rPr sz="1600" b="1">
+                <a:solidFill>
+                  <a:srgbClr val="121C2B"/>
+                </a:solidFill>
+                <a:latin typeface="Poppins"/>
+              </a:rPr>
+              <a:t>Roles received</a:t>
+            </a:r>
+          </a:p>
+        </p:txBody>
+      </p:sp>
+      <p:sp>
+        <p:nvSpPr>
+          <p:cNvPr id="11" name="TextBox 10"/>
+          <p:cNvSpPr txBox="1"/>
+          <p:nvPr/>
+        </p:nvSpPr>
+        <p:spPr>
+          <a:xfrm>
+            <a:off x="658368" y="3566160"/>
+            <a:ext cx="1926275" cy="1920240"/>
+          </a:xfrm>
+          <a:prstGeom prst="rect">
+            <a:avLst/>
+          </a:prstGeom>
+          <a:noFill/>
+        </p:spPr>
+        <p:txBody>
+          <a:bodyPr wrap="square" anchor="t" lIns="0" rIns="0" tIns="0" bIns="0">
+            <a:noAutofit/>
+          </a:bodyPr>
+          <a:lstStyle/>
+          <a:p>
+            <a:pPr algn="l">
+              <a:lnSpc>
+                <a:spcPct val="132000"/>
+              </a:lnSpc>
+              <a:spcAft>
+                <a:spcPts val="0"/>
+              </a:spcAft>
+            </a:pPr>
+            <a:r>
+              <a:rPr sz="1050" b="0">
+                <a:solidFill>
+                  <a:srgbClr val="6B7280"/>
+                </a:solidFill>
+                <a:latin typeface="Inter"/>
+              </a:rPr>
+              <a:t>FTE salary and level for every one.</a:t>
+            </a:r>
+          </a:p>
+        </p:txBody>
+      </p:sp>
+      <p:sp>
+        <p:nvSpPr>
+          <p:cNvPr id="12" name="Rectangle 11"/>
+          <p:cNvSpPr/>
+          <p:nvPr/>
+        </p:nvSpPr>
+        <p:spPr>
+          <a:xfrm>
+            <a:off x="3096707" y="2343658"/>
+            <a:ext cx="2036003" cy="19050"/>
+          </a:xfrm>
+          <a:prstGeom prst="rect">
+            <a:avLst/>
+          </a:prstGeom>
+          <a:solidFill>
+            <a:srgbClr val="E8D8CE"/>
+          </a:solidFill>
+          <a:ln>
+            <a:noFill/>
+          </a:ln>
+          <a:effectLst/>
+        </p:spPr>
+        <p:style>
+          <a:lnRef idx="1">
+            <a:schemeClr val="accent1"/>
+          </a:lnRef>
+          <a:fillRef idx="3">
+            <a:schemeClr val="accent1"/>
+          </a:fillRef>
+          <a:effectRef idx="2">
+            <a:schemeClr val="accent1"/>
+          </a:effectRef>
+          <a:fontRef idx="minor">
+            <a:schemeClr val="lt1"/>
+          </a:fontRef>
+        </p:style>
+        <p:txBody>
+          <a:bodyPr rtlCol="0" anchor="ctr"/>
+          <a:lstStyle/>
+          <a:p>
+            <a:pPr algn="ctr"/>
+          </a:p>
+        </p:txBody>
+      </p:sp>
+      <p:sp>
+        <p:nvSpPr>
+          <p:cNvPr id="13" name="Oval 12"/>
+          <p:cNvSpPr/>
+          <p:nvPr/>
+        </p:nvSpPr>
+        <p:spPr>
+          <a:xfrm>
+            <a:off x="2895539" y="2249424"/>
+            <a:ext cx="201168" cy="201168"/>
+          </a:xfrm>
+          <a:prstGeom prst="ellipse">
+            <a:avLst/>
+          </a:prstGeom>
+          <a:solidFill>
+            <a:srgbClr val="C9785A"/>
+          </a:solidFill>
+          <a:ln>
+            <a:noFill/>
+          </a:ln>
+          <a:effectLst/>
+        </p:spPr>
+        <p:style>
+          <a:lnRef idx="1">
+            <a:schemeClr val="accent1"/>
+          </a:lnRef>
+          <a:fillRef idx="3">
+            <a:schemeClr val="accent1"/>
+          </a:fillRef>
+          <a:effectRef idx="2">
+            <a:schemeClr val="accent1"/>
+          </a:effectRef>
+          <a:fontRef idx="minor">
+            <a:schemeClr val="lt1"/>
+          </a:fontRef>
+        </p:style>
+        <p:txBody>
+          <a:bodyPr rtlCol="0" anchor="ctr"/>
+          <a:lstStyle/>
+          <a:p>
+            <a:pPr algn="ctr"/>
+          </a:p>
+        </p:txBody>
+      </p:sp>
+      <p:sp>
+        <p:nvSpPr>
+          <p:cNvPr id="14" name="TextBox 13"/>
+          <p:cNvSpPr txBox="1"/>
+          <p:nvPr/>
+        </p:nvSpPr>
+        <p:spPr>
+          <a:xfrm>
+            <a:off x="2895539" y="2633472"/>
+            <a:ext cx="1926275" cy="219456"/>
+          </a:xfrm>
+          <a:prstGeom prst="rect">
+            <a:avLst/>
+          </a:prstGeom>
+          <a:noFill/>
+        </p:spPr>
+        <p:txBody>
+          <a:bodyPr wrap="square" anchor="t" lIns="0" rIns="0" tIns="0" bIns="0">
+            <a:noAutofit/>
+          </a:bodyPr>
+          <a:lstStyle/>
+          <a:p>
+            <a:pPr algn="l">
+              <a:lnSpc>
+                <a:spcPct val="115000"/>
+              </a:lnSpc>
+              <a:spcAft>
+                <a:spcPts val="0"/>
+              </a:spcAft>
+            </a:pPr>
+            <a:r>
+              <a:rPr sz="950" b="1">
+                <a:solidFill>
+                  <a:srgbClr val="C9785A"/>
+                </a:solidFill>
+                <a:latin typeface="Poppins"/>
+              </a:rPr>
+              <a:t>THIS WEEK</a:t>
+            </a:r>
+          </a:p>
+        </p:txBody>
+      </p:sp>
+      <p:sp>
+        <p:nvSpPr>
+          <p:cNvPr id="15" name="TextBox 14"/>
+          <p:cNvSpPr txBox="1"/>
+          <p:nvPr/>
+        </p:nvSpPr>
+        <p:spPr>
+          <a:xfrm>
+            <a:off x="2895539" y="2889504"/>
+            <a:ext cx="1926275" cy="310896"/>
+          </a:xfrm>
+          <a:prstGeom prst="rect">
+            <a:avLst/>
+          </a:prstGeom>
+          <a:noFill/>
+        </p:spPr>
+        <p:txBody>
+          <a:bodyPr wrap="square" anchor="t" lIns="0" rIns="0" tIns="0" bIns="0">
+            <a:noAutofit/>
+          </a:bodyPr>
+          <a:lstStyle/>
+          <a:p>
+            <a:pPr algn="l">
+              <a:lnSpc>
+                <a:spcPct val="115000"/>
+              </a:lnSpc>
+              <a:spcAft>
+                <a:spcPts val="0"/>
+              </a:spcAft>
+            </a:pPr>
+            <a:r>
+              <a:rPr sz="1600" b="1">
+                <a:solidFill>
+                  <a:srgbClr val="121C2B"/>
+                </a:solidFill>
+                <a:latin typeface="Poppins"/>
+              </a:rPr>
+              <a:t>We benchmark</a:t>
+            </a:r>
+          </a:p>
+        </p:txBody>
+      </p:sp>
+      <p:sp>
+        <p:nvSpPr>
+          <p:cNvPr id="16" name="TextBox 15"/>
+          <p:cNvSpPr txBox="1"/>
+          <p:nvPr/>
+        </p:nvSpPr>
+        <p:spPr>
+          <a:xfrm>
+            <a:off x="2895539" y="3566160"/>
+            <a:ext cx="1926275" cy="1920240"/>
+          </a:xfrm>
+          <a:prstGeom prst="rect">
+            <a:avLst/>
+          </a:prstGeom>
+          <a:noFill/>
+        </p:spPr>
+        <p:txBody>
+          <a:bodyPr wrap="square" anchor="t" lIns="0" rIns="0" tIns="0" bIns="0">
+            <a:noAutofit/>
+          </a:bodyPr>
+          <a:lstStyle/>
+          <a:p>
+            <a:pPr algn="l">
+              <a:lnSpc>
+                <a:spcPct val="132000"/>
+              </a:lnSpc>
+              <a:spcAft>
+                <a:spcPts val="0"/>
+              </a:spcAft>
+            </a:pPr>
+            <a:r>
+              <a:rPr sz="1050" b="0">
+                <a:solidFill>
+                  <a:srgbClr val="6B7280"/>
+                </a:solidFill>
+                <a:latin typeface="Inter"/>
+              </a:rPr>
+              <a:t>Matched on function, level, industry and location, then checked by one of our specialists.</a:t>
+            </a:r>
+          </a:p>
+        </p:txBody>
+      </p:sp>
+      <p:sp>
+        <p:nvSpPr>
+          <p:cNvPr id="17" name="Rectangle 16"/>
+          <p:cNvSpPr/>
+          <p:nvPr/>
+        </p:nvSpPr>
+        <p:spPr>
+          <a:xfrm>
+            <a:off x="5333878" y="2343658"/>
+            <a:ext cx="2036003" cy="19050"/>
+          </a:xfrm>
+          <a:prstGeom prst="rect">
+            <a:avLst/>
+          </a:prstGeom>
+          <a:solidFill>
+            <a:srgbClr val="E8D8CE"/>
+          </a:solidFill>
+          <a:ln>
+            <a:noFill/>
+          </a:ln>
+          <a:effectLst/>
+        </p:spPr>
+        <p:style>
+          <a:lnRef idx="1">
+            <a:schemeClr val="accent1"/>
+          </a:lnRef>
+          <a:fillRef idx="3">
+            <a:schemeClr val="accent1"/>
+          </a:fillRef>
+          <a:effectRef idx="2">
+            <a:schemeClr val="accent1"/>
+          </a:effectRef>
+          <a:fontRef idx="minor">
+            <a:schemeClr val="lt1"/>
+          </a:fontRef>
+        </p:style>
+        <p:txBody>
+          <a:bodyPr rtlCol="0" anchor="ctr"/>
+          <a:lstStyle/>
+          <a:p>
+            <a:pPr algn="ctr"/>
+          </a:p>
+        </p:txBody>
+      </p:sp>
+      <p:sp>
+        <p:nvSpPr>
+          <p:cNvPr id="18" name="Oval 17"/>
+          <p:cNvSpPr/>
+          <p:nvPr/>
+        </p:nvSpPr>
+        <p:spPr>
+          <a:xfrm>
+            <a:off x="5132710" y="2249424"/>
+            <a:ext cx="201168" cy="201168"/>
+          </a:xfrm>
+          <a:prstGeom prst="ellipse">
+            <a:avLst/>
+          </a:prstGeom>
+          <a:solidFill>
+            <a:srgbClr val="7285A5"/>
+          </a:solidFill>
+          <a:ln>
+            <a:noFill/>
+          </a:ln>
+          <a:effectLst/>
+        </p:spPr>
+        <p:style>
+          <a:lnRef idx="1">
+            <a:schemeClr val="accent1"/>
+          </a:lnRef>
+          <a:fillRef idx="3">
+            <a:schemeClr val="accent1"/>
+          </a:fillRef>
+          <a:effectRef idx="2">
+            <a:schemeClr val="accent1"/>
+          </a:effectRef>
+          <a:fontRef idx="minor">
+            <a:schemeClr val="lt1"/>
+          </a:fontRef>
+        </p:style>
+        <p:txBody>
+          <a:bodyPr rtlCol="0" anchor="ctr"/>
+          <a:lstStyle/>
+          <a:p>
+            <a:pPr algn="ctr"/>
+          </a:p>
+        </p:txBody>
+      </p:sp>
+      <p:sp>
+        <p:nvSpPr>
+          <p:cNvPr id="19" name="TextBox 18"/>
+          <p:cNvSpPr txBox="1"/>
+          <p:nvPr/>
+        </p:nvSpPr>
+        <p:spPr>
+          <a:xfrm>
+            <a:off x="5132710" y="2633472"/>
+            <a:ext cx="1926275" cy="219456"/>
+          </a:xfrm>
+          <a:prstGeom prst="rect">
+            <a:avLst/>
+          </a:prstGeom>
+          <a:noFill/>
+        </p:spPr>
+        <p:txBody>
+          <a:bodyPr wrap="square" anchor="t" lIns="0" rIns="0" tIns="0" bIns="0">
+            <a:noAutofit/>
+          </a:bodyPr>
+          <a:lstStyle/>
+          <a:p>
+            <a:pPr algn="l">
+              <a:lnSpc>
+                <a:spcPct val="115000"/>
+              </a:lnSpc>
+              <a:spcAft>
+                <a:spcPts val="0"/>
+              </a:spcAft>
+            </a:pPr>
+            <a:r>
+              <a:rPr sz="950" b="1">
+                <a:solidFill>
+                  <a:srgbClr val="7285A5"/>
+                </a:solidFill>
+                <a:latin typeface="Poppins"/>
+              </a:rPr>
+              <a:t>WEEK 2 · 14 SEPT</a:t>
+            </a:r>
+          </a:p>
+        </p:txBody>
+      </p:sp>
+      <p:sp>
+        <p:nvSpPr>
+          <p:cNvPr id="20" name="TextBox 19"/>
+          <p:cNvSpPr txBox="1"/>
+          <p:nvPr/>
+        </p:nvSpPr>
+        <p:spPr>
+          <a:xfrm>
+            <a:off x="5132710" y="2889504"/>
+            <a:ext cx="1926275" cy="310896"/>
+          </a:xfrm>
+          <a:prstGeom prst="rect">
+            <a:avLst/>
+          </a:prstGeom>
+          <a:noFill/>
+        </p:spPr>
+        <p:txBody>
+          <a:bodyPr wrap="square" anchor="t" lIns="0" rIns="0" tIns="0" bIns="0">
+            <a:noAutofit/>
+          </a:bodyPr>
+          <a:lstStyle/>
+          <a:p>
+            <a:pPr algn="l">
+              <a:lnSpc>
+                <a:spcPct val="115000"/>
+              </a:lnSpc>
+              <a:spcAft>
+                <a:spcPts val="0"/>
+              </a:spcAft>
+            </a:pPr>
+            <a:r>
+              <a:rPr sz="1600" b="1">
+                <a:solidFill>
+                  <a:srgbClr val="121C2B"/>
+                </a:solidFill>
+                <a:latin typeface="Poppins"/>
+              </a:rPr>
+              <a:t>First look</a:t>
+            </a:r>
+          </a:p>
+        </p:txBody>
+      </p:sp>
+      <p:sp>
+        <p:nvSpPr>
+          <p:cNvPr id="21" name="TextBox 20"/>
+          <p:cNvSpPr txBox="1"/>
+          <p:nvPr/>
+        </p:nvSpPr>
+        <p:spPr>
+          <a:xfrm>
+            <a:off x="5132710" y="3218688"/>
+            <a:ext cx="1926275" cy="237744"/>
+          </a:xfrm>
+          <a:prstGeom prst="rect">
+            <a:avLst/>
+          </a:prstGeom>
+          <a:noFill/>
+        </p:spPr>
+        <p:txBody>
+          <a:bodyPr wrap="square" anchor="t" lIns="0" rIns="0" tIns="0" bIns="0">
+            <a:noAutofit/>
+          </a:bodyPr>
+          <a:lstStyle/>
+          <a:p>
+            <a:pPr algn="l">
+              <a:lnSpc>
+                <a:spcPct val="115000"/>
+              </a:lnSpc>
+              <a:spcAft>
+                <a:spcPts val="0"/>
+              </a:spcAft>
+            </a:pPr>
+            <a:r>
+              <a:rPr sz="1050" b="1">
+                <a:solidFill>
+                  <a:srgbClr val="B0603F"/>
+                </a:solidFill>
+                <a:latin typeface="Poppins"/>
+              </a:rPr>
+              <a:t>30-45 min</a:t>
+            </a:r>
+          </a:p>
+        </p:txBody>
+      </p:sp>
+      <p:sp>
+        <p:nvSpPr>
+          <p:cNvPr id="22" name="TextBox 21"/>
+          <p:cNvSpPr txBox="1"/>
+          <p:nvPr/>
+        </p:nvSpPr>
+        <p:spPr>
+          <a:xfrm>
+            <a:off x="5132710" y="3566160"/>
+            <a:ext cx="1926275" cy="1920240"/>
+          </a:xfrm>
+          <a:prstGeom prst="rect">
+            <a:avLst/>
+          </a:prstGeom>
+          <a:noFill/>
+        </p:spPr>
+        <p:txBody>
+          <a:bodyPr wrap="square" anchor="t" lIns="0" rIns="0" tIns="0" bIns="0">
+            <a:noAutofit/>
+          </a:bodyPr>
+          <a:lstStyle/>
+          <a:p>
+            <a:pPr algn="l">
+              <a:lnSpc>
+                <a:spcPct val="132000"/>
+              </a:lnSpc>
+              <a:spcAft>
+                <a:spcPts val="0"/>
+              </a:spcAft>
+            </a:pPr>
+            <a:r>
+              <a:rPr sz="1050" b="0">
+                <a:solidFill>
+                  <a:srgbClr val="6B7280"/>
+                </a:solidFill>
+                <a:latin typeface="Inter"/>
+              </a:rPr>
+              <a:t>Your data's in by then. We watch how you use it without chipping in, then talk through anything that needs it.</a:t>
+            </a:r>
+          </a:p>
+        </p:txBody>
+      </p:sp>
+      <p:sp>
+        <p:nvSpPr>
+          <p:cNvPr id="23" name="Rectangle 22"/>
+          <p:cNvSpPr/>
+          <p:nvPr/>
+        </p:nvSpPr>
+        <p:spPr>
+          <a:xfrm>
+            <a:off x="7571049" y="2343658"/>
+            <a:ext cx="2036003" cy="19050"/>
+          </a:xfrm>
+          <a:prstGeom prst="rect">
+            <a:avLst/>
+          </a:prstGeom>
+          <a:solidFill>
+            <a:srgbClr val="E8D8CE"/>
+          </a:solidFill>
+          <a:ln>
+            <a:noFill/>
+          </a:ln>
+          <a:effectLst/>
+        </p:spPr>
+        <p:style>
+          <a:lnRef idx="1">
+            <a:schemeClr val="accent1"/>
+          </a:lnRef>
+          <a:fillRef idx="3">
+            <a:schemeClr val="accent1"/>
+          </a:fillRef>
+          <a:effectRef idx="2">
+            <a:schemeClr val="accent1"/>
+          </a:effectRef>
+          <a:fontRef idx="minor">
+            <a:schemeClr val="lt1"/>
+          </a:fontRef>
+        </p:style>
+        <p:txBody>
+          <a:bodyPr rtlCol="0" anchor="ctr"/>
+          <a:lstStyle/>
+          <a:p>
+            <a:pPr algn="ctr"/>
+          </a:p>
+        </p:txBody>
+      </p:sp>
+      <p:sp>
+        <p:nvSpPr>
+          <p:cNvPr id="24" name="Oval 23"/>
+          <p:cNvSpPr/>
+          <p:nvPr/>
+        </p:nvSpPr>
+        <p:spPr>
+          <a:xfrm>
+            <a:off x="7369881" y="2249424"/>
+            <a:ext cx="201168" cy="201168"/>
+          </a:xfrm>
+          <a:prstGeom prst="ellipse">
+            <a:avLst/>
+          </a:prstGeom>
+          <a:solidFill>
+            <a:srgbClr val="7285A5"/>
+          </a:solidFill>
+          <a:ln>
+            <a:noFill/>
+          </a:ln>
+          <a:effectLst/>
+        </p:spPr>
+        <p:style>
+          <a:lnRef idx="1">
+            <a:schemeClr val="accent1"/>
+          </a:lnRef>
+          <a:fillRef idx="3">
+            <a:schemeClr val="accent1"/>
+          </a:fillRef>
+          <a:effectRef idx="2">
+            <a:schemeClr val="accent1"/>
+          </a:effectRef>
+          <a:fontRef idx="minor">
+            <a:schemeClr val="lt1"/>
+          </a:fontRef>
+        </p:style>
+        <p:txBody>
+          <a:bodyPr rtlCol="0" anchor="ctr"/>
+          <a:lstStyle/>
+          <a:p>
+            <a:pPr algn="ctr"/>
+          </a:p>
+        </p:txBody>
+      </p:sp>
+      <p:sp>
+        <p:nvSpPr>
+          <p:cNvPr id="25" name="TextBox 24"/>
+          <p:cNvSpPr txBox="1"/>
+          <p:nvPr/>
+        </p:nvSpPr>
+        <p:spPr>
+          <a:xfrm>
+            <a:off x="7369881" y="2633472"/>
+            <a:ext cx="1926275" cy="219456"/>
+          </a:xfrm>
+          <a:prstGeom prst="rect">
+            <a:avLst/>
+          </a:prstGeom>
+          <a:noFill/>
+        </p:spPr>
+        <p:txBody>
+          <a:bodyPr wrap="square" anchor="t" lIns="0" rIns="0" tIns="0" bIns="0">
+            <a:noAutofit/>
+          </a:bodyPr>
+          <a:lstStyle/>
+          <a:p>
+            <a:pPr algn="l">
+              <a:lnSpc>
+                <a:spcPct val="115000"/>
+              </a:lnSpc>
+              <a:spcAft>
+                <a:spcPts val="0"/>
+              </a:spcAft>
+            </a:pPr>
+            <a:r>
+              <a:rPr sz="950" b="1">
+                <a:solidFill>
+                  <a:srgbClr val="7285A5"/>
+                </a:solidFill>
+                <a:latin typeface="Poppins"/>
+              </a:rPr>
+              <a:t>WEEK 3 OR 4</a:t>
+            </a:r>
+          </a:p>
+        </p:txBody>
+      </p:sp>
+      <p:sp>
+        <p:nvSpPr>
+          <p:cNvPr id="26" name="TextBox 25"/>
+          <p:cNvSpPr txBox="1"/>
+          <p:nvPr/>
+        </p:nvSpPr>
+        <p:spPr>
+          <a:xfrm>
+            <a:off x="7369881" y="2889504"/>
+            <a:ext cx="1926275" cy="310896"/>
+          </a:xfrm>
+          <a:prstGeom prst="rect">
+            <a:avLst/>
+          </a:prstGeom>
+          <a:noFill/>
+        </p:spPr>
+        <p:txBody>
+          <a:bodyPr wrap="square" anchor="t" lIns="0" rIns="0" tIns="0" bIns="0">
+            <a:noAutofit/>
+          </a:bodyPr>
+          <a:lstStyle/>
+          <a:p>
+            <a:pPr algn="l">
+              <a:lnSpc>
+                <a:spcPct val="115000"/>
+              </a:lnSpc>
+              <a:spcAft>
+                <a:spcPts val="0"/>
+              </a:spcAft>
+            </a:pPr>
+            <a:r>
+              <a:rPr sz="1600" b="1">
+                <a:solidFill>
+                  <a:srgbClr val="121C2B"/>
+                </a:solidFill>
+                <a:latin typeface="Poppins"/>
+              </a:rPr>
+              <a:t>Check-in</a:t>
+            </a:r>
+          </a:p>
+        </p:txBody>
+      </p:sp>
+      <p:sp>
+        <p:nvSpPr>
+          <p:cNvPr id="27" name="TextBox 26"/>
+          <p:cNvSpPr txBox="1"/>
+          <p:nvPr/>
+        </p:nvSpPr>
+        <p:spPr>
+          <a:xfrm>
+            <a:off x="7369881" y="3218688"/>
+            <a:ext cx="1926275" cy="237744"/>
+          </a:xfrm>
+          <a:prstGeom prst="rect">
+            <a:avLst/>
+          </a:prstGeom>
+          <a:noFill/>
+        </p:spPr>
+        <p:txBody>
+          <a:bodyPr wrap="square" anchor="t" lIns="0" rIns="0" tIns="0" bIns="0">
+            <a:noAutofit/>
+          </a:bodyPr>
+          <a:lstStyle/>
+          <a:p>
+            <a:pPr algn="l">
+              <a:lnSpc>
+                <a:spcPct val="115000"/>
+              </a:lnSpc>
+              <a:spcAft>
+                <a:spcPts val="0"/>
+              </a:spcAft>
+            </a:pPr>
+            <a:r>
+              <a:rPr sz="1050" b="1">
+                <a:solidFill>
+                  <a:srgbClr val="B0603F"/>
+                </a:solidFill>
+                <a:latin typeface="Poppins"/>
+              </a:rPr>
+              <a:t>30 min</a:t>
+            </a:r>
+          </a:p>
+        </p:txBody>
+      </p:sp>
+      <p:sp>
+        <p:nvSpPr>
+          <p:cNvPr id="28" name="TextBox 27"/>
+          <p:cNvSpPr txBox="1"/>
+          <p:nvPr/>
+        </p:nvSpPr>
+        <p:spPr>
+          <a:xfrm>
+            <a:off x="7369881" y="3566160"/>
+            <a:ext cx="1926275" cy="1920240"/>
+          </a:xfrm>
+          <a:prstGeom prst="rect">
+            <a:avLst/>
+          </a:prstGeom>
+          <a:noFill/>
+        </p:spPr>
+        <p:txBody>
+          <a:bodyPr wrap="square" anchor="t" lIns="0" rIns="0" tIns="0" bIns="0">
+            <a:noAutofit/>
+          </a:bodyPr>
+          <a:lstStyle/>
+          <a:p>
+            <a:pPr algn="l">
+              <a:lnSpc>
+                <a:spcPct val="132000"/>
+              </a:lnSpc>
+              <a:spcAft>
+                <a:spcPts val="0"/>
+              </a:spcAft>
+            </a:pPr>
+            <a:r>
+              <a:rPr sz="1050" b="0">
+                <a:solidFill>
+                  <a:srgbClr val="6B7280"/>
+                </a:solidFill>
+                <a:latin typeface="Inter"/>
+              </a:rPr>
+              <a:t>How you've got on, any questions, and anything we can change to fit how you're using it.</a:t>
+            </a:r>
+          </a:p>
+        </p:txBody>
+      </p:sp>
+      <p:sp>
+        <p:nvSpPr>
+          <p:cNvPr id="29" name="Oval 28"/>
+          <p:cNvSpPr/>
+          <p:nvPr/>
+        </p:nvSpPr>
+        <p:spPr>
+          <a:xfrm>
+            <a:off x="9607052" y="2249424"/>
+            <a:ext cx="201168" cy="201168"/>
+          </a:xfrm>
+          <a:prstGeom prst="ellipse">
+            <a:avLst/>
+          </a:prstGeom>
+          <a:solidFill>
+            <a:srgbClr val="121C2B"/>
+          </a:solidFill>
+          <a:ln>
+            <a:noFill/>
+          </a:ln>
+          <a:effectLst/>
+        </p:spPr>
+        <p:style>
+          <a:lnRef idx="1">
+            <a:schemeClr val="accent1"/>
+          </a:lnRef>
+          <a:fillRef idx="3">
+            <a:schemeClr val="accent1"/>
+          </a:fillRef>
+          <a:effectRef idx="2">
+            <a:schemeClr val="accent1"/>
+          </a:effectRef>
+          <a:fontRef idx="minor">
+            <a:schemeClr val="lt1"/>
+          </a:fontRef>
+        </p:style>
+        <p:txBody>
+          <a:bodyPr rtlCol="0" anchor="ctr"/>
+          <a:lstStyle/>
+          <a:p>
+            <a:pPr algn="ctr"/>
+          </a:p>
+        </p:txBody>
+      </p:sp>
+      <p:sp>
+        <p:nvSpPr>
+          <p:cNvPr id="30" name="TextBox 29"/>
+          <p:cNvSpPr txBox="1"/>
+          <p:nvPr/>
+        </p:nvSpPr>
+        <p:spPr>
+          <a:xfrm>
+            <a:off x="9607052" y="2633472"/>
+            <a:ext cx="1926275" cy="219456"/>
+          </a:xfrm>
+          <a:prstGeom prst="rect">
+            <a:avLst/>
+          </a:prstGeom>
+          <a:noFill/>
+        </p:spPr>
+        <p:txBody>
+          <a:bodyPr wrap="square" anchor="t" lIns="0" rIns="0" tIns="0" bIns="0">
+            <a:noAutofit/>
+          </a:bodyPr>
+          <a:lstStyle/>
+          <a:p>
+            <a:pPr algn="l">
+              <a:lnSpc>
+                <a:spcPct val="115000"/>
+              </a:lnSpc>
+              <a:spcAft>
+                <a:spcPts val="0"/>
+              </a:spcAft>
+            </a:pPr>
+            <a:r>
+              <a:rPr sz="950" b="1">
+                <a:solidFill>
+                  <a:srgbClr val="121C2B"/>
+                </a:solidFill>
+                <a:latin typeface="Poppins"/>
+              </a:rPr>
+              <a:t>WEEK 5 OR 6</a:t>
+            </a:r>
+          </a:p>
+        </p:txBody>
+      </p:sp>
+      <p:sp>
+        <p:nvSpPr>
+          <p:cNvPr id="31" name="TextBox 30"/>
+          <p:cNvSpPr txBox="1"/>
+          <p:nvPr/>
+        </p:nvSpPr>
+        <p:spPr>
+          <a:xfrm>
+            <a:off x="9607052" y="2889504"/>
+            <a:ext cx="1926275" cy="310896"/>
+          </a:xfrm>
+          <a:prstGeom prst="rect">
+            <a:avLst/>
+          </a:prstGeom>
+          <a:noFill/>
+        </p:spPr>
+        <p:txBody>
+          <a:bodyPr wrap="square" anchor="t" lIns="0" rIns="0" tIns="0" bIns="0">
+            <a:noAutofit/>
+          </a:bodyPr>
+          <a:lstStyle/>
+          <a:p>
+            <a:pPr algn="l">
+              <a:lnSpc>
+                <a:spcPct val="115000"/>
+              </a:lnSpc>
+              <a:spcAft>
+                <a:spcPts val="0"/>
+              </a:spcAft>
+            </a:pPr>
+            <a:r>
+              <a:rPr sz="1600" b="1">
+                <a:solidFill>
+                  <a:srgbClr val="121C2B"/>
+                </a:solidFill>
+                <a:latin typeface="Poppins"/>
+              </a:rPr>
+              <a:t>Final call</a:t>
+            </a:r>
+          </a:p>
+        </p:txBody>
+      </p:sp>
+      <p:sp>
+        <p:nvSpPr>
+          <p:cNvPr id="32" name="TextBox 31"/>
+          <p:cNvSpPr txBox="1"/>
+          <p:nvPr/>
+        </p:nvSpPr>
+        <p:spPr>
+          <a:xfrm>
+            <a:off x="9607052" y="3218688"/>
+            <a:ext cx="1926275" cy="237744"/>
+          </a:xfrm>
+          <a:prstGeom prst="rect">
+            <a:avLst/>
+          </a:prstGeom>
+          <a:noFill/>
+        </p:spPr>
+        <p:txBody>
+          <a:bodyPr wrap="square" anchor="t" lIns="0" rIns="0" tIns="0" bIns="0">
+            <a:noAutofit/>
+          </a:bodyPr>
+          <a:lstStyle/>
+          <a:p>
+            <a:pPr algn="l">
+              <a:lnSpc>
+                <a:spcPct val="115000"/>
+              </a:lnSpc>
+              <a:spcAft>
+                <a:spcPts val="0"/>
+              </a:spcAft>
+            </a:pPr>
+            <a:r>
+              <a:rPr sz="1050" b="1">
+                <a:solidFill>
+                  <a:srgbClr val="B0603F"/>
+                </a:solidFill>
+                <a:latin typeface="Poppins"/>
+              </a:rPr>
+              <a:t>30 min</a:t>
+            </a:r>
+          </a:p>
+        </p:txBody>
+      </p:sp>
+      <p:sp>
+        <p:nvSpPr>
+          <p:cNvPr id="33" name="TextBox 32"/>
+          <p:cNvSpPr txBox="1"/>
+          <p:nvPr/>
+        </p:nvSpPr>
+        <p:spPr>
+          <a:xfrm>
+            <a:off x="9607052" y="3566160"/>
+            <a:ext cx="1926275" cy="1920240"/>
+          </a:xfrm>
+          <a:prstGeom prst="rect">
+            <a:avLst/>
+          </a:prstGeom>
+          <a:noFill/>
+        </p:spPr>
+        <p:txBody>
+          <a:bodyPr wrap="square" anchor="t" lIns="0" rIns="0" tIns="0" bIns="0">
+            <a:noAutofit/>
+          </a:bodyPr>
+          <a:lstStyle/>
+          <a:p>
+            <a:pPr algn="l">
+              <a:lnSpc>
+                <a:spcPct val="132000"/>
+              </a:lnSpc>
+              <a:spcAft>
+                <a:spcPts val="0"/>
+              </a:spcAft>
+            </a:pPr>
+            <a:r>
+              <a:rPr sz="1050" b="0">
+                <a:solidFill>
+                  <a:srgbClr val="6B7280"/>
+                </a:solidFill>
+                <a:latin typeface="Inter"/>
+              </a:rPr>
+              <a:t>How it went, and what we should do differently.</a:t>
+            </a:r>
+          </a:p>
+        </p:txBody>
+      </p:sp>
+      <p:sp>
+        <p:nvSpPr>
+          <p:cNvPr id="34" name="Rectangle 33"/>
+          <p:cNvSpPr/>
+          <p:nvPr/>
+        </p:nvSpPr>
+        <p:spPr>
+          <a:xfrm>
+            <a:off x="658368" y="4956048"/>
+            <a:ext cx="10874959" cy="841248"/>
           </a:xfrm>
           <a:prstGeom prst="rect">
             <a:avLst/>
@@ -3606,20 +4756,20 @@
       </p:sp>
       <p:sp>
         <p:nvSpPr>
-          <p:cNvPr id="8" name="Rectangle 7"/>
+          <p:cNvPr id="35" name="Rectangle 34"/>
           <p:cNvSpPr/>
           <p:nvPr/>
         </p:nvSpPr>
         <p:spPr>
           <a:xfrm>
-            <a:off x="658368" y="1938528"/>
-            <a:ext cx="3472586" cy="50800"/>
+            <a:off x="658368" y="4956048"/>
+            <a:ext cx="50800" cy="841248"/>
           </a:xfrm>
           <a:prstGeom prst="rect">
             <a:avLst/>
           </a:prstGeom>
           <a:solidFill>
-            <a:srgbClr val="2F7D5B"/>
+            <a:srgbClr val="C9785A"/>
           </a:solidFill>
           <a:ln>
             <a:noFill/>
@@ -3650,14 +4800,14 @@
       </p:sp>
       <p:sp>
         <p:nvSpPr>
-          <p:cNvPr id="9" name="TextBox 8"/>
+          <p:cNvPr id="36" name="TextBox 35"/>
           <p:cNvSpPr txBox="1"/>
           <p:nvPr/>
         </p:nvSpPr>
         <p:spPr>
           <a:xfrm>
-            <a:off x="896112" y="2194560"/>
-            <a:ext cx="2997098" cy="201168"/>
+            <a:off x="950976" y="5221224"/>
+            <a:ext cx="10607040" cy="292608"/>
           </a:xfrm>
           <a:prstGeom prst="rect">
             <a:avLst/>
@@ -3679,220 +4829,27 @@
               </a:spcAft>
             </a:pPr>
             <a:r>
-              <a:rPr sz="950" b="1">
-                <a:solidFill>
-                  <a:srgbClr val="2F7D5B"/>
-                </a:solidFill>
-                <a:latin typeface="Poppins"/>
-              </a:rPr>
-              <a:t>DONE</a:t>
-            </a:r>
-          </a:p>
-        </p:txBody>
-      </p:sp>
-      <p:sp>
-        <p:nvSpPr>
-          <p:cNvPr id="10" name="TextBox 9"/>
-          <p:cNvSpPr txBox="1"/>
-          <p:nvPr/>
-        </p:nvSpPr>
-        <p:spPr>
-          <a:xfrm>
-            <a:off x="896112" y="2468880"/>
-            <a:ext cx="2997098" cy="365760"/>
-          </a:xfrm>
-          <a:prstGeom prst="rect">
-            <a:avLst/>
-          </a:prstGeom>
-          <a:noFill/>
-        </p:spPr>
-        <p:txBody>
-          <a:bodyPr wrap="square" anchor="t" lIns="0" rIns="0" tIns="0" bIns="0">
-            <a:noAutofit/>
-          </a:bodyPr>
-          <a:lstStyle/>
-          <a:p>
-            <a:pPr algn="l">
-              <a:lnSpc>
-                <a:spcPct val="110000"/>
-              </a:lnSpc>
-              <a:spcAft>
-                <a:spcPts val="0"/>
-              </a:spcAft>
-            </a:pPr>
-            <a:r>
-              <a:rPr sz="1700" b="1">
-                <a:solidFill>
-                  <a:srgbClr val="121C2B"/>
-                </a:solidFill>
-                <a:latin typeface="Poppins"/>
-              </a:rPr>
-              <a:t>Roles received</a:t>
-            </a:r>
-          </a:p>
-        </p:txBody>
-      </p:sp>
-      <p:sp>
-        <p:nvSpPr>
-          <p:cNvPr id="11" name="TextBox 10"/>
-          <p:cNvSpPr txBox="1"/>
-          <p:nvPr/>
-        </p:nvSpPr>
-        <p:spPr>
-          <a:xfrm>
-            <a:off x="896112" y="2871216"/>
-            <a:ext cx="2997098" cy="1901952"/>
-          </a:xfrm>
-          <a:prstGeom prst="rect">
-            <a:avLst/>
-          </a:prstGeom>
-          <a:noFill/>
-        </p:spPr>
-        <p:txBody>
-          <a:bodyPr wrap="square" anchor="t" lIns="0" rIns="0" tIns="0" bIns="0">
-            <a:noAutofit/>
-          </a:bodyPr>
-          <a:lstStyle/>
-          <a:p>
-            <a:pPr algn="l">
-              <a:lnSpc>
-                <a:spcPct val="128000"/>
-              </a:lnSpc>
-              <a:spcAft>
-                <a:spcPts val="700"/>
-              </a:spcAft>
-            </a:pPr>
-            <a:r>
-              <a:rPr sz="1150" b="0">
+              <a:rPr sz="1250" b="0">
                 <a:solidFill>
                   <a:srgbClr val="6B7280"/>
                 </a:solidFill>
                 <a:latin typeface="Inter"/>
               </a:rPr>
-              <a:t>Every Sussex Emmaus role, with FTE salary and job level.</a:t>
-            </a:r>
-          </a:p>
-          <a:p>
-            <a:pPr algn="l">
-              <a:lnSpc>
-                <a:spcPct val="128000"/>
-              </a:lnSpc>
-              <a:spcAft>
-                <a:spcPts val="700"/>
-              </a:spcAft>
-            </a:pPr>
-            <a:r>
-              <a:rPr sz="1150" b="0">
-                <a:solidFill>
-                  <a:srgbClr val="6B7280"/>
-                </a:solidFill>
-                <a:latin typeface="Inter"/>
-              </a:rPr>
-              <a:t>Nothing further needed to start.</a:t>
-            </a:r>
-          </a:p>
-        </p:txBody>
-      </p:sp>
-      <p:sp>
-        <p:nvSpPr>
-          <p:cNvPr id="12" name="Rectangle 11"/>
-          <p:cNvSpPr/>
-          <p:nvPr/>
-        </p:nvSpPr>
-        <p:spPr>
-          <a:xfrm>
-            <a:off x="4359554" y="1938528"/>
-            <a:ext cx="3472586" cy="3017520"/>
-          </a:xfrm>
-          <a:prstGeom prst="rect">
-            <a:avLst/>
-          </a:prstGeom>
-          <a:solidFill>
-            <a:srgbClr val="FFFFFF"/>
-          </a:solidFill>
-          <a:ln w="12700">
-            <a:solidFill>
-              <a:srgbClr val="E7E0D4"/>
-            </a:solidFill>
-          </a:ln>
-          <a:effectLst/>
-        </p:spPr>
-        <p:style>
-          <a:lnRef idx="1">
-            <a:schemeClr val="accent1"/>
-          </a:lnRef>
-          <a:fillRef idx="3">
-            <a:schemeClr val="accent1"/>
-          </a:fillRef>
-          <a:effectRef idx="2">
-            <a:schemeClr val="accent1"/>
-          </a:effectRef>
-          <a:fontRef idx="minor">
-            <a:schemeClr val="lt1"/>
-          </a:fontRef>
-        </p:style>
-        <p:txBody>
-          <a:bodyPr rtlCol="0" anchor="ctr"/>
-          <a:lstStyle/>
-          <a:p>
-            <a:pPr algn="ctr"/>
-          </a:p>
-        </p:txBody>
-      </p:sp>
-      <p:sp>
-        <p:nvSpPr>
-          <p:cNvPr id="13" name="Rectangle 12"/>
-          <p:cNvSpPr/>
-          <p:nvPr/>
-        </p:nvSpPr>
-        <p:spPr>
-          <a:xfrm>
-            <a:off x="4359554" y="1938528"/>
-            <a:ext cx="3472586" cy="50800"/>
-          </a:xfrm>
-          <a:prstGeom prst="rect">
-            <a:avLst/>
-          </a:prstGeom>
-          <a:solidFill>
-            <a:srgbClr val="C9785A"/>
-          </a:solidFill>
-          <a:ln>
-            <a:noFill/>
-          </a:ln>
-          <a:effectLst/>
-        </p:spPr>
-        <p:style>
-          <a:lnRef idx="1">
-            <a:schemeClr val="accent1"/>
-          </a:lnRef>
-          <a:fillRef idx="3">
-            <a:schemeClr val="accent1"/>
-          </a:fillRef>
-          <a:effectRef idx="2">
-            <a:schemeClr val="accent1"/>
-          </a:effectRef>
-          <a:fontRef idx="minor">
-            <a:schemeClr val="lt1"/>
-          </a:fontRef>
-        </p:style>
-        <p:txBody>
-          <a:bodyPr rtlCol="0" anchor="ctr"/>
-          <a:lstStyle/>
-          <a:p>
-            <a:pPr algn="ctr"/>
-          </a:p>
-        </p:txBody>
-      </p:sp>
-      <p:sp>
-        <p:nvSpPr>
-          <p:cNvPr id="14" name="TextBox 13"/>
+              <a:t>About an hour and a half on calls across the whole six weeks. Everything else is us.</a:t>
+            </a:r>
+          </a:p>
+        </p:txBody>
+      </p:sp>
+      <p:sp>
+        <p:nvSpPr>
+          <p:cNvPr id="37" name="TextBox 36"/>
           <p:cNvSpPr txBox="1"/>
           <p:nvPr/>
         </p:nvSpPr>
         <p:spPr>
           <a:xfrm>
-            <a:off x="4597298" y="2194560"/>
-            <a:ext cx="2997098" cy="201168"/>
+            <a:off x="658368" y="6455664"/>
+            <a:ext cx="6400800" cy="219456"/>
           </a:xfrm>
           <a:prstGeom prst="rect">
             <a:avLst/>
@@ -3914,386 +4871,6 @@
               </a:spcAft>
             </a:pPr>
             <a:r>
-              <a:rPr sz="950" b="1">
-                <a:solidFill>
-                  <a:srgbClr val="C9785A"/>
-                </a:solidFill>
-                <a:latin typeface="Poppins"/>
-              </a:rPr>
-              <a:t>THIS WEEK</a:t>
-            </a:r>
-          </a:p>
-        </p:txBody>
-      </p:sp>
-      <p:sp>
-        <p:nvSpPr>
-          <p:cNvPr id="15" name="TextBox 14"/>
-          <p:cNvSpPr txBox="1"/>
-          <p:nvPr/>
-        </p:nvSpPr>
-        <p:spPr>
-          <a:xfrm>
-            <a:off x="4597298" y="2468880"/>
-            <a:ext cx="2997098" cy="365760"/>
-          </a:xfrm>
-          <a:prstGeom prst="rect">
-            <a:avLst/>
-          </a:prstGeom>
-          <a:noFill/>
-        </p:spPr>
-        <p:txBody>
-          <a:bodyPr wrap="square" anchor="t" lIns="0" rIns="0" tIns="0" bIns="0">
-            <a:noAutofit/>
-          </a:bodyPr>
-          <a:lstStyle/>
-          <a:p>
-            <a:pPr algn="l">
-              <a:lnSpc>
-                <a:spcPct val="110000"/>
-              </a:lnSpc>
-              <a:spcAft>
-                <a:spcPts val="0"/>
-              </a:spcAft>
-            </a:pPr>
-            <a:r>
-              <a:rPr sz="1700" b="1">
-                <a:solidFill>
-                  <a:srgbClr val="121C2B"/>
-                </a:solidFill>
-                <a:latin typeface="Poppins"/>
-              </a:rPr>
-              <a:t>Benchmarking</a:t>
-            </a:r>
-          </a:p>
-        </p:txBody>
-      </p:sp>
-      <p:sp>
-        <p:nvSpPr>
-          <p:cNvPr id="16" name="TextBox 15"/>
-          <p:cNvSpPr txBox="1"/>
-          <p:nvPr/>
-        </p:nvSpPr>
-        <p:spPr>
-          <a:xfrm>
-            <a:off x="4597298" y="2871216"/>
-            <a:ext cx="2997098" cy="1901952"/>
-          </a:xfrm>
-          <a:prstGeom prst="rect">
-            <a:avLst/>
-          </a:prstGeom>
-          <a:noFill/>
-        </p:spPr>
-        <p:txBody>
-          <a:bodyPr wrap="square" anchor="t" lIns="0" rIns="0" tIns="0" bIns="0">
-            <a:noAutofit/>
-          </a:bodyPr>
-          <a:lstStyle/>
-          <a:p>
-            <a:pPr algn="l">
-              <a:lnSpc>
-                <a:spcPct val="128000"/>
-              </a:lnSpc>
-              <a:spcAft>
-                <a:spcPts val="700"/>
-              </a:spcAft>
-            </a:pPr>
-            <a:r>
-              <a:rPr sz="1150" b="0">
-                <a:solidFill>
-                  <a:srgbClr val="6B7280"/>
-                </a:solidFill>
-                <a:latin typeface="Inter"/>
-              </a:rPr>
-              <a:t>Every role matched and benchmarked against the database.</a:t>
-            </a:r>
-          </a:p>
-          <a:p>
-            <a:pPr algn="l">
-              <a:lnSpc>
-                <a:spcPct val="128000"/>
-              </a:lnSpc>
-              <a:spcAft>
-                <a:spcPts val="700"/>
-              </a:spcAft>
-            </a:pPr>
-            <a:r>
-              <a:rPr sz="1150" b="0">
-                <a:solidFill>
-                  <a:srgbClr val="6B7280"/>
-                </a:solidFill>
-                <a:latin typeface="Inter"/>
-              </a:rPr>
-              <a:t>Then reviewed by hand, role by role.</a:t>
-            </a:r>
-          </a:p>
-        </p:txBody>
-      </p:sp>
-      <p:sp>
-        <p:nvSpPr>
-          <p:cNvPr id="17" name="Rectangle 16"/>
-          <p:cNvSpPr/>
-          <p:nvPr/>
-        </p:nvSpPr>
-        <p:spPr>
-          <a:xfrm>
-            <a:off x="8060740" y="1938528"/>
-            <a:ext cx="3472586" cy="3017520"/>
-          </a:xfrm>
-          <a:prstGeom prst="rect">
-            <a:avLst/>
-          </a:prstGeom>
-          <a:solidFill>
-            <a:srgbClr val="FFFFFF"/>
-          </a:solidFill>
-          <a:ln w="12700">
-            <a:solidFill>
-              <a:srgbClr val="E7E0D4"/>
-            </a:solidFill>
-          </a:ln>
-          <a:effectLst/>
-        </p:spPr>
-        <p:style>
-          <a:lnRef idx="1">
-            <a:schemeClr val="accent1"/>
-          </a:lnRef>
-          <a:fillRef idx="3">
-            <a:schemeClr val="accent1"/>
-          </a:fillRef>
-          <a:effectRef idx="2">
-            <a:schemeClr val="accent1"/>
-          </a:effectRef>
-          <a:fontRef idx="minor">
-            <a:schemeClr val="lt1"/>
-          </a:fontRef>
-        </p:style>
-        <p:txBody>
-          <a:bodyPr rtlCol="0" anchor="ctr"/>
-          <a:lstStyle/>
-          <a:p>
-            <a:pPr algn="ctr"/>
-          </a:p>
-        </p:txBody>
-      </p:sp>
-      <p:sp>
-        <p:nvSpPr>
-          <p:cNvPr id="18" name="Rectangle 17"/>
-          <p:cNvSpPr/>
-          <p:nvPr/>
-        </p:nvSpPr>
-        <p:spPr>
-          <a:xfrm>
-            <a:off x="8060740" y="1938528"/>
-            <a:ext cx="3472586" cy="50800"/>
-          </a:xfrm>
-          <a:prstGeom prst="rect">
-            <a:avLst/>
-          </a:prstGeom>
-          <a:solidFill>
-            <a:srgbClr val="7285A5"/>
-          </a:solidFill>
-          <a:ln>
-            <a:noFill/>
-          </a:ln>
-          <a:effectLst/>
-        </p:spPr>
-        <p:style>
-          <a:lnRef idx="1">
-            <a:schemeClr val="accent1"/>
-          </a:lnRef>
-          <a:fillRef idx="3">
-            <a:schemeClr val="accent1"/>
-          </a:fillRef>
-          <a:effectRef idx="2">
-            <a:schemeClr val="accent1"/>
-          </a:effectRef>
-          <a:fontRef idx="minor">
-            <a:schemeClr val="lt1"/>
-          </a:fontRef>
-        </p:style>
-        <p:txBody>
-          <a:bodyPr rtlCol="0" anchor="ctr"/>
-          <a:lstStyle/>
-          <a:p>
-            <a:pPr algn="ctr"/>
-          </a:p>
-        </p:txBody>
-      </p:sp>
-      <p:sp>
-        <p:nvSpPr>
-          <p:cNvPr id="19" name="TextBox 18"/>
-          <p:cNvSpPr txBox="1"/>
-          <p:nvPr/>
-        </p:nvSpPr>
-        <p:spPr>
-          <a:xfrm>
-            <a:off x="8298484" y="2194560"/>
-            <a:ext cx="2997098" cy="201168"/>
-          </a:xfrm>
-          <a:prstGeom prst="rect">
-            <a:avLst/>
-          </a:prstGeom>
-          <a:noFill/>
-        </p:spPr>
-        <p:txBody>
-          <a:bodyPr wrap="square" anchor="t" lIns="0" rIns="0" tIns="0" bIns="0">
-            <a:noAutofit/>
-          </a:bodyPr>
-          <a:lstStyle/>
-          <a:p>
-            <a:pPr algn="l">
-              <a:lnSpc>
-                <a:spcPct val="115000"/>
-              </a:lnSpc>
-              <a:spcAft>
-                <a:spcPts val="0"/>
-              </a:spcAft>
-            </a:pPr>
-            <a:r>
-              <a:rPr sz="950" b="1">
-                <a:solidFill>
-                  <a:srgbClr val="7285A5"/>
-                </a:solidFill>
-                <a:latin typeface="Poppins"/>
-              </a:rPr>
-              <a:t>NEXT WEEK</a:t>
-            </a:r>
-          </a:p>
-        </p:txBody>
-      </p:sp>
-      <p:sp>
-        <p:nvSpPr>
-          <p:cNvPr id="20" name="TextBox 19"/>
-          <p:cNvSpPr txBox="1"/>
-          <p:nvPr/>
-        </p:nvSpPr>
-        <p:spPr>
-          <a:xfrm>
-            <a:off x="8298484" y="2468880"/>
-            <a:ext cx="2997098" cy="365760"/>
-          </a:xfrm>
-          <a:prstGeom prst="rect">
-            <a:avLst/>
-          </a:prstGeom>
-          <a:noFill/>
-        </p:spPr>
-        <p:txBody>
-          <a:bodyPr wrap="square" anchor="t" lIns="0" rIns="0" tIns="0" bIns="0">
-            <a:noAutofit/>
-          </a:bodyPr>
-          <a:lstStyle/>
-          <a:p>
-            <a:pPr algn="l">
-              <a:lnSpc>
-                <a:spcPct val="110000"/>
-              </a:lnSpc>
-              <a:spcAft>
-                <a:spcPts val="0"/>
-              </a:spcAft>
-            </a:pPr>
-            <a:r>
-              <a:rPr sz="1700" b="1">
-                <a:solidFill>
-                  <a:srgbClr val="121C2B"/>
-                </a:solidFill>
-                <a:latin typeface="Poppins"/>
-              </a:rPr>
-              <a:t>Your dashboard</a:t>
-            </a:r>
-          </a:p>
-        </p:txBody>
-      </p:sp>
-      <p:sp>
-        <p:nvSpPr>
-          <p:cNvPr id="21" name="TextBox 20"/>
-          <p:cNvSpPr txBox="1"/>
-          <p:nvPr/>
-        </p:nvSpPr>
-        <p:spPr>
-          <a:xfrm>
-            <a:off x="8298484" y="2871216"/>
-            <a:ext cx="2997098" cy="1901952"/>
-          </a:xfrm>
-          <a:prstGeom prst="rect">
-            <a:avLst/>
-          </a:prstGeom>
-          <a:noFill/>
-        </p:spPr>
-        <p:txBody>
-          <a:bodyPr wrap="square" anchor="t" lIns="0" rIns="0" tIns="0" bIns="0">
-            <a:noAutofit/>
-          </a:bodyPr>
-          <a:lstStyle/>
-          <a:p>
-            <a:pPr algn="l">
-              <a:lnSpc>
-                <a:spcPct val="128000"/>
-              </a:lnSpc>
-              <a:spcAft>
-                <a:spcPts val="700"/>
-              </a:spcAft>
-            </a:pPr>
-            <a:r>
-              <a:rPr sz="1150" b="0">
-                <a:solidFill>
-                  <a:srgbClr val="6B7280"/>
-                </a:solidFill>
-                <a:latin typeface="Inter"/>
-              </a:rPr>
-              <a:t>Built, reviewed and live.</a:t>
-            </a:r>
-          </a:p>
-          <a:p>
-            <a:pPr algn="l">
-              <a:lnSpc>
-                <a:spcPct val="128000"/>
-              </a:lnSpc>
-              <a:spcAft>
-                <a:spcPts val="700"/>
-              </a:spcAft>
-            </a:pPr>
-            <a:r>
-              <a:rPr sz="1150" b="0">
-                <a:solidFill>
-                  <a:srgbClr val="6B7280"/>
-                </a:solidFill>
-                <a:latin typeface="Inter"/>
-              </a:rPr>
-              <a:t>Pay for every role against its market range.</a:t>
-            </a:r>
-          </a:p>
-        </p:txBody>
-      </p:sp>
-      <p:sp>
-        <p:nvSpPr>
-          <p:cNvPr id="22" name="TextBox 21"/>
-          <p:cNvSpPr txBox="1"/>
-          <p:nvPr/>
-        </p:nvSpPr>
-        <p:spPr>
-          <a:xfrm>
-            <a:off x="658368" y="6455664"/>
-            <a:ext cx="6400800" cy="219456"/>
-          </a:xfrm>
-          <a:prstGeom prst="rect">
-            <a:avLst/>
-          </a:prstGeom>
-          <a:noFill/>
-        </p:spPr>
-        <p:txBody>
-          <a:bodyPr wrap="square" anchor="t" lIns="0" rIns="0" tIns="0" bIns="0">
-            <a:noAutofit/>
-          </a:bodyPr>
-          <a:lstStyle/>
-          <a:p>
-            <a:pPr algn="l">
-              <a:lnSpc>
-                <a:spcPct val="115000"/>
-              </a:lnSpc>
-              <a:spcAft>
-                <a:spcPts val="0"/>
-              </a:spcAft>
-            </a:pPr>
-            <a:r>
               <a:rPr sz="850" b="0">
                 <a:solidFill>
                   <a:srgbClr val="9AA1AC"/>
@@ -4307,7 +4884,7 @@
       </p:sp>
       <p:sp>
         <p:nvSpPr>
-          <p:cNvPr id="23" name="TextBox 22"/>
+          <p:cNvPr id="38" name="TextBox 37"/>
           <p:cNvSpPr txBox="1"/>
           <p:nvPr/>
         </p:nvSpPr>
@@ -4478,7 +5055,7 @@
                 </a:solidFill>
                 <a:latin typeface="Poppins"/>
               </a:rPr>
-              <a:t>WHAT HAPPENS NEXT</a:t>
+              <a:t>ONE THING WE NEED</a:t>
             </a:r>
           </a:p>
         </p:txBody>
@@ -4520,7 +5097,7 @@
                 </a:solidFill>
                 <a:latin typeface="Poppins"/>
               </a:rPr>
-              <a:t>What we do with your roles</a:t>
+              <a:t>Quick one on the levels</a:t>
             </a:r>
           </a:p>
         </p:txBody>
@@ -4562,7 +5139,7 @@
                 </a:solidFill>
                 <a:latin typeface="Inter"/>
               </a:rPr>
-              <a:t>Three steps, all on our side. The output is a market range for every role you have sent us, and a clear read on where each one sits against it.</a:t>
+              <a:t>The Sussex Emmaus file has 1, 2, 3 and 4 with nothing attached to them. Level is one of the four things we match on, so it's worth pinning down.</a:t>
             </a:r>
           </a:p>
         </p:txBody>
@@ -4576,7 +5153,7 @@
         <p:spPr>
           <a:xfrm>
             <a:off x="658368" y="1938528"/>
-            <a:ext cx="3472586" cy="2377440"/>
+            <a:ext cx="4846320" cy="2743200"/>
           </a:xfrm>
           <a:prstGeom prst="rect">
             <a:avLst/>
@@ -4622,13 +5199,13 @@
         <p:spPr>
           <a:xfrm>
             <a:off x="658368" y="1938528"/>
-            <a:ext cx="3472586" cy="50800"/>
+            <a:ext cx="4846320" cy="50800"/>
           </a:xfrm>
           <a:prstGeom prst="rect">
             <a:avLst/>
           </a:prstGeom>
           <a:solidFill>
-            <a:srgbClr val="C9785A"/>
+            <a:srgbClr val="7285A5"/>
           </a:solidFill>
           <a:ln>
             <a:noFill/>
@@ -4665,8 +5242,8 @@
         </p:nvSpPr>
         <p:spPr>
           <a:xfrm>
-            <a:off x="896112" y="2194560"/>
-            <a:ext cx="2997098" cy="201168"/>
+            <a:off x="914400" y="2176272"/>
+            <a:ext cx="4297680" cy="274320"/>
           </a:xfrm>
           <a:prstGeom prst="rect">
             <a:avLst/>
@@ -4690,11 +5267,11 @@
             <a:r>
               <a:rPr sz="950" b="1">
                 <a:solidFill>
-                  <a:srgbClr val="C9785A"/>
+                  <a:srgbClr val="7285A5"/>
                 </a:solidFill>
                 <a:latin typeface="Poppins"/>
               </a:rPr>
-              <a:t>STEP ONE</a:t>
+              <a:t>OURS RUNS 1 AT THE TOP</a:t>
             </a:r>
           </a:p>
         </p:txBody>
@@ -4707,8 +5284,8 @@
         </p:nvSpPr>
         <p:spPr>
           <a:xfrm>
-            <a:off x="896112" y="2468880"/>
-            <a:ext cx="2997098" cy="365760"/>
+            <a:off x="914400" y="2578608"/>
+            <a:ext cx="365760" cy="256032"/>
           </a:xfrm>
           <a:prstGeom prst="rect">
             <a:avLst/>
@@ -4723,20 +5300,20 @@
           <a:p>
             <a:pPr algn="l">
               <a:lnSpc>
-                <a:spcPct val="110000"/>
+                <a:spcPct val="115000"/>
               </a:lnSpc>
               <a:spcAft>
                 <a:spcPts val="0"/>
               </a:spcAft>
             </a:pPr>
             <a:r>
-              <a:rPr sz="1700" b="1">
-                <a:solidFill>
-                  <a:srgbClr val="121C2B"/>
+              <a:rPr sz="1400" b="1">
+                <a:solidFill>
+                  <a:srgbClr val="C9785A"/>
                 </a:solidFill>
                 <a:latin typeface="Poppins"/>
               </a:rPr>
-              <a:t>Match each role</a:t>
+              <a:t>1</a:t>
             </a:r>
           </a:p>
         </p:txBody>
@@ -4749,8 +5326,8 @@
         </p:nvSpPr>
         <p:spPr>
           <a:xfrm>
-            <a:off x="896112" y="2871216"/>
-            <a:ext cx="2997098" cy="1261872"/>
+            <a:off x="1316736" y="2596896"/>
+            <a:ext cx="2011680" cy="256032"/>
           </a:xfrm>
           <a:prstGeom prst="rect">
             <a:avLst/>
@@ -4765,53 +5342,370 @@
           <a:p>
             <a:pPr algn="l">
               <a:lnSpc>
-                <a:spcPct val="128000"/>
+                <a:spcPct val="115000"/>
               </a:lnSpc>
               <a:spcAft>
-                <a:spcPts val="700"/>
+                <a:spcPts val="0"/>
               </a:spcAft>
             </a:pPr>
             <a:r>
-              <a:rPr sz="1150" b="0">
-                <a:solidFill>
-                  <a:srgbClr val="6B7280"/>
+              <a:rPr sz="1300" b="1">
+                <a:solidFill>
+                  <a:srgbClr val="121C2B"/>
                 </a:solidFill>
                 <a:latin typeface="Inter"/>
               </a:rPr>
-              <a:t>On function, job level, industry and location.</a:t>
-            </a:r>
-          </a:p>
+              <a:t>Director</a:t>
+            </a:r>
+          </a:p>
+        </p:txBody>
+      </p:sp>
+      <p:sp>
+        <p:nvSpPr>
+          <p:cNvPr id="12" name="TextBox 11"/>
+          <p:cNvSpPr txBox="1"/>
+          <p:nvPr/>
+        </p:nvSpPr>
+        <p:spPr>
+          <a:xfrm>
+            <a:off x="3310128" y="2615184"/>
+            <a:ext cx="2011680" cy="256032"/>
+          </a:xfrm>
+          <a:prstGeom prst="rect">
+            <a:avLst/>
+          </a:prstGeom>
+          <a:noFill/>
+        </p:spPr>
+        <p:txBody>
+          <a:bodyPr wrap="square" anchor="t" lIns="0" rIns="0" tIns="0" bIns="0">
+            <a:noAutofit/>
+          </a:bodyPr>
+          <a:lstStyle/>
           <a:p>
             <a:pPr algn="l">
               <a:lnSpc>
-                <a:spcPct val="128000"/>
+                <a:spcPct val="115000"/>
               </a:lnSpc>
               <a:spcAft>
-                <a:spcPts val="700"/>
+                <a:spcPts val="0"/>
               </a:spcAft>
             </a:pPr>
             <a:r>
               <a:rPr sz="1150" b="0">
                 <a:solidFill>
-                  <a:srgbClr val="6B7280"/>
+                  <a:srgbClr val="9AA1AC"/>
                 </a:solidFill>
                 <a:latin typeface="Inter"/>
               </a:rPr>
-              <a:t>Job title on its own is not enough to go on.</a:t>
-            </a:r>
-          </a:p>
-        </p:txBody>
-      </p:sp>
-      <p:sp>
-        <p:nvSpPr>
-          <p:cNvPr id="12" name="Rectangle 11"/>
+              <a:t>most senior</a:t>
+            </a:r>
+          </a:p>
+        </p:txBody>
+      </p:sp>
+      <p:sp>
+        <p:nvSpPr>
+          <p:cNvPr id="13" name="TextBox 12"/>
+          <p:cNvSpPr txBox="1"/>
+          <p:nvPr/>
+        </p:nvSpPr>
+        <p:spPr>
+          <a:xfrm>
+            <a:off x="914400" y="3054096"/>
+            <a:ext cx="365760" cy="256032"/>
+          </a:xfrm>
+          <a:prstGeom prst="rect">
+            <a:avLst/>
+          </a:prstGeom>
+          <a:noFill/>
+        </p:spPr>
+        <p:txBody>
+          <a:bodyPr wrap="square" anchor="t" lIns="0" rIns="0" tIns="0" bIns="0">
+            <a:noAutofit/>
+          </a:bodyPr>
+          <a:lstStyle/>
+          <a:p>
+            <a:pPr algn="l">
+              <a:lnSpc>
+                <a:spcPct val="115000"/>
+              </a:lnSpc>
+              <a:spcAft>
+                <a:spcPts val="0"/>
+              </a:spcAft>
+            </a:pPr>
+            <a:r>
+              <a:rPr sz="1400" b="1">
+                <a:solidFill>
+                  <a:srgbClr val="C9785A"/>
+                </a:solidFill>
+                <a:latin typeface="Poppins"/>
+              </a:rPr>
+              <a:t>2</a:t>
+            </a:r>
+          </a:p>
+        </p:txBody>
+      </p:sp>
+      <p:sp>
+        <p:nvSpPr>
+          <p:cNvPr id="14" name="TextBox 13"/>
+          <p:cNvSpPr txBox="1"/>
+          <p:nvPr/>
+        </p:nvSpPr>
+        <p:spPr>
+          <a:xfrm>
+            <a:off x="1316736" y="3072384"/>
+            <a:ext cx="2011680" cy="256032"/>
+          </a:xfrm>
+          <a:prstGeom prst="rect">
+            <a:avLst/>
+          </a:prstGeom>
+          <a:noFill/>
+        </p:spPr>
+        <p:txBody>
+          <a:bodyPr wrap="square" anchor="t" lIns="0" rIns="0" tIns="0" bIns="0">
+            <a:noAutofit/>
+          </a:bodyPr>
+          <a:lstStyle/>
+          <a:p>
+            <a:pPr algn="l">
+              <a:lnSpc>
+                <a:spcPct val="115000"/>
+              </a:lnSpc>
+              <a:spcAft>
+                <a:spcPts val="0"/>
+              </a:spcAft>
+            </a:pPr>
+            <a:r>
+              <a:rPr sz="1300" b="1">
+                <a:solidFill>
+                  <a:srgbClr val="121C2B"/>
+                </a:solidFill>
+                <a:latin typeface="Inter"/>
+              </a:rPr>
+              <a:t>Senior</a:t>
+            </a:r>
+          </a:p>
+        </p:txBody>
+      </p:sp>
+      <p:sp>
+        <p:nvSpPr>
+          <p:cNvPr id="15" name="TextBox 14"/>
+          <p:cNvSpPr txBox="1"/>
+          <p:nvPr/>
+        </p:nvSpPr>
+        <p:spPr>
+          <a:xfrm>
+            <a:off x="914400" y="3529584"/>
+            <a:ext cx="365760" cy="256032"/>
+          </a:xfrm>
+          <a:prstGeom prst="rect">
+            <a:avLst/>
+          </a:prstGeom>
+          <a:noFill/>
+        </p:spPr>
+        <p:txBody>
+          <a:bodyPr wrap="square" anchor="t" lIns="0" rIns="0" tIns="0" bIns="0">
+            <a:noAutofit/>
+          </a:bodyPr>
+          <a:lstStyle/>
+          <a:p>
+            <a:pPr algn="l">
+              <a:lnSpc>
+                <a:spcPct val="115000"/>
+              </a:lnSpc>
+              <a:spcAft>
+                <a:spcPts val="0"/>
+              </a:spcAft>
+            </a:pPr>
+            <a:r>
+              <a:rPr sz="1400" b="1">
+                <a:solidFill>
+                  <a:srgbClr val="C9785A"/>
+                </a:solidFill>
+                <a:latin typeface="Poppins"/>
+              </a:rPr>
+              <a:t>3</a:t>
+            </a:r>
+          </a:p>
+        </p:txBody>
+      </p:sp>
+      <p:sp>
+        <p:nvSpPr>
+          <p:cNvPr id="16" name="TextBox 15"/>
+          <p:cNvSpPr txBox="1"/>
+          <p:nvPr/>
+        </p:nvSpPr>
+        <p:spPr>
+          <a:xfrm>
+            <a:off x="1316736" y="3547872"/>
+            <a:ext cx="2011680" cy="256032"/>
+          </a:xfrm>
+          <a:prstGeom prst="rect">
+            <a:avLst/>
+          </a:prstGeom>
+          <a:noFill/>
+        </p:spPr>
+        <p:txBody>
+          <a:bodyPr wrap="square" anchor="t" lIns="0" rIns="0" tIns="0" bIns="0">
+            <a:noAutofit/>
+          </a:bodyPr>
+          <a:lstStyle/>
+          <a:p>
+            <a:pPr algn="l">
+              <a:lnSpc>
+                <a:spcPct val="115000"/>
+              </a:lnSpc>
+              <a:spcAft>
+                <a:spcPts val="0"/>
+              </a:spcAft>
+            </a:pPr>
+            <a:r>
+              <a:rPr sz="1300" b="1">
+                <a:solidFill>
+                  <a:srgbClr val="121C2B"/>
+                </a:solidFill>
+                <a:latin typeface="Inter"/>
+              </a:rPr>
+              <a:t>Practitioner</a:t>
+            </a:r>
+          </a:p>
+        </p:txBody>
+      </p:sp>
+      <p:sp>
+        <p:nvSpPr>
+          <p:cNvPr id="17" name="TextBox 16"/>
+          <p:cNvSpPr txBox="1"/>
+          <p:nvPr/>
+        </p:nvSpPr>
+        <p:spPr>
+          <a:xfrm>
+            <a:off x="914400" y="4005072"/>
+            <a:ext cx="365760" cy="256032"/>
+          </a:xfrm>
+          <a:prstGeom prst="rect">
+            <a:avLst/>
+          </a:prstGeom>
+          <a:noFill/>
+        </p:spPr>
+        <p:txBody>
+          <a:bodyPr wrap="square" anchor="t" lIns="0" rIns="0" tIns="0" bIns="0">
+            <a:noAutofit/>
+          </a:bodyPr>
+          <a:lstStyle/>
+          <a:p>
+            <a:pPr algn="l">
+              <a:lnSpc>
+                <a:spcPct val="115000"/>
+              </a:lnSpc>
+              <a:spcAft>
+                <a:spcPts val="0"/>
+              </a:spcAft>
+            </a:pPr>
+            <a:r>
+              <a:rPr sz="1400" b="1">
+                <a:solidFill>
+                  <a:srgbClr val="C9785A"/>
+                </a:solidFill>
+                <a:latin typeface="Poppins"/>
+              </a:rPr>
+              <a:t>4</a:t>
+            </a:r>
+          </a:p>
+        </p:txBody>
+      </p:sp>
+      <p:sp>
+        <p:nvSpPr>
+          <p:cNvPr id="18" name="TextBox 17"/>
+          <p:cNvSpPr txBox="1"/>
+          <p:nvPr/>
+        </p:nvSpPr>
+        <p:spPr>
+          <a:xfrm>
+            <a:off x="1316736" y="4023360"/>
+            <a:ext cx="2011680" cy="256032"/>
+          </a:xfrm>
+          <a:prstGeom prst="rect">
+            <a:avLst/>
+          </a:prstGeom>
+          <a:noFill/>
+        </p:spPr>
+        <p:txBody>
+          <a:bodyPr wrap="square" anchor="t" lIns="0" rIns="0" tIns="0" bIns="0">
+            <a:noAutofit/>
+          </a:bodyPr>
+          <a:lstStyle/>
+          <a:p>
+            <a:pPr algn="l">
+              <a:lnSpc>
+                <a:spcPct val="115000"/>
+              </a:lnSpc>
+              <a:spcAft>
+                <a:spcPts val="0"/>
+              </a:spcAft>
+            </a:pPr>
+            <a:r>
+              <a:rPr sz="1300" b="1">
+                <a:solidFill>
+                  <a:srgbClr val="121C2B"/>
+                </a:solidFill>
+                <a:latin typeface="Inter"/>
+              </a:rPr>
+              <a:t>Junior</a:t>
+            </a:r>
+          </a:p>
+        </p:txBody>
+      </p:sp>
+      <p:sp>
+        <p:nvSpPr>
+          <p:cNvPr id="19" name="TextBox 18"/>
+          <p:cNvSpPr txBox="1"/>
+          <p:nvPr/>
+        </p:nvSpPr>
+        <p:spPr>
+          <a:xfrm>
+            <a:off x="3310128" y="4041648"/>
+            <a:ext cx="2011680" cy="256032"/>
+          </a:xfrm>
+          <a:prstGeom prst="rect">
+            <a:avLst/>
+          </a:prstGeom>
+          <a:noFill/>
+        </p:spPr>
+        <p:txBody>
+          <a:bodyPr wrap="square" anchor="t" lIns="0" rIns="0" tIns="0" bIns="0">
+            <a:noAutofit/>
+          </a:bodyPr>
+          <a:lstStyle/>
+          <a:p>
+            <a:pPr algn="l">
+              <a:lnSpc>
+                <a:spcPct val="115000"/>
+              </a:lnSpc>
+              <a:spcAft>
+                <a:spcPts val="0"/>
+              </a:spcAft>
+            </a:pPr>
+            <a:r>
+              <a:rPr sz="1150" b="0">
+                <a:solidFill>
+                  <a:srgbClr val="9AA1AC"/>
+                </a:solidFill>
+                <a:latin typeface="Inter"/>
+              </a:rPr>
+              <a:t>most junior</a:t>
+            </a:r>
+          </a:p>
+        </p:txBody>
+      </p:sp>
+      <p:sp>
+        <p:nvSpPr>
+          <p:cNvPr id="20" name="Rectangle 19"/>
           <p:cNvSpPr/>
           <p:nvPr/>
         </p:nvSpPr>
         <p:spPr>
           <a:xfrm>
-            <a:off x="4359554" y="1938528"/>
-            <a:ext cx="3472586" cy="2377440"/>
+            <a:off x="5870448" y="1938528"/>
+            <a:ext cx="5660136" cy="2743200"/>
           </a:xfrm>
           <a:prstGeom prst="rect">
             <a:avLst/>
@@ -4850,20 +5744,20 @@
       </p:sp>
       <p:sp>
         <p:nvSpPr>
-          <p:cNvPr id="13" name="Rectangle 12"/>
+          <p:cNvPr id="21" name="Rectangle 20"/>
           <p:cNvSpPr/>
           <p:nvPr/>
         </p:nvSpPr>
         <p:spPr>
           <a:xfrm>
-            <a:off x="4359554" y="1938528"/>
-            <a:ext cx="3472586" cy="50800"/>
+            <a:off x="5870448" y="1938528"/>
+            <a:ext cx="5660136" cy="50800"/>
           </a:xfrm>
           <a:prstGeom prst="rect">
             <a:avLst/>
           </a:prstGeom>
           <a:solidFill>
-            <a:srgbClr val="C9785A"/>
+            <a:srgbClr val="B0603F"/>
           </a:solidFill>
           <a:ln>
             <a:noFill/>
@@ -4894,14 +5788,14 @@
       </p:sp>
       <p:sp>
         <p:nvSpPr>
-          <p:cNvPr id="14" name="TextBox 13"/>
+          <p:cNvPr id="22" name="TextBox 21"/>
           <p:cNvSpPr txBox="1"/>
           <p:nvPr/>
         </p:nvSpPr>
         <p:spPr>
           <a:xfrm>
-            <a:off x="4597298" y="2194560"/>
-            <a:ext cx="2997098" cy="201168"/>
+            <a:off x="6126480" y="2176272"/>
+            <a:ext cx="5120640" cy="274320"/>
           </a:xfrm>
           <a:prstGeom prst="rect">
             <a:avLst/>
@@ -4925,25 +5819,25 @@
             <a:r>
               <a:rPr sz="950" b="1">
                 <a:solidFill>
-                  <a:srgbClr val="C9785A"/>
+                  <a:srgbClr val="B0603F"/>
                 </a:solidFill>
                 <a:latin typeface="Poppins"/>
               </a:rPr>
-              <a:t>STEP TWO</a:t>
-            </a:r>
-          </a:p>
-        </p:txBody>
-      </p:sp>
-      <p:sp>
-        <p:nvSpPr>
-          <p:cNvPr id="15" name="TextBox 14"/>
+              <a:t>WHY WE'RE ASKING</a:t>
+            </a:r>
+          </a:p>
+        </p:txBody>
+      </p:sp>
+      <p:sp>
+        <p:nvSpPr>
+          <p:cNvPr id="23" name="TextBox 22"/>
           <p:cNvSpPr txBox="1"/>
           <p:nvPr/>
         </p:nvSpPr>
         <p:spPr>
           <a:xfrm>
-            <a:off x="4597298" y="2468880"/>
-            <a:ext cx="2997098" cy="365760"/>
+            <a:off x="6126480" y="2542032"/>
+            <a:ext cx="5120640" cy="1920240"/>
           </a:xfrm>
           <a:prstGeom prst="rect">
             <a:avLst/>
@@ -4958,185 +5852,72 @@
           <a:p>
             <a:pPr algn="l">
               <a:lnSpc>
-                <a:spcPct val="110000"/>
+                <a:spcPct val="130000"/>
+              </a:lnSpc>
+              <a:spcAft>
+                <a:spcPts val="900"/>
+              </a:spcAft>
+            </a:pPr>
+            <a:r>
+              <a:rPr sz="1300" b="1">
+                <a:solidFill>
+                  <a:srgbClr val="121C2B"/>
+                </a:solidFill>
+                <a:latin typeface="Inter"/>
+              </a:rPr>
+              <a:t>Plenty of places number the other way up. If yours does, a level 4 would get benchmarked against director pay.</a:t>
+            </a:r>
+          </a:p>
+          <a:p>
+            <a:pPr algn="l">
+              <a:lnSpc>
+                <a:spcPct val="130000"/>
+              </a:lnSpc>
+              <a:spcAft>
+                <a:spcPts val="900"/>
+              </a:spcAft>
+            </a:pPr>
+            <a:r>
+              <a:rPr sz="1200" b="0">
+                <a:solidFill>
+                  <a:srgbClr val="6B7280"/>
+                </a:solidFill>
+                <a:latin typeface="Inter"/>
+              </a:rPr>
+              <a:t>On our own data that's about £27,000 against about £91,000 for the same person.</a:t>
+            </a:r>
+          </a:p>
+          <a:p>
+            <a:pPr algn="l">
+              <a:lnSpc>
+                <a:spcPct val="130000"/>
               </a:lnSpc>
               <a:spcAft>
                 <a:spcPts val="0"/>
               </a:spcAft>
             </a:pPr>
             <a:r>
-              <a:rPr sz="1700" b="1">
-                <a:solidFill>
-                  <a:srgbClr val="121C2B"/>
-                </a:solidFill>
-                <a:latin typeface="Poppins"/>
-              </a:rPr>
-              <a:t>Benchmark it</a:t>
-            </a:r>
-          </a:p>
-        </p:txBody>
-      </p:sp>
-      <p:sp>
-        <p:nvSpPr>
-          <p:cNvPr id="16" name="TextBox 15"/>
-          <p:cNvSpPr txBox="1"/>
-          <p:nvPr/>
-        </p:nvSpPr>
-        <p:spPr>
-          <a:xfrm>
-            <a:off x="4597298" y="2871216"/>
-            <a:ext cx="2997098" cy="1261872"/>
-          </a:xfrm>
-          <a:prstGeom prst="rect">
-            <a:avLst/>
-          </a:prstGeom>
-          <a:noFill/>
-        </p:spPr>
-        <p:txBody>
-          <a:bodyPr wrap="square" anchor="t" lIns="0" rIns="0" tIns="0" bIns="0">
-            <a:noAutofit/>
-          </a:bodyPr>
-          <a:lstStyle/>
-          <a:p>
-            <a:pPr algn="l">
-              <a:lnSpc>
-                <a:spcPct val="128000"/>
-              </a:lnSpc>
-              <a:spcAft>
-                <a:spcPts val="700"/>
-              </a:spcAft>
-            </a:pPr>
-            <a:r>
-              <a:rPr sz="1150" b="0">
+              <a:rPr sz="1200" b="0">
                 <a:solidFill>
                   <a:srgbClr val="6B7280"/>
                 </a:solidFill>
                 <a:latin typeface="Inter"/>
               </a:rPr>
-              <a:t>Against over 1.5 million UK salary records taken from live job adverts.</a:t>
-            </a:r>
-          </a:p>
-          <a:p>
-            <a:pPr algn="l">
-              <a:lnSpc>
-                <a:spcPct val="128000"/>
-              </a:lnSpc>
-              <a:spcAft>
-                <a:spcPts val="700"/>
-              </a:spcAft>
-            </a:pPr>
-            <a:r>
-              <a:rPr sz="1150" b="0">
-                <a:solidFill>
-                  <a:srgbClr val="6B7280"/>
-                </a:solidFill>
-                <a:latin typeface="Inter"/>
-              </a:rPr>
-              <a:t>The database is refreshed every month.</a:t>
-            </a:r>
-          </a:p>
-        </p:txBody>
-      </p:sp>
-      <p:sp>
-        <p:nvSpPr>
-          <p:cNvPr id="17" name="Rectangle 16"/>
-          <p:cNvSpPr/>
-          <p:nvPr/>
-        </p:nvSpPr>
-        <p:spPr>
-          <a:xfrm>
-            <a:off x="8060740" y="1938528"/>
-            <a:ext cx="3472586" cy="2377440"/>
-          </a:xfrm>
-          <a:prstGeom prst="rect">
-            <a:avLst/>
-          </a:prstGeom>
-          <a:solidFill>
-            <a:srgbClr val="FFFFFF"/>
-          </a:solidFill>
-          <a:ln w="12700">
-            <a:solidFill>
-              <a:srgbClr val="E7E0D4"/>
-            </a:solidFill>
-          </a:ln>
-          <a:effectLst/>
-        </p:spPr>
-        <p:style>
-          <a:lnRef idx="1">
-            <a:schemeClr val="accent1"/>
-          </a:lnRef>
-          <a:fillRef idx="3">
-            <a:schemeClr val="accent1"/>
-          </a:fillRef>
-          <a:effectRef idx="2">
-            <a:schemeClr val="accent1"/>
-          </a:effectRef>
-          <a:fontRef idx="minor">
-            <a:schemeClr val="lt1"/>
-          </a:fontRef>
-        </p:style>
-        <p:txBody>
-          <a:bodyPr rtlCol="0" anchor="ctr"/>
-          <a:lstStyle/>
-          <a:p>
-            <a:pPr algn="ctr"/>
-          </a:p>
-        </p:txBody>
-      </p:sp>
-      <p:sp>
-        <p:nvSpPr>
-          <p:cNvPr id="18" name="Rectangle 17"/>
-          <p:cNvSpPr/>
-          <p:nvPr/>
-        </p:nvSpPr>
-        <p:spPr>
-          <a:xfrm>
-            <a:off x="8060740" y="1938528"/>
-            <a:ext cx="3472586" cy="50800"/>
-          </a:xfrm>
-          <a:prstGeom prst="rect">
-            <a:avLst/>
-          </a:prstGeom>
-          <a:solidFill>
-            <a:srgbClr val="C9785A"/>
-          </a:solidFill>
-          <a:ln>
-            <a:noFill/>
-          </a:ln>
-          <a:effectLst/>
-        </p:spPr>
-        <p:style>
-          <a:lnRef idx="1">
-            <a:schemeClr val="accent1"/>
-          </a:lnRef>
-          <a:fillRef idx="3">
-            <a:schemeClr val="accent1"/>
-          </a:fillRef>
-          <a:effectRef idx="2">
-            <a:schemeClr val="accent1"/>
-          </a:effectRef>
-          <a:fontRef idx="minor">
-            <a:schemeClr val="lt1"/>
-          </a:fontRef>
-        </p:style>
-        <p:txBody>
-          <a:bodyPr rtlCol="0" anchor="ctr"/>
-          <a:lstStyle/>
-          <a:p>
-            <a:pPr algn="ctr"/>
-          </a:p>
-        </p:txBody>
-      </p:sp>
-      <p:sp>
-        <p:nvSpPr>
-          <p:cNvPr id="19" name="TextBox 18"/>
+              <a:t>Just tell us whether 1 is the top or the bottom. Or send the job titles at each level and we'll sort it from those.</a:t>
+            </a:r>
+          </a:p>
+        </p:txBody>
+      </p:sp>
+      <p:sp>
+        <p:nvSpPr>
+          <p:cNvPr id="24" name="TextBox 23"/>
           <p:cNvSpPr txBox="1"/>
           <p:nvPr/>
         </p:nvSpPr>
         <p:spPr>
           <a:xfrm>
-            <a:off x="8298484" y="2194560"/>
-            <a:ext cx="2997098" cy="201168"/>
+            <a:off x="658368" y="6455664"/>
+            <a:ext cx="6400800" cy="219456"/>
           </a:xfrm>
           <a:prstGeom prst="rect">
             <a:avLst/>
@@ -5158,323 +5939,6 @@
               </a:spcAft>
             </a:pPr>
             <a:r>
-              <a:rPr sz="950" b="1">
-                <a:solidFill>
-                  <a:srgbClr val="C9785A"/>
-                </a:solidFill>
-                <a:latin typeface="Poppins"/>
-              </a:rPr>
-              <a:t>STEP THREE</a:t>
-            </a:r>
-          </a:p>
-        </p:txBody>
-      </p:sp>
-      <p:sp>
-        <p:nvSpPr>
-          <p:cNvPr id="20" name="TextBox 19"/>
-          <p:cNvSpPr txBox="1"/>
-          <p:nvPr/>
-        </p:nvSpPr>
-        <p:spPr>
-          <a:xfrm>
-            <a:off x="8298484" y="2468880"/>
-            <a:ext cx="2997098" cy="365760"/>
-          </a:xfrm>
-          <a:prstGeom prst="rect">
-            <a:avLst/>
-          </a:prstGeom>
-          <a:noFill/>
-        </p:spPr>
-        <p:txBody>
-          <a:bodyPr wrap="square" anchor="t" lIns="0" rIns="0" tIns="0" bIns="0">
-            <a:noAutofit/>
-          </a:bodyPr>
-          <a:lstStyle/>
-          <a:p>
-            <a:pPr algn="l">
-              <a:lnSpc>
-                <a:spcPct val="110000"/>
-              </a:lnSpc>
-              <a:spcAft>
-                <a:spcPts val="0"/>
-              </a:spcAft>
-            </a:pPr>
-            <a:r>
-              <a:rPr sz="1700" b="1">
-                <a:solidFill>
-                  <a:srgbClr val="121C2B"/>
-                </a:solidFill>
-                <a:latin typeface="Poppins"/>
-              </a:rPr>
-              <a:t>A specialist reviews it</a:t>
-            </a:r>
-          </a:p>
-        </p:txBody>
-      </p:sp>
-      <p:sp>
-        <p:nvSpPr>
-          <p:cNvPr id="21" name="TextBox 20"/>
-          <p:cNvSpPr txBox="1"/>
-          <p:nvPr/>
-        </p:nvSpPr>
-        <p:spPr>
-          <a:xfrm>
-            <a:off x="8298484" y="2871216"/>
-            <a:ext cx="2997098" cy="1261872"/>
-          </a:xfrm>
-          <a:prstGeom prst="rect">
-            <a:avLst/>
-          </a:prstGeom>
-          <a:noFill/>
-        </p:spPr>
-        <p:txBody>
-          <a:bodyPr wrap="square" anchor="t" lIns="0" rIns="0" tIns="0" bIns="0">
-            <a:noAutofit/>
-          </a:bodyPr>
-          <a:lstStyle/>
-          <a:p>
-            <a:pPr algn="l">
-              <a:lnSpc>
-                <a:spcPct val="128000"/>
-              </a:lnSpc>
-              <a:spcAft>
-                <a:spcPts val="700"/>
-              </a:spcAft>
-            </a:pPr>
-            <a:r>
-              <a:rPr sz="1150" b="0">
-                <a:solidFill>
-                  <a:srgbClr val="6B7280"/>
-                </a:solidFill>
-                <a:latin typeface="Inter"/>
-              </a:rPr>
-              <a:t>One of our reward specialists checks the result by hand.</a:t>
-            </a:r>
-          </a:p>
-          <a:p>
-            <a:pPr algn="l">
-              <a:lnSpc>
-                <a:spcPct val="128000"/>
-              </a:lnSpc>
-              <a:spcAft>
-                <a:spcPts val="700"/>
-              </a:spcAft>
-            </a:pPr>
-            <a:r>
-              <a:rPr sz="1150" b="0">
-                <a:solidFill>
-                  <a:srgbClr val="6B7280"/>
-                </a:solidFill>
-                <a:latin typeface="Inter"/>
-              </a:rPr>
-              <a:t>Nothing reaches you that a person has not signed off.</a:t>
-            </a:r>
-          </a:p>
-        </p:txBody>
-      </p:sp>
-      <p:sp>
-        <p:nvSpPr>
-          <p:cNvPr id="22" name="Rectangle 21"/>
-          <p:cNvSpPr/>
-          <p:nvPr/>
-        </p:nvSpPr>
-        <p:spPr>
-          <a:xfrm>
-            <a:off x="658368" y="4544568"/>
-            <a:ext cx="10874959" cy="1170432"/>
-          </a:xfrm>
-          <a:prstGeom prst="rect">
-            <a:avLst/>
-          </a:prstGeom>
-          <a:solidFill>
-            <a:srgbClr val="E8D8CE"/>
-          </a:solidFill>
-          <a:ln>
-            <a:noFill/>
-          </a:ln>
-          <a:effectLst/>
-        </p:spPr>
-        <p:style>
-          <a:lnRef idx="1">
-            <a:schemeClr val="accent1"/>
-          </a:lnRef>
-          <a:fillRef idx="3">
-            <a:schemeClr val="accent1"/>
-          </a:fillRef>
-          <a:effectRef idx="2">
-            <a:schemeClr val="accent1"/>
-          </a:effectRef>
-          <a:fontRef idx="minor">
-            <a:schemeClr val="lt1"/>
-          </a:fontRef>
-        </p:style>
-        <p:txBody>
-          <a:bodyPr rtlCol="0" anchor="ctr"/>
-          <a:lstStyle/>
-          <a:p>
-            <a:pPr algn="ctr"/>
-          </a:p>
-        </p:txBody>
-      </p:sp>
-      <p:sp>
-        <p:nvSpPr>
-          <p:cNvPr id="23" name="Rectangle 22"/>
-          <p:cNvSpPr/>
-          <p:nvPr/>
-        </p:nvSpPr>
-        <p:spPr>
-          <a:xfrm>
-            <a:off x="658368" y="4544568"/>
-            <a:ext cx="50800" cy="1170432"/>
-          </a:xfrm>
-          <a:prstGeom prst="rect">
-            <a:avLst/>
-          </a:prstGeom>
-          <a:solidFill>
-            <a:srgbClr val="B0603F"/>
-          </a:solidFill>
-          <a:ln>
-            <a:noFill/>
-          </a:ln>
-          <a:effectLst/>
-        </p:spPr>
-        <p:style>
-          <a:lnRef idx="1">
-            <a:schemeClr val="accent1"/>
-          </a:lnRef>
-          <a:fillRef idx="3">
-            <a:schemeClr val="accent1"/>
-          </a:fillRef>
-          <a:effectRef idx="2">
-            <a:schemeClr val="accent1"/>
-          </a:effectRef>
-          <a:fontRef idx="minor">
-            <a:schemeClr val="lt1"/>
-          </a:fontRef>
-        </p:style>
-        <p:txBody>
-          <a:bodyPr rtlCol="0" anchor="ctr"/>
-          <a:lstStyle/>
-          <a:p>
-            <a:pPr algn="ctr"/>
-          </a:p>
-        </p:txBody>
-      </p:sp>
-      <p:sp>
-        <p:nvSpPr>
-          <p:cNvPr id="24" name="TextBox 23"/>
-          <p:cNvSpPr txBox="1"/>
-          <p:nvPr/>
-        </p:nvSpPr>
-        <p:spPr>
-          <a:xfrm>
-            <a:off x="950976" y="4727448"/>
-            <a:ext cx="10607040" cy="274320"/>
-          </a:xfrm>
-          <a:prstGeom prst="rect">
-            <a:avLst/>
-          </a:prstGeom>
-          <a:noFill/>
-        </p:spPr>
-        <p:txBody>
-          <a:bodyPr wrap="square" anchor="t" lIns="0" rIns="0" tIns="0" bIns="0">
-            <a:noAutofit/>
-          </a:bodyPr>
-          <a:lstStyle/>
-          <a:p>
-            <a:pPr algn="l">
-              <a:lnSpc>
-                <a:spcPct val="115000"/>
-              </a:lnSpc>
-              <a:spcAft>
-                <a:spcPts val="0"/>
-              </a:spcAft>
-            </a:pPr>
-            <a:r>
-              <a:rPr sz="1450" b="1">
-                <a:solidFill>
-                  <a:srgbClr val="121C2B"/>
-                </a:solidFill>
-                <a:latin typeface="Poppins"/>
-              </a:rPr>
-              <a:t>What you end up with, for every single role</a:t>
-            </a:r>
-          </a:p>
-        </p:txBody>
-      </p:sp>
-      <p:sp>
-        <p:nvSpPr>
-          <p:cNvPr id="25" name="TextBox 24"/>
-          <p:cNvSpPr txBox="1"/>
-          <p:nvPr/>
-        </p:nvSpPr>
-        <p:spPr>
-          <a:xfrm>
-            <a:off x="950976" y="5093208"/>
-            <a:ext cx="10607040" cy="457200"/>
-          </a:xfrm>
-          <a:prstGeom prst="rect">
-            <a:avLst/>
-          </a:prstGeom>
-          <a:noFill/>
-        </p:spPr>
-        <p:txBody>
-          <a:bodyPr wrap="square" anchor="t" lIns="0" rIns="0" tIns="0" bIns="0">
-            <a:noAutofit/>
-          </a:bodyPr>
-          <a:lstStyle/>
-          <a:p>
-            <a:pPr algn="l">
-              <a:lnSpc>
-                <a:spcPct val="130000"/>
-              </a:lnSpc>
-              <a:spcAft>
-                <a:spcPts val="0"/>
-              </a:spcAft>
-            </a:pPr>
-            <a:r>
-              <a:rPr sz="1200" b="0">
-                <a:solidFill>
-                  <a:srgbClr val="6B4436"/>
-                </a:solidFill>
-                <a:latin typeface="Inter"/>
-              </a:rPr>
-              <a:t>A lower quartile, a median and an upper quartile for the market, and where the current Sussex Emmaus salary sits against them. All of it uploaded into the dashboard.</a:t>
-            </a:r>
-          </a:p>
-        </p:txBody>
-      </p:sp>
-      <p:sp>
-        <p:nvSpPr>
-          <p:cNvPr id="26" name="TextBox 25"/>
-          <p:cNvSpPr txBox="1"/>
-          <p:nvPr/>
-        </p:nvSpPr>
-        <p:spPr>
-          <a:xfrm>
-            <a:off x="658368" y="6455664"/>
-            <a:ext cx="6400800" cy="219456"/>
-          </a:xfrm>
-          <a:prstGeom prst="rect">
-            <a:avLst/>
-          </a:prstGeom>
-          <a:noFill/>
-        </p:spPr>
-        <p:txBody>
-          <a:bodyPr wrap="square" anchor="t" lIns="0" rIns="0" tIns="0" bIns="0">
-            <a:noAutofit/>
-          </a:bodyPr>
-          <a:lstStyle/>
-          <a:p>
-            <a:pPr algn="l">
-              <a:lnSpc>
-                <a:spcPct val="115000"/>
-              </a:lnSpc>
-              <a:spcAft>
-                <a:spcPts val="0"/>
-              </a:spcAft>
-            </a:pPr>
-            <a:r>
               <a:rPr sz="850" b="0">
                 <a:solidFill>
                   <a:srgbClr val="9AA1AC"/>
@@ -5488,7 +5952,7 @@
       </p:sp>
       <p:sp>
         <p:nvSpPr>
-          <p:cNvPr id="27" name="TextBox 26"/>
+          <p:cNvPr id="25" name="TextBox 24"/>
           <p:cNvSpPr txBox="1"/>
           <p:nvPr/>
         </p:nvSpPr>
@@ -5659,7 +6123,7 @@
                 </a:solidFill>
                 <a:latin typeface="Poppins"/>
               </a:rPr>
-              <a:t>ONE THING TO PIN DOWN</a:t>
+              <a:t>IN THE MEANTIME</a:t>
             </a:r>
           </a:p>
         </p:txBody>
@@ -5701,7 +6165,7 @@
                 </a:solidFill>
                 <a:latin typeface="Poppins"/>
               </a:rPr>
-              <a:t>What do your levels 1 to 4 mean?</a:t>
+              <a:t>Have a poke around the demo</a:t>
             </a:r>
           </a:p>
         </p:txBody>
@@ -5743,7 +6207,7 @@
                 </a:solidFill>
                 <a:latin typeface="Inter"/>
               </a:rPr>
-              <a:t>The Sussex Emmaus file has job levels 1, 2, 3 and 4 with no definitions attached. Job level is one of the four things we match on, and it moves the comparator group more than any of the others, so it is worth thirty seconds now.</a:t>
+              <a:t>Same dashboard, different company. Everything works, so click anything.</a:t>
             </a:r>
           </a:p>
         </p:txBody>
@@ -5756,8 +6220,180 @@
         </p:nvSpPr>
         <p:spPr>
           <a:xfrm>
-            <a:off x="658368" y="2157984"/>
-            <a:ext cx="5532120" cy="3154680"/>
+            <a:off x="658368" y="1810512"/>
+            <a:ext cx="10874959" cy="1371600"/>
+          </a:xfrm>
+          <a:prstGeom prst="rect">
+            <a:avLst/>
+          </a:prstGeom>
+          <a:solidFill>
+            <a:srgbClr val="121C2B"/>
+          </a:solidFill>
+          <a:ln>
+            <a:noFill/>
+          </a:ln>
+          <a:effectLst/>
+        </p:spPr>
+        <p:style>
+          <a:lnRef idx="1">
+            <a:schemeClr val="accent1"/>
+          </a:lnRef>
+          <a:fillRef idx="3">
+            <a:schemeClr val="accent1"/>
+          </a:fillRef>
+          <a:effectRef idx="2">
+            <a:schemeClr val="accent1"/>
+          </a:effectRef>
+          <a:fontRef idx="minor">
+            <a:schemeClr val="lt1"/>
+          </a:fontRef>
+        </p:style>
+        <p:txBody>
+          <a:bodyPr rtlCol="0" anchor="ctr"/>
+          <a:lstStyle/>
+          <a:p>
+            <a:pPr algn="ctr"/>
+          </a:p>
+        </p:txBody>
+      </p:sp>
+      <p:sp>
+        <p:nvSpPr>
+          <p:cNvPr id="8" name="Rectangle 7"/>
+          <p:cNvSpPr/>
+          <p:nvPr/>
+        </p:nvSpPr>
+        <p:spPr>
+          <a:xfrm>
+            <a:off x="658368" y="1810512"/>
+            <a:ext cx="63500" cy="1371600"/>
+          </a:xfrm>
+          <a:prstGeom prst="rect">
+            <a:avLst/>
+          </a:prstGeom>
+          <a:solidFill>
+            <a:srgbClr val="C9785A"/>
+          </a:solidFill>
+          <a:ln>
+            <a:noFill/>
+          </a:ln>
+          <a:effectLst/>
+        </p:spPr>
+        <p:style>
+          <a:lnRef idx="1">
+            <a:schemeClr val="accent1"/>
+          </a:lnRef>
+          <a:fillRef idx="3">
+            <a:schemeClr val="accent1"/>
+          </a:fillRef>
+          <a:effectRef idx="2">
+            <a:schemeClr val="accent1"/>
+          </a:effectRef>
+          <a:fontRef idx="minor">
+            <a:schemeClr val="lt1"/>
+          </a:fontRef>
+        </p:style>
+        <p:txBody>
+          <a:bodyPr rtlCol="0" anchor="ctr"/>
+          <a:lstStyle/>
+          <a:p>
+            <a:pPr algn="ctr"/>
+          </a:p>
+        </p:txBody>
+      </p:sp>
+      <p:sp>
+        <p:nvSpPr>
+          <p:cNvPr id="9" name="TextBox 8"/>
+          <p:cNvSpPr txBox="1"/>
+          <p:nvPr/>
+        </p:nvSpPr>
+        <p:spPr>
+          <a:xfrm>
+            <a:off x="1024128" y="2084832"/>
+            <a:ext cx="10515600" cy="219456"/>
+          </a:xfrm>
+          <a:prstGeom prst="rect">
+            <a:avLst/>
+          </a:prstGeom>
+          <a:noFill/>
+        </p:spPr>
+        <p:txBody>
+          <a:bodyPr wrap="square" anchor="t" lIns="0" rIns="0" tIns="0" bIns="0">
+            <a:noAutofit/>
+          </a:bodyPr>
+          <a:lstStyle/>
+          <a:p>
+            <a:pPr algn="l">
+              <a:lnSpc>
+                <a:spcPct val="115000"/>
+              </a:lnSpc>
+              <a:spcAft>
+                <a:spcPts val="0"/>
+              </a:spcAft>
+            </a:pPr>
+            <a:r>
+              <a:rPr sz="950" b="1">
+                <a:solidFill>
+                  <a:srgbClr val="C9785A"/>
+                </a:solidFill>
+                <a:latin typeface="Poppins"/>
+              </a:rPr>
+              <a:t>THE LINK</a:t>
+            </a:r>
+          </a:p>
+        </p:txBody>
+      </p:sp>
+      <p:sp>
+        <p:nvSpPr>
+          <p:cNvPr id="10" name="TextBox 9"/>
+          <p:cNvSpPr txBox="1"/>
+          <p:nvPr/>
+        </p:nvSpPr>
+        <p:spPr>
+          <a:xfrm>
+            <a:off x="1024128" y="2395728"/>
+            <a:ext cx="10789920" cy="457200"/>
+          </a:xfrm>
+          <a:prstGeom prst="rect">
+            <a:avLst/>
+          </a:prstGeom>
+          <a:noFill/>
+        </p:spPr>
+        <p:txBody>
+          <a:bodyPr wrap="square" anchor="t" lIns="0" rIns="0" tIns="0" bIns="0">
+            <a:noAutofit/>
+          </a:bodyPr>
+          <a:lstStyle/>
+          <a:p>
+            <a:pPr algn="l">
+              <a:lnSpc>
+                <a:spcPct val="115000"/>
+              </a:lnSpc>
+              <a:spcAft>
+                <a:spcPts val="0"/>
+              </a:spcAft>
+            </a:pPr>
+            <a:r>
+              <a:rPr sz="1900" b="1">
+                <a:solidFill>
+                  <a:srgbClr val="FFFFFF"/>
+                </a:solidFill>
+                <a:latin typeface="Poppins"/>
+              </a:rPr>
+              <a:t>twentysixconsulting.github.io/demo2-client-dashboard</a:t>
+            </a:r>
+          </a:p>
+        </p:txBody>
+      </p:sp>
+      <p:sp>
+        <p:nvSpPr>
+          <p:cNvPr id="11" name="Rectangle 10"/>
+          <p:cNvSpPr/>
+          <p:nvPr/>
+        </p:nvSpPr>
+        <p:spPr>
+          <a:xfrm>
+            <a:off x="658368" y="3456432"/>
+            <a:ext cx="5254599" cy="960120"/>
           </a:xfrm>
           <a:prstGeom prst="rect">
             <a:avLst/>
@@ -5796,58 +6432,14 @@
       </p:sp>
       <p:sp>
         <p:nvSpPr>
-          <p:cNvPr id="8" name="Rectangle 7"/>
-          <p:cNvSpPr/>
-          <p:nvPr/>
-        </p:nvSpPr>
-        <p:spPr>
-          <a:xfrm>
-            <a:off x="658368" y="2157984"/>
-            <a:ext cx="5532120" cy="50800"/>
-          </a:xfrm>
-          <a:prstGeom prst="rect">
-            <a:avLst/>
-          </a:prstGeom>
-          <a:solidFill>
-            <a:srgbClr val="7285A5"/>
-          </a:solidFill>
-          <a:ln>
-            <a:noFill/>
-          </a:ln>
-          <a:effectLst/>
-        </p:spPr>
-        <p:style>
-          <a:lnRef idx="1">
-            <a:schemeClr val="accent1"/>
-          </a:lnRef>
-          <a:fillRef idx="3">
-            <a:schemeClr val="accent1"/>
-          </a:fillRef>
-          <a:effectRef idx="2">
-            <a:schemeClr val="accent1"/>
-          </a:effectRef>
-          <a:fontRef idx="minor">
-            <a:schemeClr val="lt1"/>
-          </a:fontRef>
-        </p:style>
-        <p:txBody>
-          <a:bodyPr rtlCol="0" anchor="ctr"/>
-          <a:lstStyle/>
-          <a:p>
-            <a:pPr algn="ctr"/>
-          </a:p>
-        </p:txBody>
-      </p:sp>
-      <p:sp>
-        <p:nvSpPr>
-          <p:cNvPr id="9" name="TextBox 8"/>
+          <p:cNvPr id="12" name="TextBox 11"/>
           <p:cNvSpPr txBox="1"/>
           <p:nvPr/>
         </p:nvSpPr>
         <p:spPr>
           <a:xfrm>
-            <a:off x="914400" y="2395728"/>
-            <a:ext cx="5029200" cy="274320"/>
+            <a:off x="914400" y="3657600"/>
+            <a:ext cx="4797399" cy="219456"/>
           </a:xfrm>
           <a:prstGeom prst="rect">
             <a:avLst/>
@@ -5871,25 +6463,25 @@
             <a:r>
               <a:rPr sz="950" b="1">
                 <a:solidFill>
-                  <a:srgbClr val="7285A5"/>
+                  <a:srgbClr val="9AA1AC"/>
                 </a:solidFill>
                 <a:latin typeface="Poppins"/>
               </a:rPr>
-              <a:t>HOW OUR NUMBERING RUNS</a:t>
-            </a:r>
-          </a:p>
-        </p:txBody>
-      </p:sp>
-      <p:sp>
-        <p:nvSpPr>
-          <p:cNvPr id="10" name="TextBox 9"/>
+              <a:t>USERNAME</a:t>
+            </a:r>
+          </a:p>
+        </p:txBody>
+      </p:sp>
+      <p:sp>
+        <p:nvSpPr>
+          <p:cNvPr id="13" name="TextBox 12"/>
           <p:cNvSpPr txBox="1"/>
           <p:nvPr/>
         </p:nvSpPr>
         <p:spPr>
           <a:xfrm>
-            <a:off x="914400" y="2761488"/>
-            <a:ext cx="365760" cy="256032"/>
+            <a:off x="914400" y="3931920"/>
+            <a:ext cx="4797399" cy="310896"/>
           </a:xfrm>
           <a:prstGeom prst="rect">
             <a:avLst/>
@@ -5911,447 +6503,27 @@
               </a:spcAft>
             </a:pPr>
             <a:r>
-              <a:rPr sz="1400" b="1">
-                <a:solidFill>
-                  <a:srgbClr val="C9785A"/>
+              <a:rPr sz="1800" b="1">
+                <a:solidFill>
+                  <a:srgbClr val="121C2B"/>
                 </a:solidFill>
                 <a:latin typeface="Poppins"/>
               </a:rPr>
-              <a:t>1</a:t>
-            </a:r>
-          </a:p>
-        </p:txBody>
-      </p:sp>
-      <p:sp>
-        <p:nvSpPr>
-          <p:cNvPr id="11" name="TextBox 10"/>
-          <p:cNvSpPr txBox="1"/>
-          <p:nvPr/>
-        </p:nvSpPr>
-        <p:spPr>
-          <a:xfrm>
-            <a:off x="1316736" y="2779776"/>
-            <a:ext cx="2011680" cy="256032"/>
-          </a:xfrm>
-          <a:prstGeom prst="rect">
-            <a:avLst/>
-          </a:prstGeom>
-          <a:noFill/>
-        </p:spPr>
-        <p:txBody>
-          <a:bodyPr wrap="square" anchor="t" lIns="0" rIns="0" tIns="0" bIns="0">
-            <a:noAutofit/>
-          </a:bodyPr>
-          <a:lstStyle/>
-          <a:p>
-            <a:pPr algn="l">
-              <a:lnSpc>
-                <a:spcPct val="115000"/>
-              </a:lnSpc>
-              <a:spcAft>
-                <a:spcPts val="0"/>
-              </a:spcAft>
-            </a:pPr>
-            <a:r>
-              <a:rPr sz="1300" b="1">
-                <a:solidFill>
-                  <a:srgbClr val="121C2B"/>
-                </a:solidFill>
-                <a:latin typeface="Inter"/>
-              </a:rPr>
-              <a:t>Director</a:t>
-            </a:r>
-          </a:p>
-        </p:txBody>
-      </p:sp>
-      <p:sp>
-        <p:nvSpPr>
-          <p:cNvPr id="12" name="TextBox 11"/>
-          <p:cNvSpPr txBox="1"/>
-          <p:nvPr/>
-        </p:nvSpPr>
-        <p:spPr>
-          <a:xfrm>
-            <a:off x="3355848" y="2798064"/>
-            <a:ext cx="2560320" cy="256032"/>
-          </a:xfrm>
-          <a:prstGeom prst="rect">
-            <a:avLst/>
-          </a:prstGeom>
-          <a:noFill/>
-        </p:spPr>
-        <p:txBody>
-          <a:bodyPr wrap="square" anchor="t" lIns="0" rIns="0" tIns="0" bIns="0">
-            <a:noAutofit/>
-          </a:bodyPr>
-          <a:lstStyle/>
-          <a:p>
-            <a:pPr algn="l">
-              <a:lnSpc>
-                <a:spcPct val="115000"/>
-              </a:lnSpc>
-              <a:spcAft>
-                <a:spcPts val="0"/>
-              </a:spcAft>
-            </a:pPr>
-            <a:r>
-              <a:rPr sz="1150" b="0">
-                <a:solidFill>
-                  <a:srgbClr val="9AA1AC"/>
-                </a:solidFill>
-                <a:latin typeface="Inter"/>
-              </a:rPr>
-              <a:t>most senior</a:t>
-            </a:r>
-          </a:p>
-        </p:txBody>
-      </p:sp>
-      <p:sp>
-        <p:nvSpPr>
-          <p:cNvPr id="13" name="TextBox 12"/>
-          <p:cNvSpPr txBox="1"/>
-          <p:nvPr/>
-        </p:nvSpPr>
-        <p:spPr>
-          <a:xfrm>
-            <a:off x="914400" y="3236976"/>
-            <a:ext cx="365760" cy="256032"/>
-          </a:xfrm>
-          <a:prstGeom prst="rect">
-            <a:avLst/>
-          </a:prstGeom>
-          <a:noFill/>
-        </p:spPr>
-        <p:txBody>
-          <a:bodyPr wrap="square" anchor="t" lIns="0" rIns="0" tIns="0" bIns="0">
-            <a:noAutofit/>
-          </a:bodyPr>
-          <a:lstStyle/>
-          <a:p>
-            <a:pPr algn="l">
-              <a:lnSpc>
-                <a:spcPct val="115000"/>
-              </a:lnSpc>
-              <a:spcAft>
-                <a:spcPts val="0"/>
-              </a:spcAft>
-            </a:pPr>
-            <a:r>
-              <a:rPr sz="1400" b="1">
-                <a:solidFill>
-                  <a:srgbClr val="C9785A"/>
-                </a:solidFill>
-                <a:latin typeface="Poppins"/>
-              </a:rPr>
-              <a:t>2</a:t>
-            </a:r>
-          </a:p>
-        </p:txBody>
-      </p:sp>
-      <p:sp>
-        <p:nvSpPr>
-          <p:cNvPr id="14" name="TextBox 13"/>
-          <p:cNvSpPr txBox="1"/>
-          <p:nvPr/>
-        </p:nvSpPr>
-        <p:spPr>
-          <a:xfrm>
-            <a:off x="1316736" y="3255264"/>
-            <a:ext cx="2011680" cy="256032"/>
-          </a:xfrm>
-          <a:prstGeom prst="rect">
-            <a:avLst/>
-          </a:prstGeom>
-          <a:noFill/>
-        </p:spPr>
-        <p:txBody>
-          <a:bodyPr wrap="square" anchor="t" lIns="0" rIns="0" tIns="0" bIns="0">
-            <a:noAutofit/>
-          </a:bodyPr>
-          <a:lstStyle/>
-          <a:p>
-            <a:pPr algn="l">
-              <a:lnSpc>
-                <a:spcPct val="115000"/>
-              </a:lnSpc>
-              <a:spcAft>
-                <a:spcPts val="0"/>
-              </a:spcAft>
-            </a:pPr>
-            <a:r>
-              <a:rPr sz="1300" b="1">
-                <a:solidFill>
-                  <a:srgbClr val="121C2B"/>
-                </a:solidFill>
-                <a:latin typeface="Inter"/>
-              </a:rPr>
-              <a:t>Senior</a:t>
-            </a:r>
-          </a:p>
-        </p:txBody>
-      </p:sp>
-      <p:sp>
-        <p:nvSpPr>
-          <p:cNvPr id="15" name="TextBox 14"/>
-          <p:cNvSpPr txBox="1"/>
-          <p:nvPr/>
-        </p:nvSpPr>
-        <p:spPr>
-          <a:xfrm>
-            <a:off x="914400" y="3712464"/>
-            <a:ext cx="365760" cy="256032"/>
-          </a:xfrm>
-          <a:prstGeom prst="rect">
-            <a:avLst/>
-          </a:prstGeom>
-          <a:noFill/>
-        </p:spPr>
-        <p:txBody>
-          <a:bodyPr wrap="square" anchor="t" lIns="0" rIns="0" tIns="0" bIns="0">
-            <a:noAutofit/>
-          </a:bodyPr>
-          <a:lstStyle/>
-          <a:p>
-            <a:pPr algn="l">
-              <a:lnSpc>
-                <a:spcPct val="115000"/>
-              </a:lnSpc>
-              <a:spcAft>
-                <a:spcPts val="0"/>
-              </a:spcAft>
-            </a:pPr>
-            <a:r>
-              <a:rPr sz="1400" b="1">
-                <a:solidFill>
-                  <a:srgbClr val="C9785A"/>
-                </a:solidFill>
-                <a:latin typeface="Poppins"/>
-              </a:rPr>
-              <a:t>3</a:t>
-            </a:r>
-          </a:p>
-        </p:txBody>
-      </p:sp>
-      <p:sp>
-        <p:nvSpPr>
-          <p:cNvPr id="16" name="TextBox 15"/>
-          <p:cNvSpPr txBox="1"/>
-          <p:nvPr/>
-        </p:nvSpPr>
-        <p:spPr>
-          <a:xfrm>
-            <a:off x="1316736" y="3730752"/>
-            <a:ext cx="2011680" cy="256032"/>
-          </a:xfrm>
-          <a:prstGeom prst="rect">
-            <a:avLst/>
-          </a:prstGeom>
-          <a:noFill/>
-        </p:spPr>
-        <p:txBody>
-          <a:bodyPr wrap="square" anchor="t" lIns="0" rIns="0" tIns="0" bIns="0">
-            <a:noAutofit/>
-          </a:bodyPr>
-          <a:lstStyle/>
-          <a:p>
-            <a:pPr algn="l">
-              <a:lnSpc>
-                <a:spcPct val="115000"/>
-              </a:lnSpc>
-              <a:spcAft>
-                <a:spcPts val="0"/>
-              </a:spcAft>
-            </a:pPr>
-            <a:r>
-              <a:rPr sz="1300" b="1">
-                <a:solidFill>
-                  <a:srgbClr val="121C2B"/>
-                </a:solidFill>
-                <a:latin typeface="Inter"/>
-              </a:rPr>
-              <a:t>Practitioner</a:t>
-            </a:r>
-          </a:p>
-        </p:txBody>
-      </p:sp>
-      <p:sp>
-        <p:nvSpPr>
-          <p:cNvPr id="17" name="TextBox 16"/>
-          <p:cNvSpPr txBox="1"/>
-          <p:nvPr/>
-        </p:nvSpPr>
-        <p:spPr>
-          <a:xfrm>
-            <a:off x="914400" y="4187952"/>
-            <a:ext cx="365760" cy="256032"/>
-          </a:xfrm>
-          <a:prstGeom prst="rect">
-            <a:avLst/>
-          </a:prstGeom>
-          <a:noFill/>
-        </p:spPr>
-        <p:txBody>
-          <a:bodyPr wrap="square" anchor="t" lIns="0" rIns="0" tIns="0" bIns="0">
-            <a:noAutofit/>
-          </a:bodyPr>
-          <a:lstStyle/>
-          <a:p>
-            <a:pPr algn="l">
-              <a:lnSpc>
-                <a:spcPct val="115000"/>
-              </a:lnSpc>
-              <a:spcAft>
-                <a:spcPts val="0"/>
-              </a:spcAft>
-            </a:pPr>
-            <a:r>
-              <a:rPr sz="1400" b="1">
-                <a:solidFill>
-                  <a:srgbClr val="C9785A"/>
-                </a:solidFill>
-                <a:latin typeface="Poppins"/>
-              </a:rPr>
-              <a:t>4</a:t>
-            </a:r>
-          </a:p>
-        </p:txBody>
-      </p:sp>
-      <p:sp>
-        <p:nvSpPr>
-          <p:cNvPr id="18" name="TextBox 17"/>
-          <p:cNvSpPr txBox="1"/>
-          <p:nvPr/>
-        </p:nvSpPr>
-        <p:spPr>
-          <a:xfrm>
-            <a:off x="1316736" y="4206240"/>
-            <a:ext cx="2011680" cy="256032"/>
-          </a:xfrm>
-          <a:prstGeom prst="rect">
-            <a:avLst/>
-          </a:prstGeom>
-          <a:noFill/>
-        </p:spPr>
-        <p:txBody>
-          <a:bodyPr wrap="square" anchor="t" lIns="0" rIns="0" tIns="0" bIns="0">
-            <a:noAutofit/>
-          </a:bodyPr>
-          <a:lstStyle/>
-          <a:p>
-            <a:pPr algn="l">
-              <a:lnSpc>
-                <a:spcPct val="115000"/>
-              </a:lnSpc>
-              <a:spcAft>
-                <a:spcPts val="0"/>
-              </a:spcAft>
-            </a:pPr>
-            <a:r>
-              <a:rPr sz="1300" b="1">
-                <a:solidFill>
-                  <a:srgbClr val="121C2B"/>
-                </a:solidFill>
-                <a:latin typeface="Inter"/>
-              </a:rPr>
-              <a:t>Junior</a:t>
-            </a:r>
-          </a:p>
-        </p:txBody>
-      </p:sp>
-      <p:sp>
-        <p:nvSpPr>
-          <p:cNvPr id="19" name="TextBox 18"/>
-          <p:cNvSpPr txBox="1"/>
-          <p:nvPr/>
-        </p:nvSpPr>
-        <p:spPr>
-          <a:xfrm>
-            <a:off x="3355848" y="4224528"/>
-            <a:ext cx="2560320" cy="256032"/>
-          </a:xfrm>
-          <a:prstGeom prst="rect">
-            <a:avLst/>
-          </a:prstGeom>
-          <a:noFill/>
-        </p:spPr>
-        <p:txBody>
-          <a:bodyPr wrap="square" anchor="t" lIns="0" rIns="0" tIns="0" bIns="0">
-            <a:noAutofit/>
-          </a:bodyPr>
-          <a:lstStyle/>
-          <a:p>
-            <a:pPr algn="l">
-              <a:lnSpc>
-                <a:spcPct val="115000"/>
-              </a:lnSpc>
-              <a:spcAft>
-                <a:spcPts val="0"/>
-              </a:spcAft>
-            </a:pPr>
-            <a:r>
-              <a:rPr sz="1150" b="0">
-                <a:solidFill>
-                  <a:srgbClr val="9AA1AC"/>
-                </a:solidFill>
-                <a:latin typeface="Inter"/>
-              </a:rPr>
-              <a:t>most junior</a:t>
-            </a:r>
-          </a:p>
-        </p:txBody>
-      </p:sp>
-      <p:sp>
-        <p:nvSpPr>
-          <p:cNvPr id="20" name="TextBox 19"/>
-          <p:cNvSpPr txBox="1"/>
-          <p:nvPr/>
-        </p:nvSpPr>
-        <p:spPr>
-          <a:xfrm>
-            <a:off x="914400" y="4700016"/>
-            <a:ext cx="5029200" cy="365760"/>
-          </a:xfrm>
-          <a:prstGeom prst="rect">
-            <a:avLst/>
-          </a:prstGeom>
-          <a:noFill/>
-        </p:spPr>
-        <p:txBody>
-          <a:bodyPr wrap="square" anchor="t" lIns="0" rIns="0" tIns="0" bIns="0">
-            <a:noAutofit/>
-          </a:bodyPr>
-          <a:lstStyle/>
-          <a:p>
-            <a:pPr algn="l">
-              <a:lnSpc>
-                <a:spcPct val="125000"/>
-              </a:lnSpc>
-              <a:spcAft>
-                <a:spcPts val="0"/>
-              </a:spcAft>
-            </a:pPr>
-            <a:r>
-              <a:rPr sz="1100" b="0">
-                <a:solidFill>
-                  <a:srgbClr val="6B7280"/>
-                </a:solidFill>
-                <a:latin typeface="Inter"/>
-              </a:rPr>
-              <a:t>Ours counts down from the top. Many organisations count up from the bottom.</a:t>
-            </a:r>
-          </a:p>
-        </p:txBody>
-      </p:sp>
-      <p:sp>
-        <p:nvSpPr>
-          <p:cNvPr id="21" name="Rectangle 20"/>
+              <a:t>demo</a:t>
+            </a:r>
+          </a:p>
+        </p:txBody>
+      </p:sp>
+      <p:sp>
+        <p:nvSpPr>
+          <p:cNvPr id="14" name="Rectangle 13"/>
           <p:cNvSpPr/>
           <p:nvPr/>
         </p:nvSpPr>
         <p:spPr>
           <a:xfrm>
-            <a:off x="6556248" y="2157984"/>
-            <a:ext cx="4974336" cy="3154680"/>
+            <a:off x="6278727" y="3456432"/>
+            <a:ext cx="5254599" cy="960120"/>
           </a:xfrm>
           <a:prstGeom prst="rect">
             <a:avLst/>
@@ -6390,58 +6562,14 @@
       </p:sp>
       <p:sp>
         <p:nvSpPr>
-          <p:cNvPr id="22" name="Rectangle 21"/>
-          <p:cNvSpPr/>
-          <p:nvPr/>
-        </p:nvSpPr>
-        <p:spPr>
-          <a:xfrm>
-            <a:off x="6556248" y="2157984"/>
-            <a:ext cx="4974336" cy="50800"/>
-          </a:xfrm>
-          <a:prstGeom prst="rect">
-            <a:avLst/>
-          </a:prstGeom>
-          <a:solidFill>
-            <a:srgbClr val="B0603F"/>
-          </a:solidFill>
-          <a:ln>
-            <a:noFill/>
-          </a:ln>
-          <a:effectLst/>
-        </p:spPr>
-        <p:style>
-          <a:lnRef idx="1">
-            <a:schemeClr val="accent1"/>
-          </a:lnRef>
-          <a:fillRef idx="3">
-            <a:schemeClr val="accent1"/>
-          </a:fillRef>
-          <a:effectRef idx="2">
-            <a:schemeClr val="accent1"/>
-          </a:effectRef>
-          <a:fontRef idx="minor">
-            <a:schemeClr val="lt1"/>
-          </a:fontRef>
-        </p:style>
-        <p:txBody>
-          <a:bodyPr rtlCol="0" anchor="ctr"/>
-          <a:lstStyle/>
-          <a:p>
-            <a:pPr algn="ctr"/>
-          </a:p>
-        </p:txBody>
-      </p:sp>
-      <p:sp>
-        <p:nvSpPr>
-          <p:cNvPr id="23" name="TextBox 22"/>
+          <p:cNvPr id="15" name="TextBox 14"/>
           <p:cNvSpPr txBox="1"/>
           <p:nvPr/>
         </p:nvSpPr>
         <p:spPr>
           <a:xfrm>
-            <a:off x="6812280" y="2395728"/>
-            <a:ext cx="4480560" cy="274320"/>
+            <a:off x="6534759" y="3657600"/>
+            <a:ext cx="4797399" cy="219456"/>
           </a:xfrm>
           <a:prstGeom prst="rect">
             <a:avLst/>
@@ -6465,25 +6593,25 @@
             <a:r>
               <a:rPr sz="950" b="1">
                 <a:solidFill>
-                  <a:srgbClr val="B0603F"/>
+                  <a:srgbClr val="9AA1AC"/>
                 </a:solidFill>
                 <a:latin typeface="Poppins"/>
               </a:rPr>
-              <a:t>WHY IT MATTERS</a:t>
-            </a:r>
-          </a:p>
-        </p:txBody>
-      </p:sp>
-      <p:sp>
-        <p:nvSpPr>
-          <p:cNvPr id="24" name="TextBox 23"/>
+              <a:t>PASSWORD</a:t>
+            </a:r>
+          </a:p>
+        </p:txBody>
+      </p:sp>
+      <p:sp>
+        <p:nvSpPr>
+          <p:cNvPr id="16" name="TextBox 15"/>
           <p:cNvSpPr txBox="1"/>
           <p:nvPr/>
         </p:nvSpPr>
         <p:spPr>
           <a:xfrm>
-            <a:off x="6812280" y="2724912"/>
-            <a:ext cx="4480560" cy="2011680"/>
+            <a:off x="6534759" y="3931920"/>
+            <a:ext cx="4797399" cy="310896"/>
           </a:xfrm>
           <a:prstGeom prst="rect">
             <a:avLst/>
@@ -6498,41 +6626,45 @@
           <a:p>
             <a:pPr algn="l">
               <a:lnSpc>
-                <a:spcPct val="130000"/>
+                <a:spcPct val="115000"/>
               </a:lnSpc>
               <a:spcAft>
-                <a:spcPts val="800"/>
+                <a:spcPts val="0"/>
               </a:spcAft>
             </a:pPr>
             <a:r>
-              <a:rPr sz="1250" b="1">
+              <a:rPr sz="1800" b="1">
                 <a:solidFill>
                   <a:srgbClr val="121C2B"/>
                 </a:solidFill>
-                <a:latin typeface="Inter"/>
+                <a:latin typeface="Poppins"/>
               </a:rPr>
-              <a:t>Read the wrong way round, a level 4 role would be compared against director pay and a level 1 against junior pay.</a:t>
-            </a:r>
-          </a:p>
-          <a:p>
-            <a:pPr algn="l">
-              <a:lnSpc>
-                <a:spcPct val="130000"/>
-              </a:lnSpc>
-              <a:spcAft>
-                <a:spcPts val="800"/>
-              </a:spcAft>
-            </a:pPr>
-            <a:r>
-              <a:rPr sz="1200" b="0">
-                <a:solidFill>
-                  <a:srgbClr val="6B7280"/>
-                </a:solidFill>
-                <a:latin typeface="Inter"/>
-              </a:rPr>
-              <a:t>On our own data that is the difference between a market median of about £27,000 and about £91,000 for the same person.</a:t>
-            </a:r>
-          </a:p>
+              <a:t>Demo26</a:t>
+            </a:r>
+          </a:p>
+        </p:txBody>
+      </p:sp>
+      <p:sp>
+        <p:nvSpPr>
+          <p:cNvPr id="17" name="TextBox 16"/>
+          <p:cNvSpPr txBox="1"/>
+          <p:nvPr/>
+        </p:nvSpPr>
+        <p:spPr>
+          <a:xfrm>
+            <a:off x="658368" y="4690872"/>
+            <a:ext cx="10874959" cy="457200"/>
+          </a:xfrm>
+          <a:prstGeom prst="rect">
+            <a:avLst/>
+          </a:prstGeom>
+          <a:noFill/>
+        </p:spPr>
+        <p:txBody>
+          <a:bodyPr wrap="square" anchor="t" lIns="0" rIns="0" tIns="0" bIns="0">
+            <a:noAutofit/>
+          </a:bodyPr>
+          <a:lstStyle/>
           <a:p>
             <a:pPr algn="l">
               <a:lnSpc>
@@ -6549,56 +6681,14 @@
                 </a:solidFill>
                 <a:latin typeface="Inter"/>
               </a:rPr>
-              <a:t>A one-line description of each level is plenty, or just tell us whether 1 is the top or the bottom.</a:t>
-            </a:r>
-          </a:p>
-        </p:txBody>
-      </p:sp>
-      <p:sp>
-        <p:nvSpPr>
-          <p:cNvPr id="25" name="TextBox 24"/>
-          <p:cNvSpPr txBox="1"/>
-          <p:nvPr/>
-        </p:nvSpPr>
-        <p:spPr>
-          <a:xfrm>
-            <a:off x="658368" y="5559552"/>
-            <a:ext cx="10874959" cy="365760"/>
-          </a:xfrm>
-          <a:prstGeom prst="rect">
-            <a:avLst/>
-          </a:prstGeom>
-          <a:noFill/>
-        </p:spPr>
-        <p:txBody>
-          <a:bodyPr wrap="square" anchor="t" lIns="0" rIns="0" tIns="0" bIns="0">
-            <a:noAutofit/>
-          </a:bodyPr>
-          <a:lstStyle/>
-          <a:p>
-            <a:pPr algn="l">
-              <a:lnSpc>
-                <a:spcPct val="130000"/>
-              </a:lnSpc>
-              <a:spcAft>
-                <a:spcPts val="0"/>
-              </a:spcAft>
-            </a:pPr>
-            <a:r>
-              <a:rPr sz="1200" b="0">
-                <a:solidFill>
-                  <a:srgbClr val="6B7280"/>
-                </a:solidFill>
-                <a:latin typeface="Inter"/>
-              </a:rPr>
-              <a:t>If it is easier, send us the job titles that sit at each level and we will work it out from those.</a:t>
-            </a:r>
-          </a:p>
-        </p:txBody>
-      </p:sp>
-      <p:sp>
-        <p:nvSpPr>
-          <p:cNvPr id="26" name="TextBox 25"/>
+              <a:t>The numbers belong to a made-up company, so nothing in there is real pay data. It'll look the same with your roles in it.</a:t>
+            </a:r>
+          </a:p>
+        </p:txBody>
+      </p:sp>
+      <p:sp>
+        <p:nvSpPr>
+          <p:cNvPr id="18" name="TextBox 17"/>
           <p:cNvSpPr txBox="1"/>
           <p:nvPr/>
         </p:nvSpPr>
@@ -6640,7 +6730,7 @@
       </p:sp>
       <p:sp>
         <p:nvSpPr>
-          <p:cNvPr id="27" name="TextBox 26"/>
+          <p:cNvPr id="19" name="TextBox 18"/>
           <p:cNvSpPr txBox="1"/>
           <p:nvPr/>
         </p:nvSpPr>
@@ -6811,7 +6901,7 @@
                 </a:solidFill>
                 <a:latin typeface="Poppins"/>
               </a:rPr>
-              <a:t>NEXT WEEK</a:t>
+              <a:t>OVER TO YOU</a:t>
             </a:r>
           </a:p>
         </p:txBody>
@@ -6853,7 +6943,7 @@
                 </a:solidFill>
                 <a:latin typeface="Poppins"/>
               </a:rPr>
-              <a:t>How would you like to go through it?</a:t>
+              <a:t>Three things and we're away</a:t>
             </a:r>
           </a:p>
         </p:txBody>
@@ -6895,7 +6985,7 @@
                 </a:solidFill>
                 <a:latin typeface="Inter"/>
               </a:rPr>
-              <a:t>The dashboard will be ready next week. Either way works for us, so it is whichever suits you better.</a:t>
+              <a:t>Only the levels hold anything up.</a:t>
             </a:r>
           </a:p>
         </p:txBody>
@@ -6909,7 +6999,7 @@
         <p:spPr>
           <a:xfrm>
             <a:off x="658368" y="1719072"/>
-            <a:ext cx="5208879" cy="2514600"/>
+            <a:ext cx="3472586" cy="2377440"/>
           </a:xfrm>
           <a:prstGeom prst="rect">
             <a:avLst/>
@@ -6955,7 +7045,7 @@
         <p:spPr>
           <a:xfrm>
             <a:off x="658368" y="1719072"/>
-            <a:ext cx="5208879" cy="50800"/>
+            <a:ext cx="3472586" cy="50800"/>
           </a:xfrm>
           <a:prstGeom prst="rect">
             <a:avLst/>
@@ -6999,7 +7089,7 @@
         <p:spPr>
           <a:xfrm>
             <a:off x="896112" y="1975104"/>
-            <a:ext cx="4733391" cy="201168"/>
+            <a:ext cx="2997098" cy="201168"/>
           </a:xfrm>
           <a:prstGeom prst="rect">
             <a:avLst/>
@@ -7027,7 +7117,7 @@
                 </a:solidFill>
                 <a:latin typeface="Poppins"/>
               </a:rPr>
-              <a:t>OPTION A</a:t>
+              <a:t>ONE</a:t>
             </a:r>
           </a:p>
         </p:txBody>
@@ -7041,7 +7131,7 @@
         <p:spPr>
           <a:xfrm>
             <a:off x="896112" y="2249424"/>
-            <a:ext cx="4733391" cy="365760"/>
+            <a:ext cx="2997098" cy="365760"/>
           </a:xfrm>
           <a:prstGeom prst="rect">
             <a:avLst/>
@@ -7069,7 +7159,7 @@
                 </a:solidFill>
                 <a:latin typeface="Poppins"/>
               </a:rPr>
-              <a:t>We send it over first</a:t>
+              <a:t>The levels</a:t>
             </a:r>
           </a:p>
         </p:txBody>
@@ -7083,7 +7173,7 @@
         <p:spPr>
           <a:xfrm>
             <a:off x="896112" y="2651760"/>
-            <a:ext cx="4733391" cy="1399032"/>
+            <a:ext cx="2997098" cy="1261872"/>
           </a:xfrm>
           <a:prstGeom prst="rect">
             <a:avLst/>
@@ -7111,26 +7201,7 @@
                 </a:solidFill>
                 <a:latin typeface="Inter"/>
               </a:rPr>
-              <a:t>You get the link and have a look in your own time.</a:t>
-            </a:r>
-          </a:p>
-          <a:p>
-            <a:pPr algn="l">
-              <a:lnSpc>
-                <a:spcPct val="128000"/>
-              </a:lnSpc>
-              <a:spcAft>
-                <a:spcPts val="700"/>
-              </a:spcAft>
-            </a:pPr>
-            <a:r>
-              <a:rPr sz="1150" b="0">
-                <a:solidFill>
-                  <a:srgbClr val="6B7280"/>
-                </a:solidFill>
-                <a:latin typeface="Inter"/>
-              </a:rPr>
-              <a:t>Then we meet to go through whatever stood out, with your questions already formed.</a:t>
+              <a:t>Whether 1 is the top or the bottom, or the job titles at each level.</a:t>
             </a:r>
           </a:p>
         </p:txBody>
@@ -7143,8 +7214,8 @@
         </p:nvSpPr>
         <p:spPr>
           <a:xfrm>
-            <a:off x="6324447" y="1719072"/>
-            <a:ext cx="5208879" cy="2514600"/>
+            <a:off x="4359554" y="1719072"/>
+            <a:ext cx="3472586" cy="2377440"/>
           </a:xfrm>
           <a:prstGeom prst="rect">
             <a:avLst/>
@@ -7189,8 +7260,8 @@
         </p:nvSpPr>
         <p:spPr>
           <a:xfrm>
-            <a:off x="6324447" y="1719072"/>
-            <a:ext cx="5208879" cy="50800"/>
+            <a:off x="4359554" y="1719072"/>
+            <a:ext cx="3472586" cy="50800"/>
           </a:xfrm>
           <a:prstGeom prst="rect">
             <a:avLst/>
@@ -7233,8 +7304,8 @@
         </p:nvSpPr>
         <p:spPr>
           <a:xfrm>
-            <a:off x="6562191" y="1975104"/>
-            <a:ext cx="4733391" cy="201168"/>
+            <a:off x="4597298" y="1975104"/>
+            <a:ext cx="2997098" cy="201168"/>
           </a:xfrm>
           <a:prstGeom prst="rect">
             <a:avLst/>
@@ -7262,7 +7333,7 @@
                 </a:solidFill>
                 <a:latin typeface="Poppins"/>
               </a:rPr>
-              <a:t>OPTION B</a:t>
+              <a:t>TWO</a:t>
             </a:r>
           </a:p>
         </p:txBody>
@@ -7275,8 +7346,8 @@
         </p:nvSpPr>
         <p:spPr>
           <a:xfrm>
-            <a:off x="6562191" y="2249424"/>
-            <a:ext cx="4733391" cy="365760"/>
+            <a:off x="4597298" y="2249424"/>
+            <a:ext cx="2997098" cy="365760"/>
           </a:xfrm>
           <a:prstGeom prst="rect">
             <a:avLst/>
@@ -7304,7 +7375,7 @@
                 </a:solidFill>
                 <a:latin typeface="Poppins"/>
               </a:rPr>
-              <a:t>We walk through it together</a:t>
+              <a:t>Do the dates work</a:t>
             </a:r>
           </a:p>
         </p:txBody>
@@ -7317,8 +7388,8 @@
         </p:nvSpPr>
         <p:spPr>
           <a:xfrm>
-            <a:off x="6562191" y="2651760"/>
-            <a:ext cx="4733391" cy="1399032"/>
+            <a:off x="4597298" y="2651760"/>
+            <a:ext cx="2997098" cy="1261872"/>
           </a:xfrm>
           <a:prstGeom prst="rect">
             <a:avLst/>
@@ -7346,26 +7417,7 @@
                 </a:solidFill>
                 <a:latin typeface="Inter"/>
               </a:rPr>
-              <a:t>We meet first and go through it live, so nothing needs decoding on your own.</a:t>
-            </a:r>
-          </a:p>
-          <a:p>
-            <a:pPr algn="l">
-              <a:lnSpc>
-                <a:spcPct val="128000"/>
-              </a:lnSpc>
-              <a:spcAft>
-                <a:spcPts val="700"/>
-              </a:spcAft>
-            </a:pPr>
-            <a:r>
-              <a:rPr sz="1150" b="0">
-                <a:solidFill>
-                  <a:srgbClr val="6B7280"/>
-                </a:solidFill>
-                <a:latin typeface="Inter"/>
-              </a:rPr>
-              <a:t>You explore it properly afterwards.</a:t>
+              <a:t>The 14th for the first session, then two shorter calls after.</a:t>
             </a:r>
           </a:p>
         </p:txBody>
@@ -7378,8 +7430,8 @@
         </p:nvSpPr>
         <p:spPr>
           <a:xfrm>
-            <a:off x="658368" y="4507992"/>
-            <a:ext cx="10874959" cy="1051560"/>
+            <a:off x="8060740" y="1719072"/>
+            <a:ext cx="3472586" cy="2377440"/>
           </a:xfrm>
           <a:prstGeom prst="rect">
             <a:avLst/>
@@ -7424,8 +7476,8 @@
         </p:nvSpPr>
         <p:spPr>
           <a:xfrm>
-            <a:off x="658368" y="4507992"/>
-            <a:ext cx="50800" cy="1051560"/>
+            <a:off x="8060740" y="1719072"/>
+            <a:ext cx="3472586" cy="50800"/>
           </a:xfrm>
           <a:prstGeom prst="rect">
             <a:avLst/>
@@ -7468,8 +7520,8 @@
         </p:nvSpPr>
         <p:spPr>
           <a:xfrm>
-            <a:off x="950976" y="4690872"/>
-            <a:ext cx="10515600" cy="256032"/>
+            <a:off x="8298484" y="1975104"/>
+            <a:ext cx="2997098" cy="201168"/>
           </a:xfrm>
           <a:prstGeom prst="rect">
             <a:avLst/>
@@ -7491,13 +7543,13 @@
               </a:spcAft>
             </a:pPr>
             <a:r>
-              <a:rPr sz="1350" b="1">
+              <a:rPr sz="950" b="1">
                 <a:solidFill>
                   <a:srgbClr val="121C2B"/>
                 </a:solidFill>
                 <a:latin typeface="Poppins"/>
               </a:rPr>
-              <a:t>Want a look before then?</a:t>
+              <a:t>THREE</a:t>
             </a:r>
           </a:p>
         </p:txBody>
@@ -7510,8 +7562,50 @@
         </p:nvSpPr>
         <p:spPr>
           <a:xfrm>
-            <a:off x="950976" y="5010912"/>
-            <a:ext cx="10515600" cy="310896"/>
+            <a:off x="8298484" y="2249424"/>
+            <a:ext cx="2997098" cy="365760"/>
+          </a:xfrm>
+          <a:prstGeom prst="rect">
+            <a:avLst/>
+          </a:prstGeom>
+          <a:noFill/>
+        </p:spPr>
+        <p:txBody>
+          <a:bodyPr wrap="square" anchor="t" lIns="0" rIns="0" tIns="0" bIns="0">
+            <a:noAutofit/>
+          </a:bodyPr>
+          <a:lstStyle/>
+          <a:p>
+            <a:pPr algn="l">
+              <a:lnSpc>
+                <a:spcPct val="110000"/>
+              </a:lnSpc>
+              <a:spcAft>
+                <a:spcPts val="0"/>
+              </a:spcAft>
+            </a:pPr>
+            <a:r>
+              <a:rPr sz="1700" b="1">
+                <a:solidFill>
+                  <a:srgbClr val="121C2B"/>
+                </a:solidFill>
+                <a:latin typeface="Poppins"/>
+              </a:rPr>
+              <a:t>Benefits or not</a:t>
+            </a:r>
+          </a:p>
+        </p:txBody>
+      </p:sp>
+      <p:sp>
+        <p:nvSpPr>
+          <p:cNvPr id="21" name="TextBox 20"/>
+          <p:cNvSpPr txBox="1"/>
+          <p:nvPr/>
+        </p:nvSpPr>
+        <p:spPr>
+          <a:xfrm>
+            <a:off x="8298484" y="2651760"/>
+            <a:ext cx="2997098" cy="1261872"/>
           </a:xfrm>
           <a:prstGeom prst="rect">
             <a:avLst/>
@@ -7529,7 +7623,7 @@
                 <a:spcPct val="128000"/>
               </a:lnSpc>
               <a:spcAft>
-                <a:spcPts val="0"/>
+                <a:spcPts val="700"/>
               </a:spcAft>
             </a:pPr>
             <a:r>
@@ -7539,21 +7633,109 @@
                 </a:solidFill>
                 <a:latin typeface="Inter"/>
               </a:rPr>
-              <a:t>We can open the demo dashboard now and click through it, or I can send you the link afterwards so you can get familiar before yours lands.</a:t>
-            </a:r>
-          </a:p>
-        </p:txBody>
-      </p:sp>
-      <p:sp>
-        <p:nvSpPr>
-          <p:cNvPr id="21" name="TextBox 20"/>
+              <a:t>We can benchmark what Sussex Emmaus offer and put it in alongside pay, no extra cost. Yes or no is enough for now.</a:t>
+            </a:r>
+          </a:p>
+        </p:txBody>
+      </p:sp>
+      <p:sp>
+        <p:nvSpPr>
+          <p:cNvPr id="22" name="Rectangle 21"/>
+          <p:cNvSpPr/>
+          <p:nvPr/>
+        </p:nvSpPr>
+        <p:spPr>
+          <a:xfrm>
+            <a:off x="658368" y="4389120"/>
+            <a:ext cx="10874959" cy="822960"/>
+          </a:xfrm>
+          <a:prstGeom prst="rect">
+            <a:avLst/>
+          </a:prstGeom>
+          <a:solidFill>
+            <a:srgbClr val="E8D8CE"/>
+          </a:solidFill>
+          <a:ln>
+            <a:noFill/>
+          </a:ln>
+          <a:effectLst/>
+        </p:spPr>
+        <p:style>
+          <a:lnRef idx="1">
+            <a:schemeClr val="accent1"/>
+          </a:lnRef>
+          <a:fillRef idx="3">
+            <a:schemeClr val="accent1"/>
+          </a:fillRef>
+          <a:effectRef idx="2">
+            <a:schemeClr val="accent1"/>
+          </a:effectRef>
+          <a:fontRef idx="minor">
+            <a:schemeClr val="lt1"/>
+          </a:fontRef>
+        </p:style>
+        <p:txBody>
+          <a:bodyPr rtlCol="0" anchor="ctr"/>
+          <a:lstStyle/>
+          <a:p>
+            <a:pPr algn="ctr"/>
+          </a:p>
+        </p:txBody>
+      </p:sp>
+      <p:sp>
+        <p:nvSpPr>
+          <p:cNvPr id="23" name="Rectangle 22"/>
+          <p:cNvSpPr/>
+          <p:nvPr/>
+        </p:nvSpPr>
+        <p:spPr>
+          <a:xfrm>
+            <a:off x="658368" y="4389120"/>
+            <a:ext cx="50800" cy="822960"/>
+          </a:xfrm>
+          <a:prstGeom prst="rect">
+            <a:avLst/>
+          </a:prstGeom>
+          <a:solidFill>
+            <a:srgbClr val="B0603F"/>
+          </a:solidFill>
+          <a:ln>
+            <a:noFill/>
+          </a:ln>
+          <a:effectLst/>
+        </p:spPr>
+        <p:style>
+          <a:lnRef idx="1">
+            <a:schemeClr val="accent1"/>
+          </a:lnRef>
+          <a:fillRef idx="3">
+            <a:schemeClr val="accent1"/>
+          </a:fillRef>
+          <a:effectRef idx="2">
+            <a:schemeClr val="accent1"/>
+          </a:effectRef>
+          <a:fontRef idx="minor">
+            <a:schemeClr val="lt1"/>
+          </a:fontRef>
+        </p:style>
+        <p:txBody>
+          <a:bodyPr rtlCol="0" anchor="ctr"/>
+          <a:lstStyle/>
+          <a:p>
+            <a:pPr algn="ctr"/>
+          </a:p>
+        </p:txBody>
+      </p:sp>
+      <p:sp>
+        <p:nvSpPr>
+          <p:cNvPr id="24" name="TextBox 23"/>
           <p:cNvSpPr txBox="1"/>
           <p:nvPr/>
         </p:nvSpPr>
         <p:spPr>
           <a:xfrm>
-            <a:off x="658368" y="6455664"/>
-            <a:ext cx="6400800" cy="219456"/>
+            <a:off x="950976" y="4654296"/>
+            <a:ext cx="10607040" cy="292608"/>
           </a:xfrm>
           <a:prstGeom prst="rect">
             <a:avLst/>
@@ -7575,6 +7757,48 @@
               </a:spcAft>
             </a:pPr>
             <a:r>
+              <a:rPr sz="1250" b="0">
+                <a:solidFill>
+                  <a:srgbClr val="6B4436"/>
+                </a:solidFill>
+                <a:latin typeface="Inter"/>
+              </a:rPr>
+              <a:t>Anything else, just give me a shout.</a:t>
+            </a:r>
+          </a:p>
+        </p:txBody>
+      </p:sp>
+      <p:sp>
+        <p:nvSpPr>
+          <p:cNvPr id="25" name="TextBox 24"/>
+          <p:cNvSpPr txBox="1"/>
+          <p:nvPr/>
+        </p:nvSpPr>
+        <p:spPr>
+          <a:xfrm>
+            <a:off x="658368" y="6455664"/>
+            <a:ext cx="6400800" cy="219456"/>
+          </a:xfrm>
+          <a:prstGeom prst="rect">
+            <a:avLst/>
+          </a:prstGeom>
+          <a:noFill/>
+        </p:spPr>
+        <p:txBody>
+          <a:bodyPr wrap="square" anchor="t" lIns="0" rIns="0" tIns="0" bIns="0">
+            <a:noAutofit/>
+          </a:bodyPr>
+          <a:lstStyle/>
+          <a:p>
+            <a:pPr algn="l">
+              <a:lnSpc>
+                <a:spcPct val="115000"/>
+              </a:lnSpc>
+              <a:spcAft>
+                <a:spcPts val="0"/>
+              </a:spcAft>
+            </a:pPr>
+            <a:r>
               <a:rPr sz="850" b="0">
                 <a:solidFill>
                   <a:srgbClr val="9AA1AC"/>
@@ -7588,7 +7812,7 @@
       </p:sp>
       <p:sp>
         <p:nvSpPr>
-          <p:cNvPr id="22" name="TextBox 21"/>
+          <p:cNvPr id="26" name="TextBox 25"/>
           <p:cNvSpPr txBox="1"/>
           <p:nvPr/>
         </p:nvSpPr>
@@ -7624,2200 +7848,6 @@
                 <a:latin typeface="Inter"/>
               </a:rPr>
               <a:t>4</a:t>
-            </a:r>
-          </a:p>
-        </p:txBody>
-      </p:sp>
-    </p:spTree>
-  </p:cSld>
-  <p:clrMapOvr>
-    <a:masterClrMapping/>
-  </p:clrMapOvr>
-</p:sld>
-</file>
-
-<file path=ppt/slides/slide6.xml><?xml version="1.0" encoding="utf-8"?>
-<p:sld xmlns:a="http://schemas.openxmlformats.org/drawingml/2006/main" xmlns:p="http://schemas.openxmlformats.org/presentationml/2006/main" xmlns:r="http://schemas.openxmlformats.org/officeDocument/2006/relationships">
-  <p:cSld>
-    <p:bg>
-      <p:bgPr>
-        <a:solidFill>
-          <a:srgbClr val="F4F1EA"/>
-        </a:solidFill>
-        <a:effectLst/>
-      </p:bgPr>
-    </p:bg>
-    <p:spTree>
-      <p:nvGrpSpPr>
-        <p:cNvPr id="1" name=""/>
-        <p:cNvGrpSpPr/>
-        <p:nvPr/>
-      </p:nvGrpSpPr>
-      <p:grpSpPr/>
-      <p:sp>
-        <p:nvSpPr>
-          <p:cNvPr id="2" name="Rectangle 1"/>
-          <p:cNvSpPr/>
-          <p:nvPr/>
-        </p:nvSpPr>
-        <p:spPr>
-          <a:xfrm>
-            <a:off x="0" y="0"/>
-            <a:ext cx="274320" cy="6858000"/>
-          </a:xfrm>
-          <a:prstGeom prst="rect">
-            <a:avLst/>
-          </a:prstGeom>
-          <a:solidFill>
-            <a:srgbClr val="C9785A"/>
-          </a:solidFill>
-          <a:ln>
-            <a:noFill/>
-          </a:ln>
-          <a:effectLst/>
-        </p:spPr>
-        <p:style>
-          <a:lnRef idx="1">
-            <a:schemeClr val="accent1"/>
-          </a:lnRef>
-          <a:fillRef idx="3">
-            <a:schemeClr val="accent1"/>
-          </a:fillRef>
-          <a:effectRef idx="2">
-            <a:schemeClr val="accent1"/>
-          </a:effectRef>
-          <a:fontRef idx="minor">
-            <a:schemeClr val="lt1"/>
-          </a:fontRef>
-        </p:style>
-        <p:txBody>
-          <a:bodyPr rtlCol="0" anchor="ctr"/>
-          <a:lstStyle/>
-          <a:p>
-            <a:pPr algn="ctr"/>
-          </a:p>
-        </p:txBody>
-      </p:sp>
-      <p:pic>
-        <p:nvPicPr>
-          <p:cNvPr id="3" name="Picture 2" descr="zigbert-logo.png"/>
-          <p:cNvPicPr>
-            <a:picLocks noChangeAspect="1"/>
-          </p:cNvPicPr>
-          <p:nvPr/>
-        </p:nvPicPr>
-        <p:blipFill>
-          <a:blip r:embed="rId2"/>
-          <a:stretch>
-            <a:fillRect/>
-          </a:stretch>
-        </p:blipFill>
-        <p:spPr>
-          <a:xfrm>
-            <a:off x="10161727" y="365760"/>
-            <a:ext cx="1371600" cy="411905"/>
-          </a:xfrm>
-          <a:prstGeom prst="rect">
-            <a:avLst/>
-          </a:prstGeom>
-        </p:spPr>
-      </p:pic>
-      <p:sp>
-        <p:nvSpPr>
-          <p:cNvPr id="4" name="TextBox 3"/>
-          <p:cNvSpPr txBox="1"/>
-          <p:nvPr/>
-        </p:nvSpPr>
-        <p:spPr>
-          <a:xfrm>
-            <a:off x="658368" y="402336"/>
-            <a:ext cx="10874959" cy="237744"/>
-          </a:xfrm>
-          <a:prstGeom prst="rect">
-            <a:avLst/>
-          </a:prstGeom>
-          <a:noFill/>
-        </p:spPr>
-        <p:txBody>
-          <a:bodyPr wrap="square" anchor="t" lIns="0" rIns="0" tIns="0" bIns="0">
-            <a:noAutofit/>
-          </a:bodyPr>
-          <a:lstStyle/>
-          <a:p>
-            <a:pPr algn="l">
-              <a:lnSpc>
-                <a:spcPct val="115000"/>
-              </a:lnSpc>
-              <a:spcAft>
-                <a:spcPts val="0"/>
-              </a:spcAft>
-            </a:pPr>
-            <a:r>
-              <a:rPr sz="1100" b="1">
-                <a:solidFill>
-                  <a:srgbClr val="B0603F"/>
-                </a:solidFill>
-                <a:latin typeface="Poppins"/>
-              </a:rPr>
-              <a:t>ALSO AVAILABLE</a:t>
-            </a:r>
-          </a:p>
-        </p:txBody>
-      </p:sp>
-      <p:sp>
-        <p:nvSpPr>
-          <p:cNvPr id="5" name="TextBox 4"/>
-          <p:cNvSpPr txBox="1"/>
-          <p:nvPr/>
-        </p:nvSpPr>
-        <p:spPr>
-          <a:xfrm>
-            <a:off x="658368" y="676656"/>
-            <a:ext cx="10874959" cy="457200"/>
-          </a:xfrm>
-          <a:prstGeom prst="rect">
-            <a:avLst/>
-          </a:prstGeom>
-          <a:noFill/>
-        </p:spPr>
-        <p:txBody>
-          <a:bodyPr wrap="square" anchor="t" lIns="0" rIns="0" tIns="0" bIns="0">
-            <a:noAutofit/>
-          </a:bodyPr>
-          <a:lstStyle/>
-          <a:p>
-            <a:pPr algn="l">
-              <a:lnSpc>
-                <a:spcPct val="115000"/>
-              </a:lnSpc>
-              <a:spcAft>
-                <a:spcPts val="0"/>
-              </a:spcAft>
-            </a:pPr>
-            <a:r>
-              <a:rPr sz="2900" b="1">
-                <a:solidFill>
-                  <a:srgbClr val="121C2B"/>
-                </a:solidFill>
-                <a:latin typeface="Poppins"/>
-              </a:rPr>
-              <a:t>Benefits, if you want them included</a:t>
-            </a:r>
-          </a:p>
-        </p:txBody>
-      </p:sp>
-      <p:sp>
-        <p:nvSpPr>
-          <p:cNvPr id="6" name="TextBox 5"/>
-          <p:cNvSpPr txBox="1"/>
-          <p:nvPr/>
-        </p:nvSpPr>
-        <p:spPr>
-          <a:xfrm>
-            <a:off x="658368" y="1188720"/>
-            <a:ext cx="10424160" cy="548640"/>
-          </a:xfrm>
-          <a:prstGeom prst="rect">
-            <a:avLst/>
-          </a:prstGeom>
-          <a:noFill/>
-        </p:spPr>
-        <p:txBody>
-          <a:bodyPr wrap="square" anchor="t" lIns="0" rIns="0" tIns="0" bIns="0">
-            <a:noAutofit/>
-          </a:bodyPr>
-          <a:lstStyle/>
-          <a:p>
-            <a:pPr algn="l">
-              <a:lnSpc>
-                <a:spcPct val="130000"/>
-              </a:lnSpc>
-              <a:spcAft>
-                <a:spcPts val="0"/>
-              </a:spcAft>
-            </a:pPr>
-            <a:r>
-              <a:rPr sz="1250" b="0">
-                <a:solidFill>
-                  <a:srgbClr val="6B7280"/>
-                </a:solidFill>
-                <a:latin typeface="Inter"/>
-              </a:rPr>
-              <a:t>We were asked to do pay. Benefits can go in alongside it at no extra cost, and it is entirely up to Sussex Emmaus whether they bother.</a:t>
-            </a:r>
-          </a:p>
-        </p:txBody>
-      </p:sp>
-      <p:sp>
-        <p:nvSpPr>
-          <p:cNvPr id="7" name="Rectangle 6"/>
-          <p:cNvSpPr/>
-          <p:nvPr/>
-        </p:nvSpPr>
-        <p:spPr>
-          <a:xfrm>
-            <a:off x="658368" y="1938528"/>
-            <a:ext cx="3472586" cy="2834640"/>
-          </a:xfrm>
-          <a:prstGeom prst="rect">
-            <a:avLst/>
-          </a:prstGeom>
-          <a:solidFill>
-            <a:srgbClr val="FFFFFF"/>
-          </a:solidFill>
-          <a:ln w="12700">
-            <a:solidFill>
-              <a:srgbClr val="E7E0D4"/>
-            </a:solidFill>
-          </a:ln>
-          <a:effectLst/>
-        </p:spPr>
-        <p:style>
-          <a:lnRef idx="1">
-            <a:schemeClr val="accent1"/>
-          </a:lnRef>
-          <a:fillRef idx="3">
-            <a:schemeClr val="accent1"/>
-          </a:fillRef>
-          <a:effectRef idx="2">
-            <a:schemeClr val="accent1"/>
-          </a:effectRef>
-          <a:fontRef idx="minor">
-            <a:schemeClr val="lt1"/>
-          </a:fontRef>
-        </p:style>
-        <p:txBody>
-          <a:bodyPr rtlCol="0" anchor="ctr"/>
-          <a:lstStyle/>
-          <a:p>
-            <a:pPr algn="ctr"/>
-          </a:p>
-        </p:txBody>
-      </p:sp>
-      <p:sp>
-        <p:nvSpPr>
-          <p:cNvPr id="8" name="Rectangle 7"/>
-          <p:cNvSpPr/>
-          <p:nvPr/>
-        </p:nvSpPr>
-        <p:spPr>
-          <a:xfrm>
-            <a:off x="658368" y="1938528"/>
-            <a:ext cx="3472586" cy="50800"/>
-          </a:xfrm>
-          <a:prstGeom prst="rect">
-            <a:avLst/>
-          </a:prstGeom>
-          <a:solidFill>
-            <a:srgbClr val="C9785A"/>
-          </a:solidFill>
-          <a:ln>
-            <a:noFill/>
-          </a:ln>
-          <a:effectLst/>
-        </p:spPr>
-        <p:style>
-          <a:lnRef idx="1">
-            <a:schemeClr val="accent1"/>
-          </a:lnRef>
-          <a:fillRef idx="3">
-            <a:schemeClr val="accent1"/>
-          </a:fillRef>
-          <a:effectRef idx="2">
-            <a:schemeClr val="accent1"/>
-          </a:effectRef>
-          <a:fontRef idx="minor">
-            <a:schemeClr val="lt1"/>
-          </a:fontRef>
-        </p:style>
-        <p:txBody>
-          <a:bodyPr rtlCol="0" anchor="ctr"/>
-          <a:lstStyle/>
-          <a:p>
-            <a:pPr algn="ctr"/>
-          </a:p>
-        </p:txBody>
-      </p:sp>
-      <p:sp>
-        <p:nvSpPr>
-          <p:cNvPr id="9" name="TextBox 8"/>
-          <p:cNvSpPr txBox="1"/>
-          <p:nvPr/>
-        </p:nvSpPr>
-        <p:spPr>
-          <a:xfrm>
-            <a:off x="896112" y="2194560"/>
-            <a:ext cx="2997098" cy="201168"/>
-          </a:xfrm>
-          <a:prstGeom prst="rect">
-            <a:avLst/>
-          </a:prstGeom>
-          <a:noFill/>
-        </p:spPr>
-        <p:txBody>
-          <a:bodyPr wrap="square" anchor="t" lIns="0" rIns="0" tIns="0" bIns="0">
-            <a:noAutofit/>
-          </a:bodyPr>
-          <a:lstStyle/>
-          <a:p>
-            <a:pPr algn="l">
-              <a:lnSpc>
-                <a:spcPct val="115000"/>
-              </a:lnSpc>
-              <a:spcAft>
-                <a:spcPts val="0"/>
-              </a:spcAft>
-            </a:pPr>
-            <a:r>
-              <a:rPr sz="950" b="1">
-                <a:solidFill>
-                  <a:srgbClr val="C9785A"/>
-                </a:solidFill>
-                <a:latin typeface="Poppins"/>
-              </a:rPr>
-              <a:t>NO COST</a:t>
-            </a:r>
-          </a:p>
-        </p:txBody>
-      </p:sp>
-      <p:sp>
-        <p:nvSpPr>
-          <p:cNvPr id="10" name="TextBox 9"/>
-          <p:cNvSpPr txBox="1"/>
-          <p:nvPr/>
-        </p:nvSpPr>
-        <p:spPr>
-          <a:xfrm>
-            <a:off x="896112" y="2468880"/>
-            <a:ext cx="2997098" cy="365760"/>
-          </a:xfrm>
-          <a:prstGeom prst="rect">
-            <a:avLst/>
-          </a:prstGeom>
-          <a:noFill/>
-        </p:spPr>
-        <p:txBody>
-          <a:bodyPr wrap="square" anchor="t" lIns="0" rIns="0" tIns="0" bIns="0">
-            <a:noAutofit/>
-          </a:bodyPr>
-          <a:lstStyle/>
-          <a:p>
-            <a:pPr algn="l">
-              <a:lnSpc>
-                <a:spcPct val="110000"/>
-              </a:lnSpc>
-              <a:spcAft>
-                <a:spcPts val="0"/>
-              </a:spcAft>
-            </a:pPr>
-            <a:r>
-              <a:rPr sz="1700" b="1">
-                <a:solidFill>
-                  <a:srgbClr val="121C2B"/>
-                </a:solidFill>
-                <a:latin typeface="Poppins"/>
-              </a:rPr>
-              <a:t>Included either way</a:t>
-            </a:r>
-          </a:p>
-        </p:txBody>
-      </p:sp>
-      <p:sp>
-        <p:nvSpPr>
-          <p:cNvPr id="11" name="TextBox 10"/>
-          <p:cNvSpPr txBox="1"/>
-          <p:nvPr/>
-        </p:nvSpPr>
-        <p:spPr>
-          <a:xfrm>
-            <a:off x="896112" y="2871216"/>
-            <a:ext cx="2997098" cy="1719072"/>
-          </a:xfrm>
-          <a:prstGeom prst="rect">
-            <a:avLst/>
-          </a:prstGeom>
-          <a:noFill/>
-        </p:spPr>
-        <p:txBody>
-          <a:bodyPr wrap="square" anchor="t" lIns="0" rIns="0" tIns="0" bIns="0">
-            <a:noAutofit/>
-          </a:bodyPr>
-          <a:lstStyle/>
-          <a:p>
-            <a:pPr algn="l">
-              <a:lnSpc>
-                <a:spcPct val="128000"/>
-              </a:lnSpc>
-              <a:spcAft>
-                <a:spcPts val="700"/>
-              </a:spcAft>
-            </a:pPr>
-            <a:r>
-              <a:rPr sz="1150" b="0">
-                <a:solidFill>
-                  <a:srgbClr val="6B7280"/>
-                </a:solidFill>
-                <a:latin typeface="Inter"/>
-              </a:rPr>
-              <a:t>Benefits benchmarking is part of the package, not an add-on we charge for.</a:t>
-            </a:r>
-          </a:p>
-        </p:txBody>
-      </p:sp>
-      <p:sp>
-        <p:nvSpPr>
-          <p:cNvPr id="12" name="Rectangle 11"/>
-          <p:cNvSpPr/>
-          <p:nvPr/>
-        </p:nvSpPr>
-        <p:spPr>
-          <a:xfrm>
-            <a:off x="4359554" y="1938528"/>
-            <a:ext cx="3472586" cy="2834640"/>
-          </a:xfrm>
-          <a:prstGeom prst="rect">
-            <a:avLst/>
-          </a:prstGeom>
-          <a:solidFill>
-            <a:srgbClr val="FFFFFF"/>
-          </a:solidFill>
-          <a:ln w="12700">
-            <a:solidFill>
-              <a:srgbClr val="E7E0D4"/>
-            </a:solidFill>
-          </a:ln>
-          <a:effectLst/>
-        </p:spPr>
-        <p:style>
-          <a:lnRef idx="1">
-            <a:schemeClr val="accent1"/>
-          </a:lnRef>
-          <a:fillRef idx="3">
-            <a:schemeClr val="accent1"/>
-          </a:fillRef>
-          <a:effectRef idx="2">
-            <a:schemeClr val="accent1"/>
-          </a:effectRef>
-          <a:fontRef idx="minor">
-            <a:schemeClr val="lt1"/>
-          </a:fontRef>
-        </p:style>
-        <p:txBody>
-          <a:bodyPr rtlCol="0" anchor="ctr"/>
-          <a:lstStyle/>
-          <a:p>
-            <a:pPr algn="ctr"/>
-          </a:p>
-        </p:txBody>
-      </p:sp>
-      <p:sp>
-        <p:nvSpPr>
-          <p:cNvPr id="13" name="Rectangle 12"/>
-          <p:cNvSpPr/>
-          <p:nvPr/>
-        </p:nvSpPr>
-        <p:spPr>
-          <a:xfrm>
-            <a:off x="4359554" y="1938528"/>
-            <a:ext cx="3472586" cy="50800"/>
-          </a:xfrm>
-          <a:prstGeom prst="rect">
-            <a:avLst/>
-          </a:prstGeom>
-          <a:solidFill>
-            <a:srgbClr val="7285A5"/>
-          </a:solidFill>
-          <a:ln>
-            <a:noFill/>
-          </a:ln>
-          <a:effectLst/>
-        </p:spPr>
-        <p:style>
-          <a:lnRef idx="1">
-            <a:schemeClr val="accent1"/>
-          </a:lnRef>
-          <a:fillRef idx="3">
-            <a:schemeClr val="accent1"/>
-          </a:fillRef>
-          <a:effectRef idx="2">
-            <a:schemeClr val="accent1"/>
-          </a:effectRef>
-          <a:fontRef idx="minor">
-            <a:schemeClr val="lt1"/>
-          </a:fontRef>
-        </p:style>
-        <p:txBody>
-          <a:bodyPr rtlCol="0" anchor="ctr"/>
-          <a:lstStyle/>
-          <a:p>
-            <a:pPr algn="ctr"/>
-          </a:p>
-        </p:txBody>
-      </p:sp>
-      <p:sp>
-        <p:nvSpPr>
-          <p:cNvPr id="14" name="TextBox 13"/>
-          <p:cNvSpPr txBox="1"/>
-          <p:nvPr/>
-        </p:nvSpPr>
-        <p:spPr>
-          <a:xfrm>
-            <a:off x="4597298" y="2194560"/>
-            <a:ext cx="2997098" cy="201168"/>
-          </a:xfrm>
-          <a:prstGeom prst="rect">
-            <a:avLst/>
-          </a:prstGeom>
-          <a:noFill/>
-        </p:spPr>
-        <p:txBody>
-          <a:bodyPr wrap="square" anchor="t" lIns="0" rIns="0" tIns="0" bIns="0">
-            <a:noAutofit/>
-          </a:bodyPr>
-          <a:lstStyle/>
-          <a:p>
-            <a:pPr algn="l">
-              <a:lnSpc>
-                <a:spcPct val="115000"/>
-              </a:lnSpc>
-              <a:spcAft>
-                <a:spcPts val="0"/>
-              </a:spcAft>
-            </a:pPr>
-            <a:r>
-              <a:rPr sz="950" b="1">
-                <a:solidFill>
-                  <a:srgbClr val="7285A5"/>
-                </a:solidFill>
-                <a:latin typeface="Poppins"/>
-              </a:rPr>
-              <a:t>WHAT WE NEED</a:t>
-            </a:r>
-          </a:p>
-        </p:txBody>
-      </p:sp>
-      <p:sp>
-        <p:nvSpPr>
-          <p:cNvPr id="15" name="TextBox 14"/>
-          <p:cNvSpPr txBox="1"/>
-          <p:nvPr/>
-        </p:nvSpPr>
-        <p:spPr>
-          <a:xfrm>
-            <a:off x="4597298" y="2468880"/>
-            <a:ext cx="2997098" cy="365760"/>
-          </a:xfrm>
-          <a:prstGeom prst="rect">
-            <a:avLst/>
-          </a:prstGeom>
-          <a:noFill/>
-        </p:spPr>
-        <p:txBody>
-          <a:bodyPr wrap="square" anchor="t" lIns="0" rIns="0" tIns="0" bIns="0">
-            <a:noAutofit/>
-          </a:bodyPr>
-          <a:lstStyle/>
-          <a:p>
-            <a:pPr algn="l">
-              <a:lnSpc>
-                <a:spcPct val="110000"/>
-              </a:lnSpc>
-              <a:spcAft>
-                <a:spcPts val="0"/>
-              </a:spcAft>
-            </a:pPr>
-            <a:r>
-              <a:rPr sz="1700" b="1">
-                <a:solidFill>
-                  <a:srgbClr val="121C2B"/>
-                </a:solidFill>
-                <a:latin typeface="Poppins"/>
-              </a:rPr>
-              <a:t>A list of what they offer</a:t>
-            </a:r>
-          </a:p>
-        </p:txBody>
-      </p:sp>
-      <p:sp>
-        <p:nvSpPr>
-          <p:cNvPr id="16" name="TextBox 15"/>
-          <p:cNvSpPr txBox="1"/>
-          <p:nvPr/>
-        </p:nvSpPr>
-        <p:spPr>
-          <a:xfrm>
-            <a:off x="4597298" y="2871216"/>
-            <a:ext cx="2997098" cy="1719072"/>
-          </a:xfrm>
-          <a:prstGeom prst="rect">
-            <a:avLst/>
-          </a:prstGeom>
-          <a:noFill/>
-        </p:spPr>
-        <p:txBody>
-          <a:bodyPr wrap="square" anchor="t" lIns="0" rIns="0" tIns="0" bIns="0">
-            <a:noAutofit/>
-          </a:bodyPr>
-          <a:lstStyle/>
-          <a:p>
-            <a:pPr algn="l">
-              <a:lnSpc>
-                <a:spcPct val="128000"/>
-              </a:lnSpc>
-              <a:spcAft>
-                <a:spcPts val="700"/>
-              </a:spcAft>
-            </a:pPr>
-            <a:r>
-              <a:rPr sz="1150" b="0">
-                <a:solidFill>
-                  <a:srgbClr val="6B7280"/>
-                </a:solidFill>
-                <a:latin typeface="Inter"/>
-              </a:rPr>
-              <a:t>Pension, leave, sick pay, and whatever else they provide.</a:t>
-            </a:r>
-          </a:p>
-          <a:p>
-            <a:pPr algn="l">
-              <a:lnSpc>
-                <a:spcPct val="128000"/>
-              </a:lnSpc>
-              <a:spcAft>
-                <a:spcPts val="700"/>
-              </a:spcAft>
-            </a:pPr>
-            <a:r>
-              <a:rPr sz="1150" b="0">
-                <a:solidFill>
-                  <a:srgbClr val="6B7280"/>
-                </a:solidFill>
-                <a:latin typeface="Inter"/>
-              </a:rPr>
-              <a:t>No particular format needed.</a:t>
-            </a:r>
-          </a:p>
-        </p:txBody>
-      </p:sp>
-      <p:sp>
-        <p:nvSpPr>
-          <p:cNvPr id="17" name="Rectangle 16"/>
-          <p:cNvSpPr/>
-          <p:nvPr/>
-        </p:nvSpPr>
-        <p:spPr>
-          <a:xfrm>
-            <a:off x="8060740" y="1938528"/>
-            <a:ext cx="3472586" cy="2834640"/>
-          </a:xfrm>
-          <a:prstGeom prst="rect">
-            <a:avLst/>
-          </a:prstGeom>
-          <a:solidFill>
-            <a:srgbClr val="FFFFFF"/>
-          </a:solidFill>
-          <a:ln w="12700">
-            <a:solidFill>
-              <a:srgbClr val="E7E0D4"/>
-            </a:solidFill>
-          </a:ln>
-          <a:effectLst/>
-        </p:spPr>
-        <p:style>
-          <a:lnRef idx="1">
-            <a:schemeClr val="accent1"/>
-          </a:lnRef>
-          <a:fillRef idx="3">
-            <a:schemeClr val="accent1"/>
-          </a:fillRef>
-          <a:effectRef idx="2">
-            <a:schemeClr val="accent1"/>
-          </a:effectRef>
-          <a:fontRef idx="minor">
-            <a:schemeClr val="lt1"/>
-          </a:fontRef>
-        </p:style>
-        <p:txBody>
-          <a:bodyPr rtlCol="0" anchor="ctr"/>
-          <a:lstStyle/>
-          <a:p>
-            <a:pPr algn="ctr"/>
-          </a:p>
-        </p:txBody>
-      </p:sp>
-      <p:sp>
-        <p:nvSpPr>
-          <p:cNvPr id="18" name="Rectangle 17"/>
-          <p:cNvSpPr/>
-          <p:nvPr/>
-        </p:nvSpPr>
-        <p:spPr>
-          <a:xfrm>
-            <a:off x="8060740" y="1938528"/>
-            <a:ext cx="3472586" cy="50800"/>
-          </a:xfrm>
-          <a:prstGeom prst="rect">
-            <a:avLst/>
-          </a:prstGeom>
-          <a:solidFill>
-            <a:srgbClr val="121C2B"/>
-          </a:solidFill>
-          <a:ln>
-            <a:noFill/>
-          </a:ln>
-          <a:effectLst/>
-        </p:spPr>
-        <p:style>
-          <a:lnRef idx="1">
-            <a:schemeClr val="accent1"/>
-          </a:lnRef>
-          <a:fillRef idx="3">
-            <a:schemeClr val="accent1"/>
-          </a:fillRef>
-          <a:effectRef idx="2">
-            <a:schemeClr val="accent1"/>
-          </a:effectRef>
-          <a:fontRef idx="minor">
-            <a:schemeClr val="lt1"/>
-          </a:fontRef>
-        </p:style>
-        <p:txBody>
-          <a:bodyPr rtlCol="0" anchor="ctr"/>
-          <a:lstStyle/>
-          <a:p>
-            <a:pPr algn="ctr"/>
-          </a:p>
-        </p:txBody>
-      </p:sp>
-      <p:sp>
-        <p:nvSpPr>
-          <p:cNvPr id="19" name="TextBox 18"/>
-          <p:cNvSpPr txBox="1"/>
-          <p:nvPr/>
-        </p:nvSpPr>
-        <p:spPr>
-          <a:xfrm>
-            <a:off x="8298484" y="2194560"/>
-            <a:ext cx="2997098" cy="201168"/>
-          </a:xfrm>
-          <a:prstGeom prst="rect">
-            <a:avLst/>
-          </a:prstGeom>
-          <a:noFill/>
-        </p:spPr>
-        <p:txBody>
-          <a:bodyPr wrap="square" anchor="t" lIns="0" rIns="0" tIns="0" bIns="0">
-            <a:noAutofit/>
-          </a:bodyPr>
-          <a:lstStyle/>
-          <a:p>
-            <a:pPr algn="l">
-              <a:lnSpc>
-                <a:spcPct val="115000"/>
-              </a:lnSpc>
-              <a:spcAft>
-                <a:spcPts val="0"/>
-              </a:spcAft>
-            </a:pPr>
-            <a:r>
-              <a:rPr sz="950" b="1">
-                <a:solidFill>
-                  <a:srgbClr val="121C2B"/>
-                </a:solidFill>
-                <a:latin typeface="Poppins"/>
-              </a:rPr>
-              <a:t>WORTH KNOWING</a:t>
-            </a:r>
-          </a:p>
-        </p:txBody>
-      </p:sp>
-      <p:sp>
-        <p:nvSpPr>
-          <p:cNvPr id="20" name="TextBox 19"/>
-          <p:cNvSpPr txBox="1"/>
-          <p:nvPr/>
-        </p:nvSpPr>
-        <p:spPr>
-          <a:xfrm>
-            <a:off x="8298484" y="2468880"/>
-            <a:ext cx="2997098" cy="365760"/>
-          </a:xfrm>
-          <a:prstGeom prst="rect">
-            <a:avLst/>
-          </a:prstGeom>
-          <a:noFill/>
-        </p:spPr>
-        <p:txBody>
-          <a:bodyPr wrap="square" anchor="t" lIns="0" rIns="0" tIns="0" bIns="0">
-            <a:noAutofit/>
-          </a:bodyPr>
-          <a:lstStyle/>
-          <a:p>
-            <a:pPr algn="l">
-              <a:lnSpc>
-                <a:spcPct val="110000"/>
-              </a:lnSpc>
-              <a:spcAft>
-                <a:spcPts val="0"/>
-              </a:spcAft>
-            </a:pPr>
-            <a:r>
-              <a:rPr sz="1700" b="1">
-                <a:solidFill>
-                  <a:srgbClr val="121C2B"/>
-                </a:solidFill>
-                <a:latin typeface="Poppins"/>
-              </a:rPr>
-              <a:t>A different method</a:t>
-            </a:r>
-          </a:p>
-        </p:txBody>
-      </p:sp>
-      <p:sp>
-        <p:nvSpPr>
-          <p:cNvPr id="21" name="TextBox 20"/>
-          <p:cNvSpPr txBox="1"/>
-          <p:nvPr/>
-        </p:nvSpPr>
-        <p:spPr>
-          <a:xfrm>
-            <a:off x="8298484" y="2871216"/>
-            <a:ext cx="2997098" cy="1719072"/>
-          </a:xfrm>
-          <a:prstGeom prst="rect">
-            <a:avLst/>
-          </a:prstGeom>
-          <a:noFill/>
-        </p:spPr>
-        <p:txBody>
-          <a:bodyPr wrap="square" anchor="t" lIns="0" rIns="0" tIns="0" bIns="0">
-            <a:noAutofit/>
-          </a:bodyPr>
-          <a:lstStyle/>
-          <a:p>
-            <a:pPr algn="l">
-              <a:lnSpc>
-                <a:spcPct val="128000"/>
-              </a:lnSpc>
-              <a:spcAft>
-                <a:spcPts val="700"/>
-              </a:spcAft>
-            </a:pPr>
-            <a:r>
-              <a:rPr sz="1150" b="0">
-                <a:solidFill>
-                  <a:srgbClr val="6B7280"/>
-                </a:solidFill>
-                <a:latin typeface="Inter"/>
-              </a:rPr>
-              <a:t>Benefits come from survey and audit evidence rather than job adverts.</a:t>
-            </a:r>
-          </a:p>
-          <a:p>
-            <a:pPr algn="l">
-              <a:lnSpc>
-                <a:spcPct val="128000"/>
-              </a:lnSpc>
-              <a:spcAft>
-                <a:spcPts val="700"/>
-              </a:spcAft>
-            </a:pPr>
-            <a:r>
-              <a:rPr sz="1150" b="0">
-                <a:solidFill>
-                  <a:srgbClr val="6B7280"/>
-                </a:solidFill>
-                <a:latin typeface="Inter"/>
-              </a:rPr>
-              <a:t>So they run a cycle behind pay.</a:t>
-            </a:r>
-          </a:p>
-        </p:txBody>
-      </p:sp>
-      <p:sp>
-        <p:nvSpPr>
-          <p:cNvPr id="22" name="TextBox 21"/>
-          <p:cNvSpPr txBox="1"/>
-          <p:nvPr/>
-        </p:nvSpPr>
-        <p:spPr>
-          <a:xfrm>
-            <a:off x="658368" y="5029200"/>
-            <a:ext cx="10874959" cy="365760"/>
-          </a:xfrm>
-          <a:prstGeom prst="rect">
-            <a:avLst/>
-          </a:prstGeom>
-          <a:noFill/>
-        </p:spPr>
-        <p:txBody>
-          <a:bodyPr wrap="square" anchor="t" lIns="0" rIns="0" tIns="0" bIns="0">
-            <a:noAutofit/>
-          </a:bodyPr>
-          <a:lstStyle/>
-          <a:p>
-            <a:pPr algn="l">
-              <a:lnSpc>
-                <a:spcPct val="130000"/>
-              </a:lnSpc>
-              <a:spcAft>
-                <a:spcPts val="0"/>
-              </a:spcAft>
-            </a:pPr>
-            <a:r>
-              <a:rPr sz="1200" b="0">
-                <a:solidFill>
-                  <a:srgbClr val="6B7280"/>
-                </a:solidFill>
-                <a:latin typeface="Inter"/>
-              </a:rPr>
-              <a:t>There is no deadline on this. Benefits can be added after the dashboard is live without rebuilding anything.</a:t>
-            </a:r>
-          </a:p>
-        </p:txBody>
-      </p:sp>
-      <p:sp>
-        <p:nvSpPr>
-          <p:cNvPr id="23" name="TextBox 22"/>
-          <p:cNvSpPr txBox="1"/>
-          <p:nvPr/>
-        </p:nvSpPr>
-        <p:spPr>
-          <a:xfrm>
-            <a:off x="658368" y="6455664"/>
-            <a:ext cx="6400800" cy="219456"/>
-          </a:xfrm>
-          <a:prstGeom prst="rect">
-            <a:avLst/>
-          </a:prstGeom>
-          <a:noFill/>
-        </p:spPr>
-        <p:txBody>
-          <a:bodyPr wrap="square" anchor="t" lIns="0" rIns="0" tIns="0" bIns="0">
-            <a:noAutofit/>
-          </a:bodyPr>
-          <a:lstStyle/>
-          <a:p>
-            <a:pPr algn="l">
-              <a:lnSpc>
-                <a:spcPct val="115000"/>
-              </a:lnSpc>
-              <a:spcAft>
-                <a:spcPts val="0"/>
-              </a:spcAft>
-            </a:pPr>
-            <a:r>
-              <a:rPr sz="850" b="0">
-                <a:solidFill>
-                  <a:srgbClr val="9AA1AC"/>
-                </a:solidFill>
-                <a:latin typeface="Inter"/>
-              </a:rPr>
-              <a:t>Sussex Emmaus · Zigbert · September 2026</a:t>
-            </a:r>
-          </a:p>
-        </p:txBody>
-      </p:sp>
-      <p:sp>
-        <p:nvSpPr>
-          <p:cNvPr id="24" name="TextBox 23"/>
-          <p:cNvSpPr txBox="1"/>
-          <p:nvPr/>
-        </p:nvSpPr>
-        <p:spPr>
-          <a:xfrm>
-            <a:off x="10618927" y="6455664"/>
-            <a:ext cx="914400" cy="219456"/>
-          </a:xfrm>
-          <a:prstGeom prst="rect">
-            <a:avLst/>
-          </a:prstGeom>
-          <a:noFill/>
-        </p:spPr>
-        <p:txBody>
-          <a:bodyPr wrap="square" anchor="t" lIns="0" rIns="0" tIns="0" bIns="0">
-            <a:noAutofit/>
-          </a:bodyPr>
-          <a:lstStyle/>
-          <a:p>
-            <a:pPr algn="r">
-              <a:lnSpc>
-                <a:spcPct val="115000"/>
-              </a:lnSpc>
-              <a:spcAft>
-                <a:spcPts val="0"/>
-              </a:spcAft>
-            </a:pPr>
-            <a:r>
-              <a:rPr sz="850" b="0">
-                <a:solidFill>
-                  <a:srgbClr val="9AA1AC"/>
-                </a:solidFill>
-                <a:latin typeface="Inter"/>
-              </a:rPr>
-              <a:t>5</a:t>
-            </a:r>
-          </a:p>
-        </p:txBody>
-      </p:sp>
-    </p:spTree>
-  </p:cSld>
-  <p:clrMapOvr>
-    <a:masterClrMapping/>
-  </p:clrMapOvr>
-</p:sld>
-</file>
-
-<file path=ppt/slides/slide7.xml><?xml version="1.0" encoding="utf-8"?>
-<p:sld xmlns:a="http://schemas.openxmlformats.org/drawingml/2006/main" xmlns:p="http://schemas.openxmlformats.org/presentationml/2006/main" xmlns:r="http://schemas.openxmlformats.org/officeDocument/2006/relationships">
-  <p:cSld>
-    <p:bg>
-      <p:bgPr>
-        <a:solidFill>
-          <a:srgbClr val="F4F1EA"/>
-        </a:solidFill>
-        <a:effectLst/>
-      </p:bgPr>
-    </p:bg>
-    <p:spTree>
-      <p:nvGrpSpPr>
-        <p:cNvPr id="1" name=""/>
-        <p:cNvGrpSpPr/>
-        <p:nvPr/>
-      </p:nvGrpSpPr>
-      <p:grpSpPr/>
-      <p:sp>
-        <p:nvSpPr>
-          <p:cNvPr id="2" name="Rectangle 1"/>
-          <p:cNvSpPr/>
-          <p:nvPr/>
-        </p:nvSpPr>
-        <p:spPr>
-          <a:xfrm>
-            <a:off x="0" y="0"/>
-            <a:ext cx="274320" cy="6858000"/>
-          </a:xfrm>
-          <a:prstGeom prst="rect">
-            <a:avLst/>
-          </a:prstGeom>
-          <a:solidFill>
-            <a:srgbClr val="C9785A"/>
-          </a:solidFill>
-          <a:ln>
-            <a:noFill/>
-          </a:ln>
-          <a:effectLst/>
-        </p:spPr>
-        <p:style>
-          <a:lnRef idx="1">
-            <a:schemeClr val="accent1"/>
-          </a:lnRef>
-          <a:fillRef idx="3">
-            <a:schemeClr val="accent1"/>
-          </a:fillRef>
-          <a:effectRef idx="2">
-            <a:schemeClr val="accent1"/>
-          </a:effectRef>
-          <a:fontRef idx="minor">
-            <a:schemeClr val="lt1"/>
-          </a:fontRef>
-        </p:style>
-        <p:txBody>
-          <a:bodyPr rtlCol="0" anchor="ctr"/>
-          <a:lstStyle/>
-          <a:p>
-            <a:pPr algn="ctr"/>
-          </a:p>
-        </p:txBody>
-      </p:sp>
-      <p:pic>
-        <p:nvPicPr>
-          <p:cNvPr id="3" name="Picture 2" descr="zigbert-logo.png"/>
-          <p:cNvPicPr>
-            <a:picLocks noChangeAspect="1"/>
-          </p:cNvPicPr>
-          <p:nvPr/>
-        </p:nvPicPr>
-        <p:blipFill>
-          <a:blip r:embed="rId2"/>
-          <a:stretch>
-            <a:fillRect/>
-          </a:stretch>
-        </p:blipFill>
-        <p:spPr>
-          <a:xfrm>
-            <a:off x="10161727" y="365760"/>
-            <a:ext cx="1371600" cy="411905"/>
-          </a:xfrm>
-          <a:prstGeom prst="rect">
-            <a:avLst/>
-          </a:prstGeom>
-        </p:spPr>
-      </p:pic>
-      <p:sp>
-        <p:nvSpPr>
-          <p:cNvPr id="4" name="TextBox 3"/>
-          <p:cNvSpPr txBox="1"/>
-          <p:nvPr/>
-        </p:nvSpPr>
-        <p:spPr>
-          <a:xfrm>
-            <a:off x="658368" y="402336"/>
-            <a:ext cx="10874959" cy="237744"/>
-          </a:xfrm>
-          <a:prstGeom prst="rect">
-            <a:avLst/>
-          </a:prstGeom>
-          <a:noFill/>
-        </p:spPr>
-        <p:txBody>
-          <a:bodyPr wrap="square" anchor="t" lIns="0" rIns="0" tIns="0" bIns="0">
-            <a:noAutofit/>
-          </a:bodyPr>
-          <a:lstStyle/>
-          <a:p>
-            <a:pPr algn="l">
-              <a:lnSpc>
-                <a:spcPct val="115000"/>
-              </a:lnSpc>
-              <a:spcAft>
-                <a:spcPts val="0"/>
-              </a:spcAft>
-            </a:pPr>
-            <a:r>
-              <a:rPr sz="1100" b="1">
-                <a:solidFill>
-                  <a:srgbClr val="B0603F"/>
-                </a:solidFill>
-                <a:latin typeface="Poppins"/>
-              </a:rPr>
-              <a:t>TO TAKE AWAY</a:t>
-            </a:r>
-          </a:p>
-        </p:txBody>
-      </p:sp>
-      <p:sp>
-        <p:nvSpPr>
-          <p:cNvPr id="5" name="TextBox 4"/>
-          <p:cNvSpPr txBox="1"/>
-          <p:nvPr/>
-        </p:nvSpPr>
-        <p:spPr>
-          <a:xfrm>
-            <a:off x="658368" y="676656"/>
-            <a:ext cx="10874959" cy="457200"/>
-          </a:xfrm>
-          <a:prstGeom prst="rect">
-            <a:avLst/>
-          </a:prstGeom>
-          <a:noFill/>
-        </p:spPr>
-        <p:txBody>
-          <a:bodyPr wrap="square" anchor="t" lIns="0" rIns="0" tIns="0" bIns="0">
-            <a:noAutofit/>
-          </a:bodyPr>
-          <a:lstStyle/>
-          <a:p>
-            <a:pPr algn="l">
-              <a:lnSpc>
-                <a:spcPct val="115000"/>
-              </a:lnSpc>
-              <a:spcAft>
-                <a:spcPts val="0"/>
-              </a:spcAft>
-            </a:pPr>
-            <a:r>
-              <a:rPr sz="2900" b="1">
-                <a:solidFill>
-                  <a:srgbClr val="121C2B"/>
-                </a:solidFill>
-                <a:latin typeface="Poppins"/>
-              </a:rPr>
-              <a:t>Three things from you</a:t>
-            </a:r>
-          </a:p>
-        </p:txBody>
-      </p:sp>
-      <p:sp>
-        <p:nvSpPr>
-          <p:cNvPr id="6" name="TextBox 5"/>
-          <p:cNvSpPr txBox="1"/>
-          <p:nvPr/>
-        </p:nvSpPr>
-        <p:spPr>
-          <a:xfrm>
-            <a:off x="658368" y="1188720"/>
-            <a:ext cx="10424160" cy="548640"/>
-          </a:xfrm>
-          <a:prstGeom prst="rect">
-            <a:avLst/>
-          </a:prstGeom>
-          <a:noFill/>
-        </p:spPr>
-        <p:txBody>
-          <a:bodyPr wrap="square" anchor="t" lIns="0" rIns="0" tIns="0" bIns="0">
-            <a:noAutofit/>
-          </a:bodyPr>
-          <a:lstStyle/>
-          <a:p>
-            <a:pPr algn="l">
-              <a:lnSpc>
-                <a:spcPct val="130000"/>
-              </a:lnSpc>
-              <a:spcAft>
-                <a:spcPts val="0"/>
-              </a:spcAft>
-            </a:pPr>
-            <a:r>
-              <a:rPr sz="1250" b="0">
-                <a:solidFill>
-                  <a:srgbClr val="6B7280"/>
-                </a:solidFill>
-                <a:latin typeface="Inter"/>
-              </a:rPr>
-              <a:t>Everything else is on our side. None of it is urgent enough to hold up the build except the first one.</a:t>
-            </a:r>
-          </a:p>
-        </p:txBody>
-      </p:sp>
-      <p:sp>
-        <p:nvSpPr>
-          <p:cNvPr id="7" name="Rectangle 6"/>
-          <p:cNvSpPr/>
-          <p:nvPr/>
-        </p:nvSpPr>
-        <p:spPr>
-          <a:xfrm>
-            <a:off x="658368" y="1719072"/>
-            <a:ext cx="3472586" cy="2834640"/>
-          </a:xfrm>
-          <a:prstGeom prst="rect">
-            <a:avLst/>
-          </a:prstGeom>
-          <a:solidFill>
-            <a:srgbClr val="FFFFFF"/>
-          </a:solidFill>
-          <a:ln w="12700">
-            <a:solidFill>
-              <a:srgbClr val="E7E0D4"/>
-            </a:solidFill>
-          </a:ln>
-          <a:effectLst/>
-        </p:spPr>
-        <p:style>
-          <a:lnRef idx="1">
-            <a:schemeClr val="accent1"/>
-          </a:lnRef>
-          <a:fillRef idx="3">
-            <a:schemeClr val="accent1"/>
-          </a:fillRef>
-          <a:effectRef idx="2">
-            <a:schemeClr val="accent1"/>
-          </a:effectRef>
-          <a:fontRef idx="minor">
-            <a:schemeClr val="lt1"/>
-          </a:fontRef>
-        </p:style>
-        <p:txBody>
-          <a:bodyPr rtlCol="0" anchor="ctr"/>
-          <a:lstStyle/>
-          <a:p>
-            <a:pPr algn="ctr"/>
-          </a:p>
-        </p:txBody>
-      </p:sp>
-      <p:sp>
-        <p:nvSpPr>
-          <p:cNvPr id="8" name="Rectangle 7"/>
-          <p:cNvSpPr/>
-          <p:nvPr/>
-        </p:nvSpPr>
-        <p:spPr>
-          <a:xfrm>
-            <a:off x="658368" y="1719072"/>
-            <a:ext cx="3472586" cy="50800"/>
-          </a:xfrm>
-          <a:prstGeom prst="rect">
-            <a:avLst/>
-          </a:prstGeom>
-          <a:solidFill>
-            <a:srgbClr val="C9785A"/>
-          </a:solidFill>
-          <a:ln>
-            <a:noFill/>
-          </a:ln>
-          <a:effectLst/>
-        </p:spPr>
-        <p:style>
-          <a:lnRef idx="1">
-            <a:schemeClr val="accent1"/>
-          </a:lnRef>
-          <a:fillRef idx="3">
-            <a:schemeClr val="accent1"/>
-          </a:fillRef>
-          <a:effectRef idx="2">
-            <a:schemeClr val="accent1"/>
-          </a:effectRef>
-          <a:fontRef idx="minor">
-            <a:schemeClr val="lt1"/>
-          </a:fontRef>
-        </p:style>
-        <p:txBody>
-          <a:bodyPr rtlCol="0" anchor="ctr"/>
-          <a:lstStyle/>
-          <a:p>
-            <a:pPr algn="ctr"/>
-          </a:p>
-        </p:txBody>
-      </p:sp>
-      <p:sp>
-        <p:nvSpPr>
-          <p:cNvPr id="9" name="TextBox 8"/>
-          <p:cNvSpPr txBox="1"/>
-          <p:nvPr/>
-        </p:nvSpPr>
-        <p:spPr>
-          <a:xfrm>
-            <a:off x="896112" y="1975104"/>
-            <a:ext cx="2997098" cy="201168"/>
-          </a:xfrm>
-          <a:prstGeom prst="rect">
-            <a:avLst/>
-          </a:prstGeom>
-          <a:noFill/>
-        </p:spPr>
-        <p:txBody>
-          <a:bodyPr wrap="square" anchor="t" lIns="0" rIns="0" tIns="0" bIns="0">
-            <a:noAutofit/>
-          </a:bodyPr>
-          <a:lstStyle/>
-          <a:p>
-            <a:pPr algn="l">
-              <a:lnSpc>
-                <a:spcPct val="115000"/>
-              </a:lnSpc>
-              <a:spcAft>
-                <a:spcPts val="0"/>
-              </a:spcAft>
-            </a:pPr>
-            <a:r>
-              <a:rPr sz="950" b="1">
-                <a:solidFill>
-                  <a:srgbClr val="C9785A"/>
-                </a:solidFill>
-                <a:latin typeface="Poppins"/>
-              </a:rPr>
-              <a:t>ONE</a:t>
-            </a:r>
-          </a:p>
-        </p:txBody>
-      </p:sp>
-      <p:sp>
-        <p:nvSpPr>
-          <p:cNvPr id="10" name="TextBox 9"/>
-          <p:cNvSpPr txBox="1"/>
-          <p:nvPr/>
-        </p:nvSpPr>
-        <p:spPr>
-          <a:xfrm>
-            <a:off x="896112" y="2249424"/>
-            <a:ext cx="2997098" cy="365760"/>
-          </a:xfrm>
-          <a:prstGeom prst="rect">
-            <a:avLst/>
-          </a:prstGeom>
-          <a:noFill/>
-        </p:spPr>
-        <p:txBody>
-          <a:bodyPr wrap="square" anchor="t" lIns="0" rIns="0" tIns="0" bIns="0">
-            <a:noAutofit/>
-          </a:bodyPr>
-          <a:lstStyle/>
-          <a:p>
-            <a:pPr algn="l">
-              <a:lnSpc>
-                <a:spcPct val="110000"/>
-              </a:lnSpc>
-              <a:spcAft>
-                <a:spcPts val="0"/>
-              </a:spcAft>
-            </a:pPr>
-            <a:r>
-              <a:rPr sz="1700" b="1">
-                <a:solidFill>
-                  <a:srgbClr val="121C2B"/>
-                </a:solidFill>
-                <a:latin typeface="Poppins"/>
-              </a:rPr>
-              <a:t>What levels 1 to 4 mean</a:t>
-            </a:r>
-          </a:p>
-        </p:txBody>
-      </p:sp>
-      <p:sp>
-        <p:nvSpPr>
-          <p:cNvPr id="11" name="TextBox 10"/>
-          <p:cNvSpPr txBox="1"/>
-          <p:nvPr/>
-        </p:nvSpPr>
-        <p:spPr>
-          <a:xfrm>
-            <a:off x="896112" y="2651760"/>
-            <a:ext cx="2997098" cy="1719072"/>
-          </a:xfrm>
-          <a:prstGeom prst="rect">
-            <a:avLst/>
-          </a:prstGeom>
-          <a:noFill/>
-        </p:spPr>
-        <p:txBody>
-          <a:bodyPr wrap="square" anchor="t" lIns="0" rIns="0" tIns="0" bIns="0">
-            <a:noAutofit/>
-          </a:bodyPr>
-          <a:lstStyle/>
-          <a:p>
-            <a:pPr algn="l">
-              <a:lnSpc>
-                <a:spcPct val="128000"/>
-              </a:lnSpc>
-              <a:spcAft>
-                <a:spcPts val="700"/>
-              </a:spcAft>
-            </a:pPr>
-            <a:r>
-              <a:rPr sz="1150" b="0">
-                <a:solidFill>
-                  <a:srgbClr val="6B7280"/>
-                </a:solidFill>
-                <a:latin typeface="Inter"/>
-              </a:rPr>
-              <a:t>A line each, or just whether 1 is the most senior or the most junior.</a:t>
-            </a:r>
-          </a:p>
-          <a:p>
-            <a:pPr algn="l">
-              <a:lnSpc>
-                <a:spcPct val="128000"/>
-              </a:lnSpc>
-              <a:spcAft>
-                <a:spcPts val="700"/>
-              </a:spcAft>
-            </a:pPr>
-            <a:r>
-              <a:rPr sz="1150" b="0">
-                <a:solidFill>
-                  <a:srgbClr val="6B7280"/>
-                </a:solidFill>
-                <a:latin typeface="Inter"/>
-              </a:rPr>
-              <a:t>This is the only one that holds up the build.</a:t>
-            </a:r>
-          </a:p>
-        </p:txBody>
-      </p:sp>
-      <p:sp>
-        <p:nvSpPr>
-          <p:cNvPr id="12" name="Rectangle 11"/>
-          <p:cNvSpPr/>
-          <p:nvPr/>
-        </p:nvSpPr>
-        <p:spPr>
-          <a:xfrm>
-            <a:off x="4359554" y="1719072"/>
-            <a:ext cx="3472586" cy="2834640"/>
-          </a:xfrm>
-          <a:prstGeom prst="rect">
-            <a:avLst/>
-          </a:prstGeom>
-          <a:solidFill>
-            <a:srgbClr val="FFFFFF"/>
-          </a:solidFill>
-          <a:ln w="12700">
-            <a:solidFill>
-              <a:srgbClr val="E7E0D4"/>
-            </a:solidFill>
-          </a:ln>
-          <a:effectLst/>
-        </p:spPr>
-        <p:style>
-          <a:lnRef idx="1">
-            <a:schemeClr val="accent1"/>
-          </a:lnRef>
-          <a:fillRef idx="3">
-            <a:schemeClr val="accent1"/>
-          </a:fillRef>
-          <a:effectRef idx="2">
-            <a:schemeClr val="accent1"/>
-          </a:effectRef>
-          <a:fontRef idx="minor">
-            <a:schemeClr val="lt1"/>
-          </a:fontRef>
-        </p:style>
-        <p:txBody>
-          <a:bodyPr rtlCol="0" anchor="ctr"/>
-          <a:lstStyle/>
-          <a:p>
-            <a:pPr algn="ctr"/>
-          </a:p>
-        </p:txBody>
-      </p:sp>
-      <p:sp>
-        <p:nvSpPr>
-          <p:cNvPr id="13" name="Rectangle 12"/>
-          <p:cNvSpPr/>
-          <p:nvPr/>
-        </p:nvSpPr>
-        <p:spPr>
-          <a:xfrm>
-            <a:off x="4359554" y="1719072"/>
-            <a:ext cx="3472586" cy="50800"/>
-          </a:xfrm>
-          <a:prstGeom prst="rect">
-            <a:avLst/>
-          </a:prstGeom>
-          <a:solidFill>
-            <a:srgbClr val="7285A5"/>
-          </a:solidFill>
-          <a:ln>
-            <a:noFill/>
-          </a:ln>
-          <a:effectLst/>
-        </p:spPr>
-        <p:style>
-          <a:lnRef idx="1">
-            <a:schemeClr val="accent1"/>
-          </a:lnRef>
-          <a:fillRef idx="3">
-            <a:schemeClr val="accent1"/>
-          </a:fillRef>
-          <a:effectRef idx="2">
-            <a:schemeClr val="accent1"/>
-          </a:effectRef>
-          <a:fontRef idx="minor">
-            <a:schemeClr val="lt1"/>
-          </a:fontRef>
-        </p:style>
-        <p:txBody>
-          <a:bodyPr rtlCol="0" anchor="ctr"/>
-          <a:lstStyle/>
-          <a:p>
-            <a:pPr algn="ctr"/>
-          </a:p>
-        </p:txBody>
-      </p:sp>
-      <p:sp>
-        <p:nvSpPr>
-          <p:cNvPr id="14" name="TextBox 13"/>
-          <p:cNvSpPr txBox="1"/>
-          <p:nvPr/>
-        </p:nvSpPr>
-        <p:spPr>
-          <a:xfrm>
-            <a:off x="4597298" y="1975104"/>
-            <a:ext cx="2997098" cy="201168"/>
-          </a:xfrm>
-          <a:prstGeom prst="rect">
-            <a:avLst/>
-          </a:prstGeom>
-          <a:noFill/>
-        </p:spPr>
-        <p:txBody>
-          <a:bodyPr wrap="square" anchor="t" lIns="0" rIns="0" tIns="0" bIns="0">
-            <a:noAutofit/>
-          </a:bodyPr>
-          <a:lstStyle/>
-          <a:p>
-            <a:pPr algn="l">
-              <a:lnSpc>
-                <a:spcPct val="115000"/>
-              </a:lnSpc>
-              <a:spcAft>
-                <a:spcPts val="0"/>
-              </a:spcAft>
-            </a:pPr>
-            <a:r>
-              <a:rPr sz="950" b="1">
-                <a:solidFill>
-                  <a:srgbClr val="7285A5"/>
-                </a:solidFill>
-                <a:latin typeface="Poppins"/>
-              </a:rPr>
-              <a:t>TWO</a:t>
-            </a:r>
-          </a:p>
-        </p:txBody>
-      </p:sp>
-      <p:sp>
-        <p:nvSpPr>
-          <p:cNvPr id="15" name="TextBox 14"/>
-          <p:cNvSpPr txBox="1"/>
-          <p:nvPr/>
-        </p:nvSpPr>
-        <p:spPr>
-          <a:xfrm>
-            <a:off x="4597298" y="2249424"/>
-            <a:ext cx="2997098" cy="640080"/>
-          </a:xfrm>
-          <a:prstGeom prst="rect">
-            <a:avLst/>
-          </a:prstGeom>
-          <a:noFill/>
-        </p:spPr>
-        <p:txBody>
-          <a:bodyPr wrap="square" anchor="t" lIns="0" rIns="0" tIns="0" bIns="0">
-            <a:noAutofit/>
-          </a:bodyPr>
-          <a:lstStyle/>
-          <a:p>
-            <a:pPr algn="l">
-              <a:lnSpc>
-                <a:spcPct val="110000"/>
-              </a:lnSpc>
-              <a:spcAft>
-                <a:spcPts val="0"/>
-              </a:spcAft>
-            </a:pPr>
-            <a:r>
-              <a:rPr sz="1700" b="1">
-                <a:solidFill>
-                  <a:srgbClr val="121C2B"/>
-                </a:solidFill>
-                <a:latin typeface="Poppins"/>
-              </a:rPr>
-              <a:t>Sent over, or walked through</a:t>
-            </a:r>
-          </a:p>
-        </p:txBody>
-      </p:sp>
-      <p:sp>
-        <p:nvSpPr>
-          <p:cNvPr id="16" name="TextBox 15"/>
-          <p:cNvSpPr txBox="1"/>
-          <p:nvPr/>
-        </p:nvSpPr>
-        <p:spPr>
-          <a:xfrm>
-            <a:off x="4597298" y="2926080"/>
-            <a:ext cx="2997098" cy="1444752"/>
-          </a:xfrm>
-          <a:prstGeom prst="rect">
-            <a:avLst/>
-          </a:prstGeom>
-          <a:noFill/>
-        </p:spPr>
-        <p:txBody>
-          <a:bodyPr wrap="square" anchor="t" lIns="0" rIns="0" tIns="0" bIns="0">
-            <a:noAutofit/>
-          </a:bodyPr>
-          <a:lstStyle/>
-          <a:p>
-            <a:pPr algn="l">
-              <a:lnSpc>
-                <a:spcPct val="128000"/>
-              </a:lnSpc>
-              <a:spcAft>
-                <a:spcPts val="700"/>
-              </a:spcAft>
-            </a:pPr>
-            <a:r>
-              <a:rPr sz="1150" b="0">
-                <a:solidFill>
-                  <a:srgbClr val="6B7280"/>
-                </a:solidFill>
-                <a:latin typeface="Inter"/>
-              </a:rPr>
-              <a:t>Whether you would rather have the dashboard first and meet after, or meet and go through it together.</a:t>
-            </a:r>
-          </a:p>
-        </p:txBody>
-      </p:sp>
-      <p:sp>
-        <p:nvSpPr>
-          <p:cNvPr id="17" name="Rectangle 16"/>
-          <p:cNvSpPr/>
-          <p:nvPr/>
-        </p:nvSpPr>
-        <p:spPr>
-          <a:xfrm>
-            <a:off x="8060740" y="1719072"/>
-            <a:ext cx="3472586" cy="2834640"/>
-          </a:xfrm>
-          <a:prstGeom prst="rect">
-            <a:avLst/>
-          </a:prstGeom>
-          <a:solidFill>
-            <a:srgbClr val="FFFFFF"/>
-          </a:solidFill>
-          <a:ln w="12700">
-            <a:solidFill>
-              <a:srgbClr val="E7E0D4"/>
-            </a:solidFill>
-          </a:ln>
-          <a:effectLst/>
-        </p:spPr>
-        <p:style>
-          <a:lnRef idx="1">
-            <a:schemeClr val="accent1"/>
-          </a:lnRef>
-          <a:fillRef idx="3">
-            <a:schemeClr val="accent1"/>
-          </a:fillRef>
-          <a:effectRef idx="2">
-            <a:schemeClr val="accent1"/>
-          </a:effectRef>
-          <a:fontRef idx="minor">
-            <a:schemeClr val="lt1"/>
-          </a:fontRef>
-        </p:style>
-        <p:txBody>
-          <a:bodyPr rtlCol="0" anchor="ctr"/>
-          <a:lstStyle/>
-          <a:p>
-            <a:pPr algn="ctr"/>
-          </a:p>
-        </p:txBody>
-      </p:sp>
-      <p:sp>
-        <p:nvSpPr>
-          <p:cNvPr id="18" name="Rectangle 17"/>
-          <p:cNvSpPr/>
-          <p:nvPr/>
-        </p:nvSpPr>
-        <p:spPr>
-          <a:xfrm>
-            <a:off x="8060740" y="1719072"/>
-            <a:ext cx="3472586" cy="50800"/>
-          </a:xfrm>
-          <a:prstGeom prst="rect">
-            <a:avLst/>
-          </a:prstGeom>
-          <a:solidFill>
-            <a:srgbClr val="121C2B"/>
-          </a:solidFill>
-          <a:ln>
-            <a:noFill/>
-          </a:ln>
-          <a:effectLst/>
-        </p:spPr>
-        <p:style>
-          <a:lnRef idx="1">
-            <a:schemeClr val="accent1"/>
-          </a:lnRef>
-          <a:fillRef idx="3">
-            <a:schemeClr val="accent1"/>
-          </a:fillRef>
-          <a:effectRef idx="2">
-            <a:schemeClr val="accent1"/>
-          </a:effectRef>
-          <a:fontRef idx="minor">
-            <a:schemeClr val="lt1"/>
-          </a:fontRef>
-        </p:style>
-        <p:txBody>
-          <a:bodyPr rtlCol="0" anchor="ctr"/>
-          <a:lstStyle/>
-          <a:p>
-            <a:pPr algn="ctr"/>
-          </a:p>
-        </p:txBody>
-      </p:sp>
-      <p:sp>
-        <p:nvSpPr>
-          <p:cNvPr id="19" name="TextBox 18"/>
-          <p:cNvSpPr txBox="1"/>
-          <p:nvPr/>
-        </p:nvSpPr>
-        <p:spPr>
-          <a:xfrm>
-            <a:off x="8298484" y="1975104"/>
-            <a:ext cx="2997098" cy="201168"/>
-          </a:xfrm>
-          <a:prstGeom prst="rect">
-            <a:avLst/>
-          </a:prstGeom>
-          <a:noFill/>
-        </p:spPr>
-        <p:txBody>
-          <a:bodyPr wrap="square" anchor="t" lIns="0" rIns="0" tIns="0" bIns="0">
-            <a:noAutofit/>
-          </a:bodyPr>
-          <a:lstStyle/>
-          <a:p>
-            <a:pPr algn="l">
-              <a:lnSpc>
-                <a:spcPct val="115000"/>
-              </a:lnSpc>
-              <a:spcAft>
-                <a:spcPts val="0"/>
-              </a:spcAft>
-            </a:pPr>
-            <a:r>
-              <a:rPr sz="950" b="1">
-                <a:solidFill>
-                  <a:srgbClr val="121C2B"/>
-                </a:solidFill>
-                <a:latin typeface="Poppins"/>
-              </a:rPr>
-              <a:t>THREE</a:t>
-            </a:r>
-          </a:p>
-        </p:txBody>
-      </p:sp>
-      <p:sp>
-        <p:nvSpPr>
-          <p:cNvPr id="20" name="TextBox 19"/>
-          <p:cNvSpPr txBox="1"/>
-          <p:nvPr/>
-        </p:nvSpPr>
-        <p:spPr>
-          <a:xfrm>
-            <a:off x="8298484" y="2249424"/>
-            <a:ext cx="2997098" cy="640080"/>
-          </a:xfrm>
-          <a:prstGeom prst="rect">
-            <a:avLst/>
-          </a:prstGeom>
-          <a:noFill/>
-        </p:spPr>
-        <p:txBody>
-          <a:bodyPr wrap="square" anchor="t" lIns="0" rIns="0" tIns="0" bIns="0">
-            <a:noAutofit/>
-          </a:bodyPr>
-          <a:lstStyle/>
-          <a:p>
-            <a:pPr algn="l">
-              <a:lnSpc>
-                <a:spcPct val="110000"/>
-              </a:lnSpc>
-              <a:spcAft>
-                <a:spcPts val="0"/>
-              </a:spcAft>
-            </a:pPr>
-            <a:r>
-              <a:rPr sz="1700" b="1">
-                <a:solidFill>
-                  <a:srgbClr val="121C2B"/>
-                </a:solidFill>
-                <a:latin typeface="Poppins"/>
-              </a:rPr>
-              <a:t>Whether Sussex Emmaus want benefits</a:t>
-            </a:r>
-          </a:p>
-        </p:txBody>
-      </p:sp>
-      <p:sp>
-        <p:nvSpPr>
-          <p:cNvPr id="21" name="TextBox 20"/>
-          <p:cNvSpPr txBox="1"/>
-          <p:nvPr/>
-        </p:nvSpPr>
-        <p:spPr>
-          <a:xfrm>
-            <a:off x="8298484" y="2926080"/>
-            <a:ext cx="2997098" cy="1444752"/>
-          </a:xfrm>
-          <a:prstGeom prst="rect">
-            <a:avLst/>
-          </a:prstGeom>
-          <a:noFill/>
-        </p:spPr>
-        <p:txBody>
-          <a:bodyPr wrap="square" anchor="t" lIns="0" rIns="0" tIns="0" bIns="0">
-            <a:noAutofit/>
-          </a:bodyPr>
-          <a:lstStyle/>
-          <a:p>
-            <a:pPr algn="l">
-              <a:lnSpc>
-                <a:spcPct val="128000"/>
-              </a:lnSpc>
-              <a:spcAft>
-                <a:spcPts val="700"/>
-              </a:spcAft>
-            </a:pPr>
-            <a:r>
-              <a:rPr sz="1150" b="0">
-                <a:solidFill>
-                  <a:srgbClr val="6B7280"/>
-                </a:solidFill>
-                <a:latin typeface="Inter"/>
-              </a:rPr>
-              <a:t>A yes or no is enough for now.</a:t>
-            </a:r>
-          </a:p>
-          <a:p>
-            <a:pPr algn="l">
-              <a:lnSpc>
-                <a:spcPct val="128000"/>
-              </a:lnSpc>
-              <a:spcAft>
-                <a:spcPts val="700"/>
-              </a:spcAft>
-            </a:pPr>
-            <a:r>
-              <a:rPr sz="1150" b="0">
-                <a:solidFill>
-                  <a:srgbClr val="6B7280"/>
-                </a:solidFill>
-                <a:latin typeface="Inter"/>
-              </a:rPr>
-              <a:t>We can chase the detail once the pay side is live.</a:t>
-            </a:r>
-          </a:p>
-        </p:txBody>
-      </p:sp>
-      <p:sp>
-        <p:nvSpPr>
-          <p:cNvPr id="22" name="Rectangle 21"/>
-          <p:cNvSpPr/>
-          <p:nvPr/>
-        </p:nvSpPr>
-        <p:spPr>
-          <a:xfrm>
-            <a:off x="658368" y="4846320"/>
-            <a:ext cx="10874959" cy="841248"/>
-          </a:xfrm>
-          <a:prstGeom prst="rect">
-            <a:avLst/>
-          </a:prstGeom>
-          <a:solidFill>
-            <a:srgbClr val="E8D8CE"/>
-          </a:solidFill>
-          <a:ln>
-            <a:noFill/>
-          </a:ln>
-          <a:effectLst/>
-        </p:spPr>
-        <p:style>
-          <a:lnRef idx="1">
-            <a:schemeClr val="accent1"/>
-          </a:lnRef>
-          <a:fillRef idx="3">
-            <a:schemeClr val="accent1"/>
-          </a:fillRef>
-          <a:effectRef idx="2">
-            <a:schemeClr val="accent1"/>
-          </a:effectRef>
-          <a:fontRef idx="minor">
-            <a:schemeClr val="lt1"/>
-          </a:fontRef>
-        </p:style>
-        <p:txBody>
-          <a:bodyPr rtlCol="0" anchor="ctr"/>
-          <a:lstStyle/>
-          <a:p>
-            <a:pPr algn="ctr"/>
-          </a:p>
-        </p:txBody>
-      </p:sp>
-      <p:sp>
-        <p:nvSpPr>
-          <p:cNvPr id="23" name="Rectangle 22"/>
-          <p:cNvSpPr/>
-          <p:nvPr/>
-        </p:nvSpPr>
-        <p:spPr>
-          <a:xfrm>
-            <a:off x="658368" y="4846320"/>
-            <a:ext cx="50800" cy="841248"/>
-          </a:xfrm>
-          <a:prstGeom prst="rect">
-            <a:avLst/>
-          </a:prstGeom>
-          <a:solidFill>
-            <a:srgbClr val="B0603F"/>
-          </a:solidFill>
-          <a:ln>
-            <a:noFill/>
-          </a:ln>
-          <a:effectLst/>
-        </p:spPr>
-        <p:style>
-          <a:lnRef idx="1">
-            <a:schemeClr val="accent1"/>
-          </a:lnRef>
-          <a:fillRef idx="3">
-            <a:schemeClr val="accent1"/>
-          </a:fillRef>
-          <a:effectRef idx="2">
-            <a:schemeClr val="accent1"/>
-          </a:effectRef>
-          <a:fontRef idx="minor">
-            <a:schemeClr val="lt1"/>
-          </a:fontRef>
-        </p:style>
-        <p:txBody>
-          <a:bodyPr rtlCol="0" anchor="ctr"/>
-          <a:lstStyle/>
-          <a:p>
-            <a:pPr algn="ctr"/>
-          </a:p>
-        </p:txBody>
-      </p:sp>
-      <p:sp>
-        <p:nvSpPr>
-          <p:cNvPr id="24" name="TextBox 23"/>
-          <p:cNvSpPr txBox="1"/>
-          <p:nvPr/>
-        </p:nvSpPr>
-        <p:spPr>
-          <a:xfrm>
-            <a:off x="950976" y="5120640"/>
-            <a:ext cx="10607040" cy="292608"/>
-          </a:xfrm>
-          <a:prstGeom prst="rect">
-            <a:avLst/>
-          </a:prstGeom>
-          <a:noFill/>
-        </p:spPr>
-        <p:txBody>
-          <a:bodyPr wrap="square" anchor="t" lIns="0" rIns="0" tIns="0" bIns="0">
-            <a:noAutofit/>
-          </a:bodyPr>
-          <a:lstStyle/>
-          <a:p>
-            <a:pPr algn="l">
-              <a:lnSpc>
-                <a:spcPct val="115000"/>
-              </a:lnSpc>
-              <a:spcAft>
-                <a:spcPts val="0"/>
-              </a:spcAft>
-            </a:pPr>
-            <a:r>
-              <a:rPr sz="1250" b="0">
-                <a:solidFill>
-                  <a:srgbClr val="6B4436"/>
-                </a:solidFill>
-                <a:latin typeface="Inter"/>
-              </a:rPr>
-              <a:t>Anything else, just email </a:t>
-            </a:r>
-          </a:p>
-        </p:txBody>
-      </p:sp>
-      <p:sp>
-        <p:nvSpPr>
-          <p:cNvPr id="25" name="TextBox 24"/>
-          <p:cNvSpPr txBox="1"/>
-          <p:nvPr/>
-        </p:nvSpPr>
-        <p:spPr>
-          <a:xfrm>
-            <a:off x="2871216" y="5120640"/>
-            <a:ext cx="5486400" cy="292608"/>
-          </a:xfrm>
-          <a:prstGeom prst="rect">
-            <a:avLst/>
-          </a:prstGeom>
-          <a:noFill/>
-        </p:spPr>
-        <p:txBody>
-          <a:bodyPr wrap="square" anchor="t" lIns="0" rIns="0" tIns="0" bIns="0">
-            <a:noAutofit/>
-          </a:bodyPr>
-          <a:lstStyle/>
-          <a:p>
-            <a:pPr algn="l">
-              <a:lnSpc>
-                <a:spcPct val="115000"/>
-              </a:lnSpc>
-              <a:spcAft>
-                <a:spcPts val="0"/>
-              </a:spcAft>
-            </a:pPr>
-            <a:r>
-              <a:rPr sz="1250" b="1">
-                <a:solidFill>
-                  <a:srgbClr val="B0603F"/>
-                </a:solidFill>
-                <a:latin typeface="Inter"/>
-              </a:rPr>
-              <a:t>hello@twentysixconsulting.co.uk</a:t>
-            </a:r>
-          </a:p>
-        </p:txBody>
-      </p:sp>
-      <p:sp>
-        <p:nvSpPr>
-          <p:cNvPr id="26" name="TextBox 25"/>
-          <p:cNvSpPr txBox="1"/>
-          <p:nvPr/>
-        </p:nvSpPr>
-        <p:spPr>
-          <a:xfrm>
-            <a:off x="658368" y="6455664"/>
-            <a:ext cx="6400800" cy="219456"/>
-          </a:xfrm>
-          <a:prstGeom prst="rect">
-            <a:avLst/>
-          </a:prstGeom>
-          <a:noFill/>
-        </p:spPr>
-        <p:txBody>
-          <a:bodyPr wrap="square" anchor="t" lIns="0" rIns="0" tIns="0" bIns="0">
-            <a:noAutofit/>
-          </a:bodyPr>
-          <a:lstStyle/>
-          <a:p>
-            <a:pPr algn="l">
-              <a:lnSpc>
-                <a:spcPct val="115000"/>
-              </a:lnSpc>
-              <a:spcAft>
-                <a:spcPts val="0"/>
-              </a:spcAft>
-            </a:pPr>
-            <a:r>
-              <a:rPr sz="850" b="0">
-                <a:solidFill>
-                  <a:srgbClr val="9AA1AC"/>
-                </a:solidFill>
-                <a:latin typeface="Inter"/>
-              </a:rPr>
-              <a:t>Sussex Emmaus · Zigbert · September 2026</a:t>
-            </a:r>
-          </a:p>
-        </p:txBody>
-      </p:sp>
-      <p:sp>
-        <p:nvSpPr>
-          <p:cNvPr id="27" name="TextBox 26"/>
-          <p:cNvSpPr txBox="1"/>
-          <p:nvPr/>
-        </p:nvSpPr>
-        <p:spPr>
-          <a:xfrm>
-            <a:off x="10618927" y="6455664"/>
-            <a:ext cx="914400" cy="219456"/>
-          </a:xfrm>
-          <a:prstGeom prst="rect">
-            <a:avLst/>
-          </a:prstGeom>
-          <a:noFill/>
-        </p:spPr>
-        <p:txBody>
-          <a:bodyPr wrap="square" anchor="t" lIns="0" rIns="0" tIns="0" bIns="0">
-            <a:noAutofit/>
-          </a:bodyPr>
-          <a:lstStyle/>
-          <a:p>
-            <a:pPr algn="r">
-              <a:lnSpc>
-                <a:spcPct val="115000"/>
-              </a:lnSpc>
-              <a:spcAft>
-                <a:spcPts val="0"/>
-              </a:spcAft>
-            </a:pPr>
-            <a:r>
-              <a:rPr sz="850" b="0">
-                <a:solidFill>
-                  <a:srgbClr val="9AA1AC"/>
-                </a:solidFill>
-                <a:latin typeface="Inter"/>
-              </a:rPr>
-              <a:t>6</a:t>
             </a:r>
           </a:p>
         </p:txBody>
